--- a/04_OSM Power to Form Students/图解说明.pptx
+++ b/04_OSM Power to Form Students/图解说明.pptx
@@ -5,19 +5,22 @@
     <p:sldMasterId id="2147483648" r:id="rId1"/>
   </p:sldMasterIdLst>
   <p:sldIdLst>
-    <p:sldId id="256" r:id="rId7"/>
-    <p:sldId id="257" r:id="rId8"/>
-    <p:sldId id="258" r:id="rId9"/>
-    <p:sldId id="259" r:id="rId10"/>
-    <p:sldId id="260" r:id="rId11"/>
-    <p:sldId id="261" r:id="rId12"/>
-    <p:sldId id="262" r:id="rId13"/>
-    <p:sldId id="263" r:id="rId14"/>
-    <p:sldId id="264" r:id="rId15"/>
-    <p:sldId id="265" r:id="rId16"/>
-    <p:sldId id="266" r:id="rId17"/>
+    <p:sldId id="256" r:id="rId2"/>
+    <p:sldId id="268" r:id="rId3"/>
+    <p:sldId id="269" r:id="rId4"/>
+    <p:sldId id="257" r:id="rId5"/>
+    <p:sldId id="267" r:id="rId6"/>
+    <p:sldId id="258" r:id="rId7"/>
+    <p:sldId id="259" r:id="rId8"/>
+    <p:sldId id="260" r:id="rId9"/>
+    <p:sldId id="261" r:id="rId10"/>
+    <p:sldId id="262" r:id="rId11"/>
+    <p:sldId id="263" r:id="rId12"/>
+    <p:sldId id="264" r:id="rId13"/>
+    <p:sldId id="265" r:id="rId14"/>
+    <p:sldId id="266" r:id="rId15"/>
   </p:sldIdLst>
-  <p:sldSz cx="12191695" cy="6858000" type="screen4x3"/>
+  <p:sldSz cx="12192000" cy="6858000"/>
   <p:notesSz cx="6858000" cy="9144000"/>
   <p:defaultTextStyle>
     <a:defPPr>
@@ -114,6 +117,22 @@
       </a:defRPr>
     </a:lvl9pPr>
   </p:defaultTextStyle>
+  <p:extLst>
+    <p:ext uri="{EFAFB233-063F-42B5-8137-9DF3F51BA10A}">
+      <p15:sldGuideLst xmlns:p15="http://schemas.microsoft.com/office/powerpoint/2012/main">
+        <p15:guide id="1" orient="horz" pos="2160">
+          <p15:clr>
+            <a:srgbClr val="A4A3A4"/>
+          </p15:clr>
+        </p15:guide>
+        <p15:guide id="2" pos="2880">
+          <p15:clr>
+            <a:srgbClr val="A4A3A4"/>
+          </p15:clr>
+        </p15:guide>
+      </p15:sldGuideLst>
+    </p:ext>
+  </p:extLst>
 </p:presentation>
 </file>
 
@@ -155,10 +174,9 @@
           <a:lstStyle/>
           <a:p>
             <a:r>
-              <a:rPr lang="en-US" smtClean="0"/>
+              <a:rPr lang="en-US"/>
               <a:t>Click to edit Master title style</a:t>
             </a:r>
-            <a:endParaRPr lang="en-US"/>
           </a:p>
         </p:txBody>
       </p:sp>
@@ -274,10 +292,9 @@
           </a:lstStyle>
           <a:p>
             <a:r>
-              <a:rPr lang="en-US" smtClean="0"/>
+              <a:rPr lang="en-US"/>
               <a:t>Click to edit Master subtitle style</a:t>
             </a:r>
-            <a:endParaRPr lang="en-US"/>
           </a:p>
         </p:txBody>
       </p:sp>
@@ -298,7 +315,7 @@
           <a:p>
             <a:fld id="{5BCAD085-E8A6-8845-BD4E-CB4CCA059FC4}" type="datetimeFigureOut">
               <a:rPr lang="en-US" smtClean="0"/>
-              <a:t>1/27/13</a:t>
+              <a:t>6/30/2026</a:t>
             </a:fld>
             <a:endParaRPr lang="en-US"/>
           </a:p>
@@ -392,10 +409,9 @@
           <a:lstStyle/>
           <a:p>
             <a:r>
-              <a:rPr lang="en-US" smtClean="0"/>
+              <a:rPr lang="en-US"/>
               <a:t>Click to edit Master title style</a:t>
             </a:r>
-            <a:endParaRPr lang="en-US"/>
           </a:p>
         </p:txBody>
       </p:sp>
@@ -416,38 +432,37 @@
           <a:p>
             <a:pPr lvl="0"/>
             <a:r>
-              <a:rPr lang="en-US" smtClean="0"/>
+              <a:rPr lang="en-US"/>
               <a:t>Click to edit Master text styles</a:t>
             </a:r>
           </a:p>
           <a:p>
             <a:pPr lvl="1"/>
             <a:r>
-              <a:rPr lang="en-US" smtClean="0"/>
+              <a:rPr lang="en-US"/>
               <a:t>Second level</a:t>
             </a:r>
           </a:p>
           <a:p>
             <a:pPr lvl="2"/>
             <a:r>
-              <a:rPr lang="en-US" smtClean="0"/>
+              <a:rPr lang="en-US"/>
               <a:t>Third level</a:t>
             </a:r>
           </a:p>
           <a:p>
             <a:pPr lvl="3"/>
             <a:r>
-              <a:rPr lang="en-US" smtClean="0"/>
+              <a:rPr lang="en-US"/>
               <a:t>Fourth level</a:t>
             </a:r>
           </a:p>
           <a:p>
             <a:pPr lvl="4"/>
             <a:r>
-              <a:rPr lang="en-US" smtClean="0"/>
+              <a:rPr lang="en-US"/>
               <a:t>Fifth level</a:t>
             </a:r>
-            <a:endParaRPr lang="en-US"/>
           </a:p>
         </p:txBody>
       </p:sp>
@@ -468,7 +483,7 @@
           <a:p>
             <a:fld id="{5BCAD085-E8A6-8845-BD4E-CB4CCA059FC4}" type="datetimeFigureOut">
               <a:rPr lang="en-US" smtClean="0"/>
-              <a:t>1/27/13</a:t>
+              <a:t>6/30/2026</a:t>
             </a:fld>
             <a:endParaRPr lang="en-US"/>
           </a:p>
@@ -567,10 +582,9 @@
           <a:lstStyle/>
           <a:p>
             <a:r>
-              <a:rPr lang="en-US" smtClean="0"/>
+              <a:rPr lang="en-US"/>
               <a:t>Click to edit Master title style</a:t>
             </a:r>
-            <a:endParaRPr lang="en-US"/>
           </a:p>
         </p:txBody>
       </p:sp>
@@ -596,38 +610,37 @@
           <a:p>
             <a:pPr lvl="0"/>
             <a:r>
-              <a:rPr lang="en-US" smtClean="0"/>
+              <a:rPr lang="en-US"/>
               <a:t>Click to edit Master text styles</a:t>
             </a:r>
           </a:p>
           <a:p>
             <a:pPr lvl="1"/>
             <a:r>
-              <a:rPr lang="en-US" smtClean="0"/>
+              <a:rPr lang="en-US"/>
               <a:t>Second level</a:t>
             </a:r>
           </a:p>
           <a:p>
             <a:pPr lvl="2"/>
             <a:r>
-              <a:rPr lang="en-US" smtClean="0"/>
+              <a:rPr lang="en-US"/>
               <a:t>Third level</a:t>
             </a:r>
           </a:p>
           <a:p>
             <a:pPr lvl="3"/>
             <a:r>
-              <a:rPr lang="en-US" smtClean="0"/>
+              <a:rPr lang="en-US"/>
               <a:t>Fourth level</a:t>
             </a:r>
           </a:p>
           <a:p>
             <a:pPr lvl="4"/>
             <a:r>
-              <a:rPr lang="en-US" smtClean="0"/>
+              <a:rPr lang="en-US"/>
               <a:t>Fifth level</a:t>
             </a:r>
-            <a:endParaRPr lang="en-US"/>
           </a:p>
         </p:txBody>
       </p:sp>
@@ -648,7 +661,7 @@
           <a:p>
             <a:fld id="{5BCAD085-E8A6-8845-BD4E-CB4CCA059FC4}" type="datetimeFigureOut">
               <a:rPr lang="en-US" smtClean="0"/>
-              <a:t>1/27/13</a:t>
+              <a:t>6/30/2026</a:t>
             </a:fld>
             <a:endParaRPr lang="en-US"/>
           </a:p>
@@ -742,10 +755,9 @@
           <a:lstStyle/>
           <a:p>
             <a:r>
-              <a:rPr lang="en-US" smtClean="0"/>
+              <a:rPr lang="en-US"/>
               <a:t>Click to edit Master title style</a:t>
             </a:r>
-            <a:endParaRPr lang="en-US"/>
           </a:p>
         </p:txBody>
       </p:sp>
@@ -766,38 +778,37 @@
           <a:p>
             <a:pPr lvl="0"/>
             <a:r>
-              <a:rPr lang="en-US" smtClean="0"/>
+              <a:rPr lang="en-US"/>
               <a:t>Click to edit Master text styles</a:t>
             </a:r>
           </a:p>
           <a:p>
             <a:pPr lvl="1"/>
             <a:r>
-              <a:rPr lang="en-US" smtClean="0"/>
+              <a:rPr lang="en-US"/>
               <a:t>Second level</a:t>
             </a:r>
           </a:p>
           <a:p>
             <a:pPr lvl="2"/>
             <a:r>
-              <a:rPr lang="en-US" smtClean="0"/>
+              <a:rPr lang="en-US"/>
               <a:t>Third level</a:t>
             </a:r>
           </a:p>
           <a:p>
             <a:pPr lvl="3"/>
             <a:r>
-              <a:rPr lang="en-US" smtClean="0"/>
+              <a:rPr lang="en-US"/>
               <a:t>Fourth level</a:t>
             </a:r>
           </a:p>
           <a:p>
             <a:pPr lvl="4"/>
             <a:r>
-              <a:rPr lang="en-US" smtClean="0"/>
+              <a:rPr lang="en-US"/>
               <a:t>Fifth level</a:t>
             </a:r>
-            <a:endParaRPr lang="en-US"/>
           </a:p>
         </p:txBody>
       </p:sp>
@@ -818,7 +829,7 @@
           <a:p>
             <a:fld id="{5BCAD085-E8A6-8845-BD4E-CB4CCA059FC4}" type="datetimeFigureOut">
               <a:rPr lang="en-US" smtClean="0"/>
-              <a:t>1/27/13</a:t>
+              <a:t>6/30/2026</a:t>
             </a:fld>
             <a:endParaRPr lang="en-US"/>
           </a:p>
@@ -921,10 +932,9 @@
           </a:lstStyle>
           <a:p>
             <a:r>
-              <a:rPr lang="en-US" smtClean="0"/>
+              <a:rPr lang="en-US"/>
               <a:t>Click to edit Master title style</a:t>
             </a:r>
-            <a:endParaRPr lang="en-US"/>
           </a:p>
         </p:txBody>
       </p:sp>
@@ -1041,7 +1051,7 @@
           <a:p>
             <a:pPr lvl="0"/>
             <a:r>
-              <a:rPr lang="en-US" smtClean="0"/>
+              <a:rPr lang="en-US"/>
               <a:t>Click to edit Master text styles</a:t>
             </a:r>
           </a:p>
@@ -1064,7 +1074,7 @@
           <a:p>
             <a:fld id="{5BCAD085-E8A6-8845-BD4E-CB4CCA059FC4}" type="datetimeFigureOut">
               <a:rPr lang="en-US" smtClean="0"/>
-              <a:t>1/27/13</a:t>
+              <a:t>6/30/2026</a:t>
             </a:fld>
             <a:endParaRPr lang="en-US"/>
           </a:p>
@@ -1158,10 +1168,9 @@
           <a:lstStyle/>
           <a:p>
             <a:r>
-              <a:rPr lang="en-US" smtClean="0"/>
+              <a:rPr lang="en-US"/>
               <a:t>Click to edit Master title style</a:t>
             </a:r>
-            <a:endParaRPr lang="en-US"/>
           </a:p>
         </p:txBody>
       </p:sp>
@@ -1215,38 +1224,37 @@
           <a:p>
             <a:pPr lvl="0"/>
             <a:r>
-              <a:rPr lang="en-US" smtClean="0"/>
+              <a:rPr lang="en-US"/>
               <a:t>Click to edit Master text styles</a:t>
             </a:r>
           </a:p>
           <a:p>
             <a:pPr lvl="1"/>
             <a:r>
-              <a:rPr lang="en-US" smtClean="0"/>
+              <a:rPr lang="en-US"/>
               <a:t>Second level</a:t>
             </a:r>
           </a:p>
           <a:p>
             <a:pPr lvl="2"/>
             <a:r>
-              <a:rPr lang="en-US" smtClean="0"/>
+              <a:rPr lang="en-US"/>
               <a:t>Third level</a:t>
             </a:r>
           </a:p>
           <a:p>
             <a:pPr lvl="3"/>
             <a:r>
-              <a:rPr lang="en-US" smtClean="0"/>
+              <a:rPr lang="en-US"/>
               <a:t>Fourth level</a:t>
             </a:r>
           </a:p>
           <a:p>
             <a:pPr lvl="4"/>
             <a:r>
-              <a:rPr lang="en-US" smtClean="0"/>
+              <a:rPr lang="en-US"/>
               <a:t>Fifth level</a:t>
             </a:r>
-            <a:endParaRPr lang="en-US"/>
           </a:p>
         </p:txBody>
       </p:sp>
@@ -1300,38 +1308,37 @@
           <a:p>
             <a:pPr lvl="0"/>
             <a:r>
-              <a:rPr lang="en-US" smtClean="0"/>
+              <a:rPr lang="en-US"/>
               <a:t>Click to edit Master text styles</a:t>
             </a:r>
           </a:p>
           <a:p>
             <a:pPr lvl="1"/>
             <a:r>
-              <a:rPr lang="en-US" smtClean="0"/>
+              <a:rPr lang="en-US"/>
               <a:t>Second level</a:t>
             </a:r>
           </a:p>
           <a:p>
             <a:pPr lvl="2"/>
             <a:r>
-              <a:rPr lang="en-US" smtClean="0"/>
+              <a:rPr lang="en-US"/>
               <a:t>Third level</a:t>
             </a:r>
           </a:p>
           <a:p>
             <a:pPr lvl="3"/>
             <a:r>
-              <a:rPr lang="en-US" smtClean="0"/>
+              <a:rPr lang="en-US"/>
               <a:t>Fourth level</a:t>
             </a:r>
           </a:p>
           <a:p>
             <a:pPr lvl="4"/>
             <a:r>
-              <a:rPr lang="en-US" smtClean="0"/>
+              <a:rPr lang="en-US"/>
               <a:t>Fifth level</a:t>
             </a:r>
-            <a:endParaRPr lang="en-US"/>
           </a:p>
         </p:txBody>
       </p:sp>
@@ -1352,7 +1359,7 @@
           <a:p>
             <a:fld id="{5BCAD085-E8A6-8845-BD4E-CB4CCA059FC4}" type="datetimeFigureOut">
               <a:rPr lang="en-US" smtClean="0"/>
-              <a:t>1/27/13</a:t>
+              <a:t>6/30/2026</a:t>
             </a:fld>
             <a:endParaRPr lang="en-US"/>
           </a:p>
@@ -1450,10 +1457,9 @@
           </a:lstStyle>
           <a:p>
             <a:r>
-              <a:rPr lang="en-US" smtClean="0"/>
+              <a:rPr lang="en-US"/>
               <a:t>Click to edit Master title style</a:t>
             </a:r>
-            <a:endParaRPr lang="en-US"/>
           </a:p>
         </p:txBody>
       </p:sp>
@@ -1516,7 +1522,7 @@
           <a:p>
             <a:pPr lvl="0"/>
             <a:r>
-              <a:rPr lang="en-US" smtClean="0"/>
+              <a:rPr lang="en-US"/>
               <a:t>Click to edit Master text styles</a:t>
             </a:r>
           </a:p>
@@ -1572,38 +1578,37 @@
           <a:p>
             <a:pPr lvl="0"/>
             <a:r>
-              <a:rPr lang="en-US" smtClean="0"/>
+              <a:rPr lang="en-US"/>
               <a:t>Click to edit Master text styles</a:t>
             </a:r>
           </a:p>
           <a:p>
             <a:pPr lvl="1"/>
             <a:r>
-              <a:rPr lang="en-US" smtClean="0"/>
+              <a:rPr lang="en-US"/>
               <a:t>Second level</a:t>
             </a:r>
           </a:p>
           <a:p>
             <a:pPr lvl="2"/>
             <a:r>
-              <a:rPr lang="en-US" smtClean="0"/>
+              <a:rPr lang="en-US"/>
               <a:t>Third level</a:t>
             </a:r>
           </a:p>
           <a:p>
             <a:pPr lvl="3"/>
             <a:r>
-              <a:rPr lang="en-US" smtClean="0"/>
+              <a:rPr lang="en-US"/>
               <a:t>Fourth level</a:t>
             </a:r>
           </a:p>
           <a:p>
             <a:pPr lvl="4"/>
             <a:r>
-              <a:rPr lang="en-US" smtClean="0"/>
+              <a:rPr lang="en-US"/>
               <a:t>Fifth level</a:t>
             </a:r>
-            <a:endParaRPr lang="en-US"/>
           </a:p>
         </p:txBody>
       </p:sp>
@@ -1666,7 +1671,7 @@
           <a:p>
             <a:pPr lvl="0"/>
             <a:r>
-              <a:rPr lang="en-US" smtClean="0"/>
+              <a:rPr lang="en-US"/>
               <a:t>Click to edit Master text styles</a:t>
             </a:r>
           </a:p>
@@ -1722,38 +1727,37 @@
           <a:p>
             <a:pPr lvl="0"/>
             <a:r>
-              <a:rPr lang="en-US" smtClean="0"/>
+              <a:rPr lang="en-US"/>
               <a:t>Click to edit Master text styles</a:t>
             </a:r>
           </a:p>
           <a:p>
             <a:pPr lvl="1"/>
             <a:r>
-              <a:rPr lang="en-US" smtClean="0"/>
+              <a:rPr lang="en-US"/>
               <a:t>Second level</a:t>
             </a:r>
           </a:p>
           <a:p>
             <a:pPr lvl="2"/>
             <a:r>
-              <a:rPr lang="en-US" smtClean="0"/>
+              <a:rPr lang="en-US"/>
               <a:t>Third level</a:t>
             </a:r>
           </a:p>
           <a:p>
             <a:pPr lvl="3"/>
             <a:r>
-              <a:rPr lang="en-US" smtClean="0"/>
+              <a:rPr lang="en-US"/>
               <a:t>Fourth level</a:t>
             </a:r>
           </a:p>
           <a:p>
             <a:pPr lvl="4"/>
             <a:r>
-              <a:rPr lang="en-US" smtClean="0"/>
+              <a:rPr lang="en-US"/>
               <a:t>Fifth level</a:t>
             </a:r>
-            <a:endParaRPr lang="en-US"/>
           </a:p>
         </p:txBody>
       </p:sp>
@@ -1774,7 +1778,7 @@
           <a:p>
             <a:fld id="{5BCAD085-E8A6-8845-BD4E-CB4CCA059FC4}" type="datetimeFigureOut">
               <a:rPr lang="en-US" smtClean="0"/>
-              <a:t>1/27/13</a:t>
+              <a:t>6/30/2026</a:t>
             </a:fld>
             <a:endParaRPr lang="en-US"/>
           </a:p>
@@ -1868,10 +1872,9 @@
           <a:lstStyle/>
           <a:p>
             <a:r>
-              <a:rPr lang="en-US" smtClean="0"/>
+              <a:rPr lang="en-US"/>
               <a:t>Click to edit Master title style</a:t>
             </a:r>
-            <a:endParaRPr lang="en-US"/>
           </a:p>
         </p:txBody>
       </p:sp>
@@ -1892,7 +1895,7 @@
           <a:p>
             <a:fld id="{5BCAD085-E8A6-8845-BD4E-CB4CCA059FC4}" type="datetimeFigureOut">
               <a:rPr lang="en-US" smtClean="0"/>
-              <a:t>1/27/13</a:t>
+              <a:t>6/30/2026</a:t>
             </a:fld>
             <a:endParaRPr lang="en-US"/>
           </a:p>
@@ -1987,7 +1990,7 @@
           <a:p>
             <a:fld id="{5BCAD085-E8A6-8845-BD4E-CB4CCA059FC4}" type="datetimeFigureOut">
               <a:rPr lang="en-US" smtClean="0"/>
-              <a:t>1/27/13</a:t>
+              <a:t>6/30/2026</a:t>
             </a:fld>
             <a:endParaRPr lang="en-US"/>
           </a:p>
@@ -2090,10 +2093,9 @@
           </a:lstStyle>
           <a:p>
             <a:r>
-              <a:rPr lang="en-US" smtClean="0"/>
+              <a:rPr lang="en-US"/>
               <a:t>Click to edit Master title style</a:t>
             </a:r>
-            <a:endParaRPr lang="en-US"/>
           </a:p>
         </p:txBody>
       </p:sp>
@@ -2147,38 +2149,37 @@
           <a:p>
             <a:pPr lvl="0"/>
             <a:r>
-              <a:rPr lang="en-US" smtClean="0"/>
+              <a:rPr lang="en-US"/>
               <a:t>Click to edit Master text styles</a:t>
             </a:r>
           </a:p>
           <a:p>
             <a:pPr lvl="1"/>
             <a:r>
-              <a:rPr lang="en-US" smtClean="0"/>
+              <a:rPr lang="en-US"/>
               <a:t>Second level</a:t>
             </a:r>
           </a:p>
           <a:p>
             <a:pPr lvl="2"/>
             <a:r>
-              <a:rPr lang="en-US" smtClean="0"/>
+              <a:rPr lang="en-US"/>
               <a:t>Third level</a:t>
             </a:r>
           </a:p>
           <a:p>
             <a:pPr lvl="3"/>
             <a:r>
-              <a:rPr lang="en-US" smtClean="0"/>
+              <a:rPr lang="en-US"/>
               <a:t>Fourth level</a:t>
             </a:r>
           </a:p>
           <a:p>
             <a:pPr lvl="4"/>
             <a:r>
-              <a:rPr lang="en-US" smtClean="0"/>
+              <a:rPr lang="en-US"/>
               <a:t>Fifth level</a:t>
             </a:r>
-            <a:endParaRPr lang="en-US"/>
           </a:p>
         </p:txBody>
       </p:sp>
@@ -2241,7 +2242,7 @@
           <a:p>
             <a:pPr lvl="0"/>
             <a:r>
-              <a:rPr lang="en-US" smtClean="0"/>
+              <a:rPr lang="en-US"/>
               <a:t>Click to edit Master text styles</a:t>
             </a:r>
           </a:p>
@@ -2264,7 +2265,7 @@
           <a:p>
             <a:fld id="{5BCAD085-E8A6-8845-BD4E-CB4CCA059FC4}" type="datetimeFigureOut">
               <a:rPr lang="en-US" smtClean="0"/>
-              <a:t>1/27/13</a:t>
+              <a:t>6/30/2026</a:t>
             </a:fld>
             <a:endParaRPr lang="en-US"/>
           </a:p>
@@ -2367,10 +2368,9 @@
           </a:lstStyle>
           <a:p>
             <a:r>
-              <a:rPr lang="en-US" smtClean="0"/>
+              <a:rPr lang="en-US"/>
               <a:t>Click to edit Master title style</a:t>
             </a:r>
-            <a:endParaRPr lang="en-US"/>
           </a:p>
         </p:txBody>
       </p:sp>
@@ -2494,7 +2494,7 @@
           <a:p>
             <a:pPr lvl="0"/>
             <a:r>
-              <a:rPr lang="en-US" smtClean="0"/>
+              <a:rPr lang="en-US"/>
               <a:t>Click to edit Master text styles</a:t>
             </a:r>
           </a:p>
@@ -2517,7 +2517,7 @@
           <a:p>
             <a:fld id="{5BCAD085-E8A6-8845-BD4E-CB4CCA059FC4}" type="datetimeFigureOut">
               <a:rPr lang="en-US" smtClean="0"/>
-              <a:t>1/27/13</a:t>
+              <a:t>6/30/2026</a:t>
             </a:fld>
             <a:endParaRPr lang="en-US"/>
           </a:p>
@@ -2626,10 +2626,9 @@
           <a:lstStyle/>
           <a:p>
             <a:r>
-              <a:rPr lang="en-US" smtClean="0"/>
+              <a:rPr lang="en-US"/>
               <a:t>Click to edit Master title style</a:t>
             </a:r>
-            <a:endParaRPr lang="en-US"/>
           </a:p>
         </p:txBody>
       </p:sp>
@@ -2660,38 +2659,37 @@
           <a:p>
             <a:pPr lvl="0"/>
             <a:r>
-              <a:rPr lang="en-US" smtClean="0"/>
+              <a:rPr lang="en-US"/>
               <a:t>Click to edit Master text styles</a:t>
             </a:r>
           </a:p>
           <a:p>
             <a:pPr lvl="1"/>
             <a:r>
-              <a:rPr lang="en-US" smtClean="0"/>
+              <a:rPr lang="en-US"/>
               <a:t>Second level</a:t>
             </a:r>
           </a:p>
           <a:p>
             <a:pPr lvl="2"/>
             <a:r>
-              <a:rPr lang="en-US" smtClean="0"/>
+              <a:rPr lang="en-US"/>
               <a:t>Third level</a:t>
             </a:r>
           </a:p>
           <a:p>
             <a:pPr lvl="3"/>
             <a:r>
-              <a:rPr lang="en-US" smtClean="0"/>
+              <a:rPr lang="en-US"/>
               <a:t>Fourth level</a:t>
             </a:r>
           </a:p>
           <a:p>
             <a:pPr lvl="4"/>
             <a:r>
-              <a:rPr lang="en-US" smtClean="0"/>
+              <a:rPr lang="en-US"/>
               <a:t>Fifth level</a:t>
             </a:r>
-            <a:endParaRPr lang="en-US"/>
           </a:p>
         </p:txBody>
       </p:sp>
@@ -2730,7 +2728,7 @@
           <a:p>
             <a:fld id="{5BCAD085-E8A6-8845-BD4E-CB4CCA059FC4}" type="datetimeFigureOut">
               <a:rPr lang="en-US" smtClean="0"/>
-              <a:t>1/27/13</a:t>
+              <a:t>6/30/2026</a:t>
             </a:fld>
             <a:endParaRPr lang="en-US"/>
           </a:p>
@@ -3089,7 +3087,7 @@
 </file>
 
 <file path=ppt/slides/slide1.xml><?xml version="1.0" encoding="utf-8"?>
-<p:sld xmlns:a="http://schemas.openxmlformats.org/drawingml/2006/main" xmlns:p="http://schemas.openxmlformats.org/presentationml/2006/main" xmlns:r="http://schemas.openxmlformats.org/officeDocument/2006/relationships">
+<p:sld xmlns:a="http://schemas.openxmlformats.org/drawingml/2006/main" xmlns:r="http://schemas.openxmlformats.org/officeDocument/2006/relationships" xmlns:p="http://schemas.openxmlformats.org/presentationml/2006/main">
   <p:cSld>
     <p:spTree>
       <p:nvGrpSpPr>
@@ -3097,7 +3095,14 @@
         <p:cNvGrpSpPr/>
         <p:nvPr/>
       </p:nvGrpSpPr>
-      <p:grpSpPr/>
+      <p:grpSpPr>
+        <a:xfrm>
+          <a:off x="0" y="0"/>
+          <a:ext cx="0" cy="0"/>
+          <a:chOff x="0" y="0"/>
+          <a:chExt cx="0" cy="0"/>
+        </a:xfrm>
+      </p:grpSpPr>
       <p:sp>
         <p:nvSpPr>
           <p:cNvPr id="2" name="Rectangle 1"/>
@@ -3139,6 +3144,7 @@
           <a:lstStyle/>
           <a:p>
             <a:pPr algn="ctr"/>
+            <a:endParaRPr/>
           </a:p>
         </p:txBody>
       </p:sp>
@@ -3183,6 +3189,7 @@
           <a:lstStyle/>
           <a:p>
             <a:pPr algn="ctr"/>
+            <a:endParaRPr/>
           </a:p>
         </p:txBody>
       </p:sp>
@@ -3203,7 +3210,7 @@
           <a:noFill/>
         </p:spPr>
         <p:txBody>
-          <a:bodyPr wrap="square" anchor="t" lIns="0" rIns="0" tIns="0" bIns="0">
+          <a:bodyPr wrap="square" lIns="0" tIns="0" rIns="0" bIns="0" anchor="t">
             <a:spAutoFit/>
           </a:bodyPr>
           <a:lstStyle/>
@@ -3247,7 +3254,7 @@
           <a:noFill/>
         </p:spPr>
         <p:txBody>
-          <a:bodyPr wrap="square" anchor="t" lIns="0" rIns="0" tIns="0" bIns="0">
+          <a:bodyPr wrap="square" lIns="0" tIns="0" rIns="0" bIns="0" anchor="t">
             <a:spAutoFit/>
           </a:bodyPr>
           <a:lstStyle/>
@@ -3291,7 +3298,7 @@
           <a:noFill/>
         </p:spPr>
         <p:txBody>
-          <a:bodyPr wrap="square" anchor="t" lIns="0" rIns="0" tIns="0" bIns="0">
+          <a:bodyPr wrap="square" lIns="0" tIns="0" rIns="0" bIns="0" anchor="t">
             <a:spAutoFit/>
           </a:bodyPr>
           <a:lstStyle/>
@@ -3380,6 +3387,7 @@
           <a:lstStyle/>
           <a:p>
             <a:pPr algn="ctr"/>
+            <a:endParaRPr/>
           </a:p>
         </p:txBody>
       </p:sp>
@@ -3400,7 +3408,7 @@
           <a:noFill/>
         </p:spPr>
         <p:txBody>
-          <a:bodyPr wrap="square" anchor="t" lIns="0" rIns="0" tIns="0" bIns="0">
+          <a:bodyPr wrap="square" lIns="0" tIns="0" rIns="0" bIns="0" anchor="t">
             <a:spAutoFit/>
           </a:bodyPr>
           <a:lstStyle/>
@@ -3444,7 +3452,7 @@
           <a:noFill/>
         </p:spPr>
         <p:txBody>
-          <a:bodyPr wrap="square" anchor="t" lIns="0" rIns="0" tIns="0" bIns="0">
+          <a:bodyPr wrap="square" lIns="0" tIns="0" rIns="0" bIns="0" anchor="t">
             <a:spAutoFit/>
           </a:bodyPr>
           <a:lstStyle/>
@@ -3480,7 +3488,7 @@
 </file>
 
 <file path=ppt/slides/slide10.xml><?xml version="1.0" encoding="utf-8"?>
-<p:sld xmlns:a="http://schemas.openxmlformats.org/drawingml/2006/main" xmlns:p="http://schemas.openxmlformats.org/presentationml/2006/main" xmlns:r="http://schemas.openxmlformats.org/officeDocument/2006/relationships">
+<p:sld xmlns:a="http://schemas.openxmlformats.org/drawingml/2006/main" xmlns:r="http://schemas.openxmlformats.org/officeDocument/2006/relationships" xmlns:p="http://schemas.openxmlformats.org/presentationml/2006/main">
   <p:cSld>
     <p:spTree>
       <p:nvGrpSpPr>
@@ -3488,7 +3496,14 @@
         <p:cNvGrpSpPr/>
         <p:nvPr/>
       </p:nvGrpSpPr>
-      <p:grpSpPr/>
+      <p:grpSpPr>
+        <a:xfrm>
+          <a:off x="0" y="0"/>
+          <a:ext cx="0" cy="0"/>
+          <a:chOff x="0" y="0"/>
+          <a:chExt cx="0" cy="0"/>
+        </a:xfrm>
+      </p:grpSpPr>
       <p:sp>
         <p:nvSpPr>
           <p:cNvPr id="2" name="Rectangle 1"/>
@@ -3530,6 +3545,7 @@
           <a:lstStyle/>
           <a:p>
             <a:pPr algn="ctr"/>
+            <a:endParaRPr/>
           </a:p>
         </p:txBody>
       </p:sp>
@@ -3550,7 +3566,7 @@
           <a:noFill/>
         </p:spPr>
         <p:txBody>
-          <a:bodyPr wrap="square" anchor="t" lIns="0" rIns="0" tIns="0" bIns="0">
+          <a:bodyPr wrap="square" lIns="0" tIns="0" rIns="0" bIns="0" anchor="t">
             <a:spAutoFit/>
           </a:bodyPr>
           <a:lstStyle/>
@@ -3572,7 +3588,7 @@
                 <a:ea typeface="Microsoft JhengHei"/>
                 <a:cs typeface="Microsoft JhengHei"/>
               </a:rPr>
-              <a:t>变成 3D</a:t>
+              <a:t>两种模式：守恒与增长</a:t>
             </a:r>
           </a:p>
         </p:txBody>
@@ -3592,7 +3608,7 @@
             <a:avLst/>
           </a:prstGeom>
           <a:solidFill>
-            <a:srgbClr val="FFB454"/>
+            <a:srgbClr val="FF6B6B"/>
           </a:solidFill>
           <a:ln>
             <a:noFill/>
@@ -3618,6 +3634,7 @@
           <a:lstStyle/>
           <a:p>
             <a:pPr algn="ctr"/>
+            <a:endParaRPr/>
           </a:p>
         </p:txBody>
       </p:sp>
@@ -3638,7 +3655,7 @@
           <a:noFill/>
         </p:spPr>
         <p:txBody>
-          <a:bodyPr wrap="square" anchor="t" lIns="0" rIns="0" tIns="0" bIns="0">
+          <a:bodyPr wrap="square" lIns="0" tIns="0" rIns="0" bIns="0" anchor="t">
             <a:spAutoFit/>
           </a:bodyPr>
           <a:lstStyle/>
@@ -3660,14 +3677,14 @@
                 <a:ea typeface="Microsoft JhengHei"/>
                 <a:cs typeface="Microsoft JhengHei"/>
               </a:rPr>
-              <a:t>3D MASSING</a:t>
+              <a:t>CONSERVE vs GROW</a:t>
             </a:r>
           </a:p>
         </p:txBody>
       </p:sp>
       <p:pic>
         <p:nvPicPr>
-          <p:cNvPr id="6" name="Picture 5" descr="massing3d.png"/>
+          <p:cNvPr id="6" name="Picture 5" descr="cake.png"/>
           <p:cNvPicPr>
             <a:picLocks noChangeAspect="1"/>
           </p:cNvPicPr>
@@ -3681,8 +3698,8 @@
         </p:blipFill>
         <p:spPr>
           <a:xfrm>
-            <a:off x="1325880" y="1554480"/>
-            <a:ext cx="4480560" cy="4480560"/>
+            <a:off x="2326824" y="1508760"/>
+            <a:ext cx="7507871" cy="3383280"/>
           </a:xfrm>
           <a:prstGeom prst="rect">
             <a:avLst/>
@@ -3697,8 +3714,8 @@
         </p:nvSpPr>
         <p:spPr>
           <a:xfrm>
-            <a:off x="6949440" y="1737360"/>
-            <a:ext cx="4754880" cy="4297680"/>
+            <a:off x="640080" y="5029200"/>
+            <a:ext cx="10881360" cy="1280160"/>
           </a:xfrm>
           <a:prstGeom prst="rect">
             <a:avLst/>
@@ -3706,7 +3723,7 @@
           <a:noFill/>
         </p:spPr>
         <p:txBody>
-          <a:bodyPr wrap="square" anchor="t" lIns="0" rIns="0" tIns="0" bIns="0">
+          <a:bodyPr wrap="square" lIns="0" tIns="0" rIns="0" bIns="0" anchor="t">
             <a:spAutoFit/>
           </a:bodyPr>
           <a:lstStyle/>
@@ -3720,7 +3737,7 @@
               </a:spcAft>
             </a:pPr>
             <a:r>
-              <a:rPr sz="1700" b="1">
+              <a:rPr sz="1600" b="1">
                 <a:solidFill>
                   <a:srgbClr val="F2F5FA"/>
                 </a:solidFill>
@@ -3728,20 +3745,20 @@
                 <a:ea typeface="Microsoft JhengHei"/>
                 <a:cs typeface="Microsoft JhengHei"/>
               </a:rPr>
-              <a:t>把占地按高度挤成立体量体，按角色上色。</a:t>
+              <a:t>守恒：像一块蛋糕重新切，总量不变，只是谁分得多。</a:t>
             </a:r>
           </a:p>
           <a:p>
             <a:pPr>
               <a:spcBef>
-                <a:spcPts val="1200"/>
+                <a:spcPts val="600"/>
               </a:spcBef>
               <a:spcAft>
                 <a:spcPts val="0"/>
               </a:spcAft>
             </a:pPr>
             <a:r>
-              <a:rPr sz="1700" b="1">
+              <a:rPr sz="1600" b="1">
                 <a:solidFill>
                   <a:srgbClr val="F2F5FA"/>
                 </a:solidFill>
@@ -3749,28 +3766,7 @@
                 <a:ea typeface="Microsoft JhengHei"/>
                 <a:cs typeface="Microsoft JhengHei"/>
               </a:rPr>
-              <a:t>可在页面里看，或导出给 Rhino / Blender。</a:t>
-            </a:r>
-          </a:p>
-          <a:p>
-            <a:pPr>
-              <a:spcBef>
-                <a:spcPts val="1200"/>
-              </a:spcBef>
-              <a:spcAft>
-                <a:spcPts val="0"/>
-              </a:spcAft>
-            </a:pPr>
-            <a:r>
-              <a:rPr sz="1700" b="1">
-                <a:solidFill>
-                  <a:srgbClr val="F2F5FA"/>
-                </a:solidFill>
-                <a:latin typeface="Microsoft JhengHei"/>
-                <a:ea typeface="Microsoft JhengHei"/>
-                <a:cs typeface="Microsoft JhengHei"/>
-              </a:rPr>
-              <a:t>导出不改占地，只改高度。</a:t>
+              <a:t>增长：在原有楼上加盖，总建筑量变多。</a:t>
             </a:r>
           </a:p>
         </p:txBody>
@@ -3816,6 +3812,7 @@
           <a:lstStyle/>
           <a:p>
             <a:pPr algn="ctr"/>
+            <a:endParaRPr/>
           </a:p>
         </p:txBody>
       </p:sp>
@@ -3836,7 +3833,7 @@
           <a:noFill/>
         </p:spPr>
         <p:txBody>
-          <a:bodyPr wrap="square" anchor="t" lIns="0" rIns="0" tIns="0" bIns="0">
+          <a:bodyPr wrap="square" lIns="0" tIns="0" rIns="0" bIns="0" anchor="t">
             <a:spAutoFit/>
           </a:bodyPr>
           <a:lstStyle/>
@@ -3880,7 +3877,7 @@
           <a:noFill/>
         </p:spPr>
         <p:txBody>
-          <a:bodyPr wrap="square" anchor="t" lIns="0" rIns="0" tIns="0" bIns="0">
+          <a:bodyPr wrap="square" lIns="0" tIns="0" rIns="0" bIns="0" anchor="t">
             <a:spAutoFit/>
           </a:bodyPr>
           <a:lstStyle/>
@@ -3902,7 +3899,7 @@
                 <a:ea typeface="Microsoft JhengHei"/>
                 <a:cs typeface="Microsoft JhengHei"/>
               </a:rPr>
-              <a:t>10</a:t>
+              <a:t>7</a:t>
             </a:r>
           </a:p>
         </p:txBody>
@@ -3916,7 +3913,7 @@
 </file>
 
 <file path=ppt/slides/slide11.xml><?xml version="1.0" encoding="utf-8"?>
-<p:sld xmlns:a="http://schemas.openxmlformats.org/drawingml/2006/main" xmlns:p="http://schemas.openxmlformats.org/presentationml/2006/main" xmlns:r="http://schemas.openxmlformats.org/officeDocument/2006/relationships">
+<p:sld xmlns:a="http://schemas.openxmlformats.org/drawingml/2006/main" xmlns:r="http://schemas.openxmlformats.org/officeDocument/2006/relationships" xmlns:p="http://schemas.openxmlformats.org/presentationml/2006/main">
   <p:cSld>
     <p:spTree>
       <p:nvGrpSpPr>
@@ -3924,7 +3921,14 @@
         <p:cNvGrpSpPr/>
         <p:nvPr/>
       </p:nvGrpSpPr>
-      <p:grpSpPr/>
+      <p:grpSpPr>
+        <a:xfrm>
+          <a:off x="0" y="0"/>
+          <a:ext cx="0" cy="0"/>
+          <a:chOff x="0" y="0"/>
+          <a:chExt cx="0" cy="0"/>
+        </a:xfrm>
+      </p:grpSpPr>
       <p:sp>
         <p:nvSpPr>
           <p:cNvPr id="2" name="Rectangle 1"/>
@@ -3966,6 +3970,7 @@
           <a:lstStyle/>
           <a:p>
             <a:pPr algn="ctr"/>
+            <a:endParaRPr/>
           </a:p>
         </p:txBody>
       </p:sp>
@@ -3986,7 +3991,1324 @@
           <a:noFill/>
         </p:spPr>
         <p:txBody>
-          <a:bodyPr wrap="square" anchor="t" lIns="0" rIns="0" tIns="0" bIns="0">
+          <a:bodyPr wrap="square" lIns="0" tIns="0" rIns="0" bIns="0" anchor="t">
+            <a:spAutoFit/>
+          </a:bodyPr>
+          <a:lstStyle/>
+          <a:p>
+            <a:pPr algn="l">
+              <a:spcBef>
+                <a:spcPts val="0"/>
+              </a:spcBef>
+              <a:spcAft>
+                <a:spcPts val="0"/>
+              </a:spcAft>
+            </a:pPr>
+            <a:r>
+              <a:rPr sz="2900" b="1">
+                <a:solidFill>
+                  <a:srgbClr val="F2F5FA"/>
+                </a:solidFill>
+                <a:latin typeface="Microsoft JhengHei"/>
+                <a:ea typeface="Microsoft JhengHei"/>
+                <a:cs typeface="Microsoft JhengHei"/>
+              </a:rPr>
+              <a:t>权力情景</a:t>
+            </a:r>
+          </a:p>
+        </p:txBody>
+      </p:sp>
+      <p:sp>
+        <p:nvSpPr>
+          <p:cNvPr id="4" name="Rectangle 3"/>
+          <p:cNvSpPr/>
+          <p:nvPr/>
+        </p:nvSpPr>
+        <p:spPr>
+          <a:xfrm>
+            <a:off x="548640" y="932688"/>
+            <a:ext cx="2194560" cy="54864"/>
+          </a:xfrm>
+          <a:prstGeom prst="rect">
+            <a:avLst/>
+          </a:prstGeom>
+          <a:solidFill>
+            <a:srgbClr val="5AB0FF"/>
+          </a:solidFill>
+          <a:ln>
+            <a:noFill/>
+          </a:ln>
+          <a:effectLst/>
+        </p:spPr>
+        <p:style>
+          <a:lnRef idx="1">
+            <a:schemeClr val="accent1"/>
+          </a:lnRef>
+          <a:fillRef idx="3">
+            <a:schemeClr val="accent1"/>
+          </a:fillRef>
+          <a:effectRef idx="2">
+            <a:schemeClr val="accent1"/>
+          </a:effectRef>
+          <a:fontRef idx="minor">
+            <a:schemeClr val="lt1"/>
+          </a:fontRef>
+        </p:style>
+        <p:txBody>
+          <a:bodyPr rtlCol="0" anchor="ctr"/>
+          <a:lstStyle/>
+          <a:p>
+            <a:pPr algn="ctr"/>
+            <a:endParaRPr/>
+          </a:p>
+        </p:txBody>
+      </p:sp>
+      <p:sp>
+        <p:nvSpPr>
+          <p:cNvPr id="5" name="TextBox 4"/>
+          <p:cNvSpPr txBox="1"/>
+          <p:nvPr/>
+        </p:nvSpPr>
+        <p:spPr>
+          <a:xfrm>
+            <a:off x="530352" y="1024128"/>
+            <a:ext cx="10789920" cy="292608"/>
+          </a:xfrm>
+          <a:prstGeom prst="rect">
+            <a:avLst/>
+          </a:prstGeom>
+          <a:noFill/>
+        </p:spPr>
+        <p:txBody>
+          <a:bodyPr wrap="square" lIns="0" tIns="0" rIns="0" bIns="0" anchor="t">
+            <a:spAutoFit/>
+          </a:bodyPr>
+          <a:lstStyle/>
+          <a:p>
+            <a:pPr algn="l">
+              <a:spcBef>
+                <a:spcPts val="0"/>
+              </a:spcBef>
+              <a:spcAft>
+                <a:spcPts val="0"/>
+              </a:spcAft>
+            </a:pPr>
+            <a:r>
+              <a:rPr sz="1400" b="1">
+                <a:solidFill>
+                  <a:srgbClr val="9AA4B2"/>
+                </a:solidFill>
+                <a:latin typeface="Microsoft JhengHei"/>
+                <a:ea typeface="Microsoft JhengHei"/>
+                <a:cs typeface="Microsoft JhengHei"/>
+              </a:rPr>
+              <a:t>POWER SCENARIOS</a:t>
+            </a:r>
+          </a:p>
+        </p:txBody>
+      </p:sp>
+      <p:pic>
+        <p:nvPicPr>
+          <p:cNvPr id="6" name="Picture 5" descr="heatmap.png"/>
+          <p:cNvPicPr>
+            <a:picLocks noChangeAspect="1"/>
+          </p:cNvPicPr>
+          <p:nvPr/>
+        </p:nvPicPr>
+        <p:blipFill>
+          <a:blip r:embed="rId2"/>
+          <a:stretch>
+            <a:fillRect/>
+          </a:stretch>
+        </p:blipFill>
+        <p:spPr>
+          <a:xfrm>
+            <a:off x="3134360" y="1508760"/>
+            <a:ext cx="5892800" cy="3383280"/>
+          </a:xfrm>
+          <a:prstGeom prst="rect">
+            <a:avLst/>
+          </a:prstGeom>
+        </p:spPr>
+      </p:pic>
+      <p:sp>
+        <p:nvSpPr>
+          <p:cNvPr id="7" name="TextBox 6"/>
+          <p:cNvSpPr txBox="1"/>
+          <p:nvPr/>
+        </p:nvSpPr>
+        <p:spPr>
+          <a:xfrm>
+            <a:off x="640080" y="5029200"/>
+            <a:ext cx="10881360" cy="1280160"/>
+          </a:xfrm>
+          <a:prstGeom prst="rect">
+            <a:avLst/>
+          </a:prstGeom>
+          <a:noFill/>
+        </p:spPr>
+        <p:txBody>
+          <a:bodyPr wrap="square" lIns="0" tIns="0" rIns="0" bIns="0" anchor="t">
+            <a:spAutoFit/>
+          </a:bodyPr>
+          <a:lstStyle/>
+          <a:p>
+            <a:pPr algn="l">
+              <a:spcBef>
+                <a:spcPts val="0"/>
+              </a:spcBef>
+              <a:spcAft>
+                <a:spcPts val="0"/>
+              </a:spcAft>
+            </a:pPr>
+            <a:r>
+              <a:rPr sz="1600" b="1">
+                <a:solidFill>
+                  <a:srgbClr val="F2F5FA"/>
+                </a:solidFill>
+                <a:latin typeface="Microsoft JhengHei"/>
+                <a:ea typeface="Microsoft JhengHei"/>
+                <a:cs typeface="Microsoft JhengHei"/>
+              </a:rPr>
+              <a:t>每个情景给各角色一个高度乘数：红=拔高，蓝=压低。</a:t>
+            </a:r>
+          </a:p>
+          <a:p>
+            <a:pPr>
+              <a:spcBef>
+                <a:spcPts val="600"/>
+              </a:spcBef>
+              <a:spcAft>
+                <a:spcPts val="0"/>
+              </a:spcAft>
+            </a:pPr>
+            <a:r>
+              <a:rPr sz="1600" b="1">
+                <a:solidFill>
+                  <a:srgbClr val="F2F5FA"/>
+                </a:solidFill>
+                <a:latin typeface="Microsoft JhengHei"/>
+                <a:ea typeface="Microsoft JhengHei"/>
+                <a:cs typeface="Microsoft JhengHei"/>
+              </a:rPr>
+              <a:t>后面所有形态差异，都来自这张表。</a:t>
+            </a:r>
+          </a:p>
+        </p:txBody>
+      </p:sp>
+      <p:sp>
+        <p:nvSpPr>
+          <p:cNvPr id="8" name="Rectangle 7"/>
+          <p:cNvSpPr/>
+          <p:nvPr/>
+        </p:nvSpPr>
+        <p:spPr>
+          <a:xfrm>
+            <a:off x="0" y="6437376"/>
+            <a:ext cx="12191695" cy="10972"/>
+          </a:xfrm>
+          <a:prstGeom prst="rect">
+            <a:avLst/>
+          </a:prstGeom>
+          <a:solidFill>
+            <a:srgbClr val="2C333F"/>
+          </a:solidFill>
+          <a:ln>
+            <a:noFill/>
+          </a:ln>
+          <a:effectLst/>
+        </p:spPr>
+        <p:style>
+          <a:lnRef idx="1">
+            <a:schemeClr val="accent1"/>
+          </a:lnRef>
+          <a:fillRef idx="3">
+            <a:schemeClr val="accent1"/>
+          </a:fillRef>
+          <a:effectRef idx="2">
+            <a:schemeClr val="accent1"/>
+          </a:effectRef>
+          <a:fontRef idx="minor">
+            <a:schemeClr val="lt1"/>
+          </a:fontRef>
+        </p:style>
+        <p:txBody>
+          <a:bodyPr rtlCol="0" anchor="ctr"/>
+          <a:lstStyle/>
+          <a:p>
+            <a:pPr algn="ctr"/>
+            <a:endParaRPr/>
+          </a:p>
+        </p:txBody>
+      </p:sp>
+      <p:sp>
+        <p:nvSpPr>
+          <p:cNvPr id="9" name="TextBox 8"/>
+          <p:cNvSpPr txBox="1"/>
+          <p:nvPr/>
+        </p:nvSpPr>
+        <p:spPr>
+          <a:xfrm>
+            <a:off x="457200" y="6492240"/>
+            <a:ext cx="10058400" cy="310896"/>
+          </a:xfrm>
+          <a:prstGeom prst="rect">
+            <a:avLst/>
+          </a:prstGeom>
+          <a:noFill/>
+        </p:spPr>
+        <p:txBody>
+          <a:bodyPr wrap="square" lIns="0" tIns="0" rIns="0" bIns="0" anchor="t">
+            <a:spAutoFit/>
+          </a:bodyPr>
+          <a:lstStyle/>
+          <a:p>
+            <a:pPr algn="l">
+              <a:spcBef>
+                <a:spcPts val="0"/>
+              </a:spcBef>
+              <a:spcAft>
+                <a:spcPts val="0"/>
+              </a:spcAft>
+            </a:pPr>
+            <a:r>
+              <a:rPr sz="1200" b="1">
+                <a:solidFill>
+                  <a:srgbClr val="9AA4B2"/>
+                </a:solidFill>
+                <a:latin typeface="Microsoft JhengHei"/>
+                <a:ea typeface="Microsoft JhengHei"/>
+                <a:cs typeface="Microsoft JhengHei"/>
+              </a:rPr>
+              <a:t>OSM 权力到形态 · 图解说明</a:t>
+            </a:r>
+          </a:p>
+        </p:txBody>
+      </p:sp>
+      <p:sp>
+        <p:nvSpPr>
+          <p:cNvPr id="10" name="TextBox 9"/>
+          <p:cNvSpPr txBox="1"/>
+          <p:nvPr/>
+        </p:nvSpPr>
+        <p:spPr>
+          <a:xfrm>
+            <a:off x="11155680" y="6492240"/>
+            <a:ext cx="822960" cy="310896"/>
+          </a:xfrm>
+          <a:prstGeom prst="rect">
+            <a:avLst/>
+          </a:prstGeom>
+          <a:noFill/>
+        </p:spPr>
+        <p:txBody>
+          <a:bodyPr wrap="square" lIns="0" tIns="0" rIns="0" bIns="0" anchor="t">
+            <a:spAutoFit/>
+          </a:bodyPr>
+          <a:lstStyle/>
+          <a:p>
+            <a:pPr algn="r">
+              <a:spcBef>
+                <a:spcPts val="0"/>
+              </a:spcBef>
+              <a:spcAft>
+                <a:spcPts val="0"/>
+              </a:spcAft>
+            </a:pPr>
+            <a:r>
+              <a:rPr sz="1200" b="1">
+                <a:solidFill>
+                  <a:srgbClr val="9AA4B2"/>
+                </a:solidFill>
+                <a:latin typeface="Microsoft JhengHei"/>
+                <a:ea typeface="Microsoft JhengHei"/>
+                <a:cs typeface="Microsoft JhengHei"/>
+              </a:rPr>
+              <a:t>8</a:t>
+            </a:r>
+          </a:p>
+        </p:txBody>
+      </p:sp>
+    </p:spTree>
+  </p:cSld>
+  <p:clrMapOvr>
+    <a:masterClrMapping/>
+  </p:clrMapOvr>
+</p:sld>
+</file>
+
+<file path=ppt/slides/slide12.xml><?xml version="1.0" encoding="utf-8"?>
+<p:sld xmlns:a="http://schemas.openxmlformats.org/drawingml/2006/main" xmlns:r="http://schemas.openxmlformats.org/officeDocument/2006/relationships" xmlns:p="http://schemas.openxmlformats.org/presentationml/2006/main">
+  <p:cSld>
+    <p:spTree>
+      <p:nvGrpSpPr>
+        <p:cNvPr id="1" name=""/>
+        <p:cNvGrpSpPr/>
+        <p:nvPr/>
+      </p:nvGrpSpPr>
+      <p:grpSpPr>
+        <a:xfrm>
+          <a:off x="0" y="0"/>
+          <a:ext cx="0" cy="0"/>
+          <a:chOff x="0" y="0"/>
+          <a:chExt cx="0" cy="0"/>
+        </a:xfrm>
+      </p:grpSpPr>
+      <p:sp>
+        <p:nvSpPr>
+          <p:cNvPr id="2" name="Rectangle 1"/>
+          <p:cNvSpPr/>
+          <p:nvPr/>
+        </p:nvSpPr>
+        <p:spPr>
+          <a:xfrm>
+            <a:off x="0" y="0"/>
+            <a:ext cx="12191695" cy="6858000"/>
+          </a:xfrm>
+          <a:prstGeom prst="rect">
+            <a:avLst/>
+          </a:prstGeom>
+          <a:solidFill>
+            <a:srgbClr val="0E1116"/>
+          </a:solidFill>
+          <a:ln>
+            <a:noFill/>
+          </a:ln>
+          <a:effectLst/>
+        </p:spPr>
+        <p:style>
+          <a:lnRef idx="1">
+            <a:schemeClr val="accent1"/>
+          </a:lnRef>
+          <a:fillRef idx="3">
+            <a:schemeClr val="accent1"/>
+          </a:fillRef>
+          <a:effectRef idx="2">
+            <a:schemeClr val="accent1"/>
+          </a:effectRef>
+          <a:fontRef idx="minor">
+            <a:schemeClr val="lt1"/>
+          </a:fontRef>
+        </p:style>
+        <p:txBody>
+          <a:bodyPr rtlCol="0" anchor="ctr"/>
+          <a:lstStyle/>
+          <a:p>
+            <a:pPr algn="ctr"/>
+            <a:endParaRPr/>
+          </a:p>
+        </p:txBody>
+      </p:sp>
+      <p:sp>
+        <p:nvSpPr>
+          <p:cNvPr id="3" name="TextBox 2"/>
+          <p:cNvSpPr txBox="1"/>
+          <p:nvPr/>
+        </p:nvSpPr>
+        <p:spPr>
+          <a:xfrm>
+            <a:off x="502920" y="256032"/>
+            <a:ext cx="11155680" cy="640080"/>
+          </a:xfrm>
+          <a:prstGeom prst="rect">
+            <a:avLst/>
+          </a:prstGeom>
+          <a:noFill/>
+        </p:spPr>
+        <p:txBody>
+          <a:bodyPr wrap="square" lIns="0" tIns="0" rIns="0" bIns="0" anchor="t">
+            <a:spAutoFit/>
+          </a:bodyPr>
+          <a:lstStyle/>
+          <a:p>
+            <a:pPr algn="l">
+              <a:spcBef>
+                <a:spcPts val="0"/>
+              </a:spcBef>
+              <a:spcAft>
+                <a:spcPts val="0"/>
+              </a:spcAft>
+            </a:pPr>
+            <a:r>
+              <a:rPr sz="2900" b="1">
+                <a:solidFill>
+                  <a:srgbClr val="F2F5FA"/>
+                </a:solidFill>
+                <a:latin typeface="Microsoft JhengHei"/>
+                <a:ea typeface="Microsoft JhengHei"/>
+                <a:cs typeface="Microsoft JhengHei"/>
+              </a:rPr>
+              <a:t>套用情景，看天际线</a:t>
+            </a:r>
+          </a:p>
+        </p:txBody>
+      </p:sp>
+      <p:sp>
+        <p:nvSpPr>
+          <p:cNvPr id="4" name="Rectangle 3"/>
+          <p:cNvSpPr/>
+          <p:nvPr/>
+        </p:nvSpPr>
+        <p:spPr>
+          <a:xfrm>
+            <a:off x="548640" y="932688"/>
+            <a:ext cx="2194560" cy="54864"/>
+          </a:xfrm>
+          <a:prstGeom prst="rect">
+            <a:avLst/>
+          </a:prstGeom>
+          <a:solidFill>
+            <a:srgbClr val="6FE36F"/>
+          </a:solidFill>
+          <a:ln>
+            <a:noFill/>
+          </a:ln>
+          <a:effectLst/>
+        </p:spPr>
+        <p:style>
+          <a:lnRef idx="1">
+            <a:schemeClr val="accent1"/>
+          </a:lnRef>
+          <a:fillRef idx="3">
+            <a:schemeClr val="accent1"/>
+          </a:fillRef>
+          <a:effectRef idx="2">
+            <a:schemeClr val="accent1"/>
+          </a:effectRef>
+          <a:fontRef idx="minor">
+            <a:schemeClr val="lt1"/>
+          </a:fontRef>
+        </p:style>
+        <p:txBody>
+          <a:bodyPr rtlCol="0" anchor="ctr"/>
+          <a:lstStyle/>
+          <a:p>
+            <a:pPr algn="ctr"/>
+            <a:endParaRPr/>
+          </a:p>
+        </p:txBody>
+      </p:sp>
+      <p:sp>
+        <p:nvSpPr>
+          <p:cNvPr id="5" name="TextBox 4"/>
+          <p:cNvSpPr txBox="1"/>
+          <p:nvPr/>
+        </p:nvSpPr>
+        <p:spPr>
+          <a:xfrm>
+            <a:off x="530352" y="1024128"/>
+            <a:ext cx="10789920" cy="292608"/>
+          </a:xfrm>
+          <a:prstGeom prst="rect">
+            <a:avLst/>
+          </a:prstGeom>
+          <a:noFill/>
+        </p:spPr>
+        <p:txBody>
+          <a:bodyPr wrap="square" lIns="0" tIns="0" rIns="0" bIns="0" anchor="t">
+            <a:spAutoFit/>
+          </a:bodyPr>
+          <a:lstStyle/>
+          <a:p>
+            <a:pPr algn="l">
+              <a:spcBef>
+                <a:spcPts val="0"/>
+              </a:spcBef>
+              <a:spcAft>
+                <a:spcPts val="0"/>
+              </a:spcAft>
+            </a:pPr>
+            <a:r>
+              <a:rPr sz="1400" b="1">
+                <a:solidFill>
+                  <a:srgbClr val="9AA4B2"/>
+                </a:solidFill>
+                <a:latin typeface="Microsoft JhengHei"/>
+                <a:ea typeface="Microsoft JhengHei"/>
+                <a:cs typeface="Microsoft JhengHei"/>
+              </a:rPr>
+              <a:t>APPLY &amp; COMPARE</a:t>
+            </a:r>
+          </a:p>
+        </p:txBody>
+      </p:sp>
+      <p:pic>
+        <p:nvPicPr>
+          <p:cNvPr id="6" name="Picture 5" descr="skyline.png"/>
+          <p:cNvPicPr>
+            <a:picLocks noChangeAspect="1"/>
+          </p:cNvPicPr>
+          <p:nvPr/>
+        </p:nvPicPr>
+        <p:blipFill>
+          <a:blip r:embed="rId2"/>
+          <a:stretch>
+            <a:fillRect/>
+          </a:stretch>
+        </p:blipFill>
+        <p:spPr>
+          <a:xfrm>
+            <a:off x="1279846" y="1554480"/>
+            <a:ext cx="4572626" cy="4480560"/>
+          </a:xfrm>
+          <a:prstGeom prst="rect">
+            <a:avLst/>
+          </a:prstGeom>
+        </p:spPr>
+      </p:pic>
+      <p:sp>
+        <p:nvSpPr>
+          <p:cNvPr id="7" name="TextBox 6"/>
+          <p:cNvSpPr txBox="1"/>
+          <p:nvPr/>
+        </p:nvSpPr>
+        <p:spPr>
+          <a:xfrm>
+            <a:off x="6949440" y="1737360"/>
+            <a:ext cx="4754880" cy="4297680"/>
+          </a:xfrm>
+          <a:prstGeom prst="rect">
+            <a:avLst/>
+          </a:prstGeom>
+          <a:noFill/>
+        </p:spPr>
+        <p:txBody>
+          <a:bodyPr wrap="square" lIns="0" tIns="0" rIns="0" bIns="0" anchor="t">
+            <a:spAutoFit/>
+          </a:bodyPr>
+          <a:lstStyle/>
+          <a:p>
+            <a:pPr algn="l">
+              <a:spcBef>
+                <a:spcPts val="0"/>
+              </a:spcBef>
+              <a:spcAft>
+                <a:spcPts val="0"/>
+              </a:spcAft>
+            </a:pPr>
+            <a:r>
+              <a:rPr sz="1700" b="1">
+                <a:solidFill>
+                  <a:srgbClr val="F2F5FA"/>
+                </a:solidFill>
+                <a:latin typeface="Microsoft JhengHei"/>
+                <a:ea typeface="Microsoft JhengHei"/>
+                <a:cs typeface="Microsoft JhengHei"/>
+              </a:rPr>
+              <a:t>同一批楼，同样的占地和标签，分别套四个情景。</a:t>
+            </a:r>
+          </a:p>
+          <a:p>
+            <a:pPr>
+              <a:spcBef>
+                <a:spcPts val="1200"/>
+              </a:spcBef>
+              <a:spcAft>
+                <a:spcPts val="0"/>
+              </a:spcAft>
+            </a:pPr>
+            <a:r>
+              <a:rPr sz="1700" b="1">
+                <a:solidFill>
+                  <a:srgbClr val="F2F5FA"/>
+                </a:solidFill>
+                <a:latin typeface="Microsoft JhengHei"/>
+                <a:ea typeface="Microsoft JhengHei"/>
+                <a:cs typeface="Microsoft JhengHei"/>
+              </a:rPr>
+              <a:t>颜色代表高度，由低到高。</a:t>
+            </a:r>
+          </a:p>
+          <a:p>
+            <a:pPr>
+              <a:spcBef>
+                <a:spcPts val="1200"/>
+              </a:spcBef>
+              <a:spcAft>
+                <a:spcPts val="0"/>
+              </a:spcAft>
+            </a:pPr>
+            <a:r>
+              <a:rPr sz="1700" b="1">
+                <a:solidFill>
+                  <a:srgbClr val="F2F5FA"/>
+                </a:solidFill>
+                <a:latin typeface="Microsoft JhengHei"/>
+                <a:ea typeface="Microsoft JhengHei"/>
+                <a:cs typeface="Microsoft JhengHei"/>
+              </a:rPr>
+              <a:t>差异完全来自不同情景给各角色的权力。</a:t>
+            </a:r>
+          </a:p>
+        </p:txBody>
+      </p:sp>
+      <p:sp>
+        <p:nvSpPr>
+          <p:cNvPr id="8" name="Rectangle 7"/>
+          <p:cNvSpPr/>
+          <p:nvPr/>
+        </p:nvSpPr>
+        <p:spPr>
+          <a:xfrm>
+            <a:off x="0" y="6437376"/>
+            <a:ext cx="12191695" cy="10972"/>
+          </a:xfrm>
+          <a:prstGeom prst="rect">
+            <a:avLst/>
+          </a:prstGeom>
+          <a:solidFill>
+            <a:srgbClr val="2C333F"/>
+          </a:solidFill>
+          <a:ln>
+            <a:noFill/>
+          </a:ln>
+          <a:effectLst/>
+        </p:spPr>
+        <p:style>
+          <a:lnRef idx="1">
+            <a:schemeClr val="accent1"/>
+          </a:lnRef>
+          <a:fillRef idx="3">
+            <a:schemeClr val="accent1"/>
+          </a:fillRef>
+          <a:effectRef idx="2">
+            <a:schemeClr val="accent1"/>
+          </a:effectRef>
+          <a:fontRef idx="minor">
+            <a:schemeClr val="lt1"/>
+          </a:fontRef>
+        </p:style>
+        <p:txBody>
+          <a:bodyPr rtlCol="0" anchor="ctr"/>
+          <a:lstStyle/>
+          <a:p>
+            <a:pPr algn="ctr"/>
+            <a:endParaRPr/>
+          </a:p>
+        </p:txBody>
+      </p:sp>
+      <p:sp>
+        <p:nvSpPr>
+          <p:cNvPr id="9" name="TextBox 8"/>
+          <p:cNvSpPr txBox="1"/>
+          <p:nvPr/>
+        </p:nvSpPr>
+        <p:spPr>
+          <a:xfrm>
+            <a:off x="457200" y="6492240"/>
+            <a:ext cx="10058400" cy="310896"/>
+          </a:xfrm>
+          <a:prstGeom prst="rect">
+            <a:avLst/>
+          </a:prstGeom>
+          <a:noFill/>
+        </p:spPr>
+        <p:txBody>
+          <a:bodyPr wrap="square" lIns="0" tIns="0" rIns="0" bIns="0" anchor="t">
+            <a:spAutoFit/>
+          </a:bodyPr>
+          <a:lstStyle/>
+          <a:p>
+            <a:pPr algn="l">
+              <a:spcBef>
+                <a:spcPts val="0"/>
+              </a:spcBef>
+              <a:spcAft>
+                <a:spcPts val="0"/>
+              </a:spcAft>
+            </a:pPr>
+            <a:r>
+              <a:rPr sz="1200" b="1">
+                <a:solidFill>
+                  <a:srgbClr val="9AA4B2"/>
+                </a:solidFill>
+                <a:latin typeface="Microsoft JhengHei"/>
+                <a:ea typeface="Microsoft JhengHei"/>
+                <a:cs typeface="Microsoft JhengHei"/>
+              </a:rPr>
+              <a:t>OSM 权力到形态 · 图解说明</a:t>
+            </a:r>
+          </a:p>
+        </p:txBody>
+      </p:sp>
+      <p:sp>
+        <p:nvSpPr>
+          <p:cNvPr id="10" name="TextBox 9"/>
+          <p:cNvSpPr txBox="1"/>
+          <p:nvPr/>
+        </p:nvSpPr>
+        <p:spPr>
+          <a:xfrm>
+            <a:off x="11155680" y="6492240"/>
+            <a:ext cx="822960" cy="310896"/>
+          </a:xfrm>
+          <a:prstGeom prst="rect">
+            <a:avLst/>
+          </a:prstGeom>
+          <a:noFill/>
+        </p:spPr>
+        <p:txBody>
+          <a:bodyPr wrap="square" lIns="0" tIns="0" rIns="0" bIns="0" anchor="t">
+            <a:spAutoFit/>
+          </a:bodyPr>
+          <a:lstStyle/>
+          <a:p>
+            <a:pPr algn="r">
+              <a:spcBef>
+                <a:spcPts val="0"/>
+              </a:spcBef>
+              <a:spcAft>
+                <a:spcPts val="0"/>
+              </a:spcAft>
+            </a:pPr>
+            <a:r>
+              <a:rPr sz="1200" b="1">
+                <a:solidFill>
+                  <a:srgbClr val="9AA4B2"/>
+                </a:solidFill>
+                <a:latin typeface="Microsoft JhengHei"/>
+                <a:ea typeface="Microsoft JhengHei"/>
+                <a:cs typeface="Microsoft JhengHei"/>
+              </a:rPr>
+              <a:t>9</a:t>
+            </a:r>
+          </a:p>
+        </p:txBody>
+      </p:sp>
+    </p:spTree>
+  </p:cSld>
+  <p:clrMapOvr>
+    <a:masterClrMapping/>
+  </p:clrMapOvr>
+</p:sld>
+</file>
+
+<file path=ppt/slides/slide13.xml><?xml version="1.0" encoding="utf-8"?>
+<p:sld xmlns:a="http://schemas.openxmlformats.org/drawingml/2006/main" xmlns:r="http://schemas.openxmlformats.org/officeDocument/2006/relationships" xmlns:p="http://schemas.openxmlformats.org/presentationml/2006/main">
+  <p:cSld>
+    <p:spTree>
+      <p:nvGrpSpPr>
+        <p:cNvPr id="1" name=""/>
+        <p:cNvGrpSpPr/>
+        <p:nvPr/>
+      </p:nvGrpSpPr>
+      <p:grpSpPr>
+        <a:xfrm>
+          <a:off x="0" y="0"/>
+          <a:ext cx="0" cy="0"/>
+          <a:chOff x="0" y="0"/>
+          <a:chExt cx="0" cy="0"/>
+        </a:xfrm>
+      </p:grpSpPr>
+      <p:sp>
+        <p:nvSpPr>
+          <p:cNvPr id="2" name="Rectangle 1"/>
+          <p:cNvSpPr/>
+          <p:nvPr/>
+        </p:nvSpPr>
+        <p:spPr>
+          <a:xfrm>
+            <a:off x="0" y="0"/>
+            <a:ext cx="12191695" cy="6858000"/>
+          </a:xfrm>
+          <a:prstGeom prst="rect">
+            <a:avLst/>
+          </a:prstGeom>
+          <a:solidFill>
+            <a:srgbClr val="0E1116"/>
+          </a:solidFill>
+          <a:ln>
+            <a:noFill/>
+          </a:ln>
+          <a:effectLst/>
+        </p:spPr>
+        <p:style>
+          <a:lnRef idx="1">
+            <a:schemeClr val="accent1"/>
+          </a:lnRef>
+          <a:fillRef idx="3">
+            <a:schemeClr val="accent1"/>
+          </a:fillRef>
+          <a:effectRef idx="2">
+            <a:schemeClr val="accent1"/>
+          </a:effectRef>
+          <a:fontRef idx="minor">
+            <a:schemeClr val="lt1"/>
+          </a:fontRef>
+        </p:style>
+        <p:txBody>
+          <a:bodyPr rtlCol="0" anchor="ctr"/>
+          <a:lstStyle/>
+          <a:p>
+            <a:pPr algn="ctr"/>
+            <a:endParaRPr/>
+          </a:p>
+        </p:txBody>
+      </p:sp>
+      <p:sp>
+        <p:nvSpPr>
+          <p:cNvPr id="3" name="TextBox 2"/>
+          <p:cNvSpPr txBox="1"/>
+          <p:nvPr/>
+        </p:nvSpPr>
+        <p:spPr>
+          <a:xfrm>
+            <a:off x="502920" y="256032"/>
+            <a:ext cx="11155680" cy="640080"/>
+          </a:xfrm>
+          <a:prstGeom prst="rect">
+            <a:avLst/>
+          </a:prstGeom>
+          <a:noFill/>
+        </p:spPr>
+        <p:txBody>
+          <a:bodyPr wrap="square" lIns="0" tIns="0" rIns="0" bIns="0" anchor="t">
+            <a:spAutoFit/>
+          </a:bodyPr>
+          <a:lstStyle/>
+          <a:p>
+            <a:pPr algn="l">
+              <a:spcBef>
+                <a:spcPts val="0"/>
+              </a:spcBef>
+              <a:spcAft>
+                <a:spcPts val="0"/>
+              </a:spcAft>
+            </a:pPr>
+            <a:r>
+              <a:rPr sz="2900" b="1">
+                <a:solidFill>
+                  <a:srgbClr val="F2F5FA"/>
+                </a:solidFill>
+                <a:latin typeface="Microsoft JhengHei"/>
+                <a:ea typeface="Microsoft JhengHei"/>
+                <a:cs typeface="Microsoft JhengHei"/>
+              </a:rPr>
+              <a:t>变成 3D</a:t>
+            </a:r>
+          </a:p>
+        </p:txBody>
+      </p:sp>
+      <p:sp>
+        <p:nvSpPr>
+          <p:cNvPr id="4" name="Rectangle 3"/>
+          <p:cNvSpPr/>
+          <p:nvPr/>
+        </p:nvSpPr>
+        <p:spPr>
+          <a:xfrm>
+            <a:off x="548640" y="932688"/>
+            <a:ext cx="2194560" cy="54864"/>
+          </a:xfrm>
+          <a:prstGeom prst="rect">
+            <a:avLst/>
+          </a:prstGeom>
+          <a:solidFill>
+            <a:srgbClr val="FFB454"/>
+          </a:solidFill>
+          <a:ln>
+            <a:noFill/>
+          </a:ln>
+          <a:effectLst/>
+        </p:spPr>
+        <p:style>
+          <a:lnRef idx="1">
+            <a:schemeClr val="accent1"/>
+          </a:lnRef>
+          <a:fillRef idx="3">
+            <a:schemeClr val="accent1"/>
+          </a:fillRef>
+          <a:effectRef idx="2">
+            <a:schemeClr val="accent1"/>
+          </a:effectRef>
+          <a:fontRef idx="minor">
+            <a:schemeClr val="lt1"/>
+          </a:fontRef>
+        </p:style>
+        <p:txBody>
+          <a:bodyPr rtlCol="0" anchor="ctr"/>
+          <a:lstStyle/>
+          <a:p>
+            <a:pPr algn="ctr"/>
+            <a:endParaRPr/>
+          </a:p>
+        </p:txBody>
+      </p:sp>
+      <p:sp>
+        <p:nvSpPr>
+          <p:cNvPr id="5" name="TextBox 4"/>
+          <p:cNvSpPr txBox="1"/>
+          <p:nvPr/>
+        </p:nvSpPr>
+        <p:spPr>
+          <a:xfrm>
+            <a:off x="530352" y="1024128"/>
+            <a:ext cx="10789920" cy="292608"/>
+          </a:xfrm>
+          <a:prstGeom prst="rect">
+            <a:avLst/>
+          </a:prstGeom>
+          <a:noFill/>
+        </p:spPr>
+        <p:txBody>
+          <a:bodyPr wrap="square" lIns="0" tIns="0" rIns="0" bIns="0" anchor="t">
+            <a:spAutoFit/>
+          </a:bodyPr>
+          <a:lstStyle/>
+          <a:p>
+            <a:pPr algn="l">
+              <a:spcBef>
+                <a:spcPts val="0"/>
+              </a:spcBef>
+              <a:spcAft>
+                <a:spcPts val="0"/>
+              </a:spcAft>
+            </a:pPr>
+            <a:r>
+              <a:rPr sz="1400" b="1">
+                <a:solidFill>
+                  <a:srgbClr val="9AA4B2"/>
+                </a:solidFill>
+                <a:latin typeface="Microsoft JhengHei"/>
+                <a:ea typeface="Microsoft JhengHei"/>
+                <a:cs typeface="Microsoft JhengHei"/>
+              </a:rPr>
+              <a:t>3D MASSING</a:t>
+            </a:r>
+          </a:p>
+        </p:txBody>
+      </p:sp>
+      <p:pic>
+        <p:nvPicPr>
+          <p:cNvPr id="6" name="Picture 5" descr="massing3d.png"/>
+          <p:cNvPicPr>
+            <a:picLocks noChangeAspect="1"/>
+          </p:cNvPicPr>
+          <p:nvPr/>
+        </p:nvPicPr>
+        <p:blipFill>
+          <a:blip r:embed="rId2"/>
+          <a:stretch>
+            <a:fillRect/>
+          </a:stretch>
+        </p:blipFill>
+        <p:spPr>
+          <a:xfrm>
+            <a:off x="1325880" y="1554480"/>
+            <a:ext cx="4480560" cy="4480560"/>
+          </a:xfrm>
+          <a:prstGeom prst="rect">
+            <a:avLst/>
+          </a:prstGeom>
+        </p:spPr>
+      </p:pic>
+      <p:sp>
+        <p:nvSpPr>
+          <p:cNvPr id="7" name="TextBox 6"/>
+          <p:cNvSpPr txBox="1"/>
+          <p:nvPr/>
+        </p:nvSpPr>
+        <p:spPr>
+          <a:xfrm>
+            <a:off x="6949440" y="1737360"/>
+            <a:ext cx="4754880" cy="4297680"/>
+          </a:xfrm>
+          <a:prstGeom prst="rect">
+            <a:avLst/>
+          </a:prstGeom>
+          <a:noFill/>
+        </p:spPr>
+        <p:txBody>
+          <a:bodyPr wrap="square" lIns="0" tIns="0" rIns="0" bIns="0" anchor="t">
+            <a:spAutoFit/>
+          </a:bodyPr>
+          <a:lstStyle/>
+          <a:p>
+            <a:pPr algn="l">
+              <a:spcBef>
+                <a:spcPts val="0"/>
+              </a:spcBef>
+              <a:spcAft>
+                <a:spcPts val="0"/>
+              </a:spcAft>
+            </a:pPr>
+            <a:r>
+              <a:rPr sz="1700" b="1">
+                <a:solidFill>
+                  <a:srgbClr val="F2F5FA"/>
+                </a:solidFill>
+                <a:latin typeface="Microsoft JhengHei"/>
+                <a:ea typeface="Microsoft JhengHei"/>
+                <a:cs typeface="Microsoft JhengHei"/>
+              </a:rPr>
+              <a:t>把占地按高度挤成立体量体，按角色上色。</a:t>
+            </a:r>
+          </a:p>
+          <a:p>
+            <a:pPr>
+              <a:spcBef>
+                <a:spcPts val="1200"/>
+              </a:spcBef>
+              <a:spcAft>
+                <a:spcPts val="0"/>
+              </a:spcAft>
+            </a:pPr>
+            <a:r>
+              <a:rPr sz="1700" b="1">
+                <a:solidFill>
+                  <a:srgbClr val="F2F5FA"/>
+                </a:solidFill>
+                <a:latin typeface="Microsoft JhengHei"/>
+                <a:ea typeface="Microsoft JhengHei"/>
+                <a:cs typeface="Microsoft JhengHei"/>
+              </a:rPr>
+              <a:t>可在页面里看，或导出给 Rhino / Blender。</a:t>
+            </a:r>
+          </a:p>
+          <a:p>
+            <a:pPr>
+              <a:spcBef>
+                <a:spcPts val="1200"/>
+              </a:spcBef>
+              <a:spcAft>
+                <a:spcPts val="0"/>
+              </a:spcAft>
+            </a:pPr>
+            <a:r>
+              <a:rPr sz="1700" b="1">
+                <a:solidFill>
+                  <a:srgbClr val="F2F5FA"/>
+                </a:solidFill>
+                <a:latin typeface="Microsoft JhengHei"/>
+                <a:ea typeface="Microsoft JhengHei"/>
+                <a:cs typeface="Microsoft JhengHei"/>
+              </a:rPr>
+              <a:t>导出不改占地，只改高度。</a:t>
+            </a:r>
+          </a:p>
+        </p:txBody>
+      </p:sp>
+      <p:sp>
+        <p:nvSpPr>
+          <p:cNvPr id="8" name="Rectangle 7"/>
+          <p:cNvSpPr/>
+          <p:nvPr/>
+        </p:nvSpPr>
+        <p:spPr>
+          <a:xfrm>
+            <a:off x="0" y="6437376"/>
+            <a:ext cx="12191695" cy="10972"/>
+          </a:xfrm>
+          <a:prstGeom prst="rect">
+            <a:avLst/>
+          </a:prstGeom>
+          <a:solidFill>
+            <a:srgbClr val="2C333F"/>
+          </a:solidFill>
+          <a:ln>
+            <a:noFill/>
+          </a:ln>
+          <a:effectLst/>
+        </p:spPr>
+        <p:style>
+          <a:lnRef idx="1">
+            <a:schemeClr val="accent1"/>
+          </a:lnRef>
+          <a:fillRef idx="3">
+            <a:schemeClr val="accent1"/>
+          </a:fillRef>
+          <a:effectRef idx="2">
+            <a:schemeClr val="accent1"/>
+          </a:effectRef>
+          <a:fontRef idx="minor">
+            <a:schemeClr val="lt1"/>
+          </a:fontRef>
+        </p:style>
+        <p:txBody>
+          <a:bodyPr rtlCol="0" anchor="ctr"/>
+          <a:lstStyle/>
+          <a:p>
+            <a:pPr algn="ctr"/>
+            <a:endParaRPr/>
+          </a:p>
+        </p:txBody>
+      </p:sp>
+      <p:sp>
+        <p:nvSpPr>
+          <p:cNvPr id="9" name="TextBox 8"/>
+          <p:cNvSpPr txBox="1"/>
+          <p:nvPr/>
+        </p:nvSpPr>
+        <p:spPr>
+          <a:xfrm>
+            <a:off x="457200" y="6492240"/>
+            <a:ext cx="10058400" cy="310896"/>
+          </a:xfrm>
+          <a:prstGeom prst="rect">
+            <a:avLst/>
+          </a:prstGeom>
+          <a:noFill/>
+        </p:spPr>
+        <p:txBody>
+          <a:bodyPr wrap="square" lIns="0" tIns="0" rIns="0" bIns="0" anchor="t">
+            <a:spAutoFit/>
+          </a:bodyPr>
+          <a:lstStyle/>
+          <a:p>
+            <a:pPr algn="l">
+              <a:spcBef>
+                <a:spcPts val="0"/>
+              </a:spcBef>
+              <a:spcAft>
+                <a:spcPts val="0"/>
+              </a:spcAft>
+            </a:pPr>
+            <a:r>
+              <a:rPr sz="1200" b="1">
+                <a:solidFill>
+                  <a:srgbClr val="9AA4B2"/>
+                </a:solidFill>
+                <a:latin typeface="Microsoft JhengHei"/>
+                <a:ea typeface="Microsoft JhengHei"/>
+                <a:cs typeface="Microsoft JhengHei"/>
+              </a:rPr>
+              <a:t>OSM 权力到形态 · 图解说明</a:t>
+            </a:r>
+          </a:p>
+        </p:txBody>
+      </p:sp>
+      <p:sp>
+        <p:nvSpPr>
+          <p:cNvPr id="10" name="TextBox 9"/>
+          <p:cNvSpPr txBox="1"/>
+          <p:nvPr/>
+        </p:nvSpPr>
+        <p:spPr>
+          <a:xfrm>
+            <a:off x="11155680" y="6492240"/>
+            <a:ext cx="822960" cy="310896"/>
+          </a:xfrm>
+          <a:prstGeom prst="rect">
+            <a:avLst/>
+          </a:prstGeom>
+          <a:noFill/>
+        </p:spPr>
+        <p:txBody>
+          <a:bodyPr wrap="square" lIns="0" tIns="0" rIns="0" bIns="0" anchor="t">
+            <a:spAutoFit/>
+          </a:bodyPr>
+          <a:lstStyle/>
+          <a:p>
+            <a:pPr algn="r">
+              <a:spcBef>
+                <a:spcPts val="0"/>
+              </a:spcBef>
+              <a:spcAft>
+                <a:spcPts val="0"/>
+              </a:spcAft>
+            </a:pPr>
+            <a:r>
+              <a:rPr sz="1200" b="1">
+                <a:solidFill>
+                  <a:srgbClr val="9AA4B2"/>
+                </a:solidFill>
+                <a:latin typeface="Microsoft JhengHei"/>
+                <a:ea typeface="Microsoft JhengHei"/>
+                <a:cs typeface="Microsoft JhengHei"/>
+              </a:rPr>
+              <a:t>10</a:t>
+            </a:r>
+          </a:p>
+        </p:txBody>
+      </p:sp>
+    </p:spTree>
+  </p:cSld>
+  <p:clrMapOvr>
+    <a:masterClrMapping/>
+  </p:clrMapOvr>
+</p:sld>
+</file>
+
+<file path=ppt/slides/slide14.xml><?xml version="1.0" encoding="utf-8"?>
+<p:sld xmlns:a="http://schemas.openxmlformats.org/drawingml/2006/main" xmlns:r="http://schemas.openxmlformats.org/officeDocument/2006/relationships" xmlns:p="http://schemas.openxmlformats.org/presentationml/2006/main">
+  <p:cSld>
+    <p:spTree>
+      <p:nvGrpSpPr>
+        <p:cNvPr id="1" name=""/>
+        <p:cNvGrpSpPr/>
+        <p:nvPr/>
+      </p:nvGrpSpPr>
+      <p:grpSpPr>
+        <a:xfrm>
+          <a:off x="0" y="0"/>
+          <a:ext cx="0" cy="0"/>
+          <a:chOff x="0" y="0"/>
+          <a:chExt cx="0" cy="0"/>
+        </a:xfrm>
+      </p:grpSpPr>
+      <p:sp>
+        <p:nvSpPr>
+          <p:cNvPr id="2" name="Rectangle 1"/>
+          <p:cNvSpPr/>
+          <p:nvPr/>
+        </p:nvSpPr>
+        <p:spPr>
+          <a:xfrm>
+            <a:off x="0" y="0"/>
+            <a:ext cx="12191695" cy="6858000"/>
+          </a:xfrm>
+          <a:prstGeom prst="rect">
+            <a:avLst/>
+          </a:prstGeom>
+          <a:solidFill>
+            <a:srgbClr val="0E1116"/>
+          </a:solidFill>
+          <a:ln>
+            <a:noFill/>
+          </a:ln>
+          <a:effectLst/>
+        </p:spPr>
+        <p:style>
+          <a:lnRef idx="1">
+            <a:schemeClr val="accent1"/>
+          </a:lnRef>
+          <a:fillRef idx="3">
+            <a:schemeClr val="accent1"/>
+          </a:fillRef>
+          <a:effectRef idx="2">
+            <a:schemeClr val="accent1"/>
+          </a:effectRef>
+          <a:fontRef idx="minor">
+            <a:schemeClr val="lt1"/>
+          </a:fontRef>
+        </p:style>
+        <p:txBody>
+          <a:bodyPr rtlCol="0" anchor="ctr"/>
+          <a:lstStyle/>
+          <a:p>
+            <a:pPr algn="ctr"/>
+            <a:endParaRPr/>
+          </a:p>
+        </p:txBody>
+      </p:sp>
+      <p:sp>
+        <p:nvSpPr>
+          <p:cNvPr id="3" name="TextBox 2"/>
+          <p:cNvSpPr txBox="1"/>
+          <p:nvPr/>
+        </p:nvSpPr>
+        <p:spPr>
+          <a:xfrm>
+            <a:off x="502920" y="256032"/>
+            <a:ext cx="11155680" cy="640080"/>
+          </a:xfrm>
+          <a:prstGeom prst="rect">
+            <a:avLst/>
+          </a:prstGeom>
+          <a:noFill/>
+        </p:spPr>
+        <p:txBody>
+          <a:bodyPr wrap="square" lIns="0" tIns="0" rIns="0" bIns="0" anchor="t">
             <a:spAutoFit/>
           </a:bodyPr>
           <a:lstStyle/>
@@ -4054,6 +5376,7 @@
           <a:lstStyle/>
           <a:p>
             <a:pPr algn="ctr"/>
+            <a:endParaRPr/>
           </a:p>
         </p:txBody>
       </p:sp>
@@ -4074,7 +5397,7 @@
           <a:noFill/>
         </p:spPr>
         <p:txBody>
-          <a:bodyPr wrap="square" anchor="t" lIns="0" rIns="0" tIns="0" bIns="0">
+          <a:bodyPr wrap="square" lIns="0" tIns="0" rIns="0" bIns="0" anchor="t">
             <a:spAutoFit/>
           </a:bodyPr>
           <a:lstStyle/>
@@ -4118,7 +5441,7 @@
           <a:noFill/>
         </p:spPr>
         <p:txBody>
-          <a:bodyPr wrap="square" anchor="t" lIns="0" rIns="0" tIns="0" bIns="0">
+          <a:bodyPr wrap="square" lIns="0" tIns="0" rIns="0" bIns="0" anchor="t">
             <a:spAutoFit/>
           </a:bodyPr>
           <a:lstStyle/>
@@ -4249,6 +5572,7 @@
           <a:lstStyle/>
           <a:p>
             <a:pPr algn="ctr"/>
+            <a:endParaRPr/>
           </a:p>
         </p:txBody>
       </p:sp>
@@ -4269,7 +5593,7 @@
           <a:noFill/>
         </p:spPr>
         <p:txBody>
-          <a:bodyPr wrap="square" anchor="t" lIns="0" rIns="0" tIns="0" bIns="0">
+          <a:bodyPr wrap="square" lIns="0" tIns="0" rIns="0" bIns="0" anchor="t">
             <a:spAutoFit/>
           </a:bodyPr>
           <a:lstStyle/>
@@ -4313,7 +5637,7 @@
           <a:noFill/>
         </p:spPr>
         <p:txBody>
-          <a:bodyPr wrap="square" anchor="t" lIns="0" rIns="0" tIns="0" bIns="0">
+          <a:bodyPr wrap="square" lIns="0" tIns="0" rIns="0" bIns="0" anchor="t">
             <a:spAutoFit/>
           </a:bodyPr>
           <a:lstStyle/>
@@ -4349,7 +5673,7 @@
 </file>
 
 <file path=ppt/slides/slide2.xml><?xml version="1.0" encoding="utf-8"?>
-<p:sld xmlns:a="http://schemas.openxmlformats.org/drawingml/2006/main" xmlns:p="http://schemas.openxmlformats.org/presentationml/2006/main" xmlns:r="http://schemas.openxmlformats.org/officeDocument/2006/relationships">
+<p:sld xmlns:a="http://schemas.openxmlformats.org/drawingml/2006/main" xmlns:r="http://schemas.openxmlformats.org/officeDocument/2006/relationships" xmlns:p="http://schemas.openxmlformats.org/presentationml/2006/main">
   <p:cSld>
     <p:spTree>
       <p:nvGrpSpPr>
@@ -4357,7 +5681,14 @@
         <p:cNvGrpSpPr/>
         <p:nvPr/>
       </p:nvGrpSpPr>
-      <p:grpSpPr/>
+      <p:grpSpPr>
+        <a:xfrm>
+          <a:off x="0" y="0"/>
+          <a:ext cx="0" cy="0"/>
+          <a:chOff x="0" y="0"/>
+          <a:chExt cx="0" cy="0"/>
+        </a:xfrm>
+      </p:grpSpPr>
       <p:sp>
         <p:nvSpPr>
           <p:cNvPr id="2" name="Rectangle 1"/>
@@ -4366,7 +5697,7 @@
         </p:nvSpPr>
         <p:spPr>
           <a:xfrm>
-            <a:off x="0" y="0"/>
+            <a:off x="-15088" y="0"/>
             <a:ext cx="12191695" cy="6858000"/>
           </a:xfrm>
           <a:prstGeom prst="rect">
@@ -4399,227 +5730,7 @@
           <a:lstStyle/>
           <a:p>
             <a:pPr algn="ctr"/>
-          </a:p>
-        </p:txBody>
-      </p:sp>
-      <p:sp>
-        <p:nvSpPr>
-          <p:cNvPr id="3" name="TextBox 2"/>
-          <p:cNvSpPr txBox="1"/>
-          <p:nvPr/>
-        </p:nvSpPr>
-        <p:spPr>
-          <a:xfrm>
-            <a:off x="502920" y="256032"/>
-            <a:ext cx="11155680" cy="640080"/>
-          </a:xfrm>
-          <a:prstGeom prst="rect">
-            <a:avLst/>
-          </a:prstGeom>
-          <a:noFill/>
-        </p:spPr>
-        <p:txBody>
-          <a:bodyPr wrap="square" anchor="t" lIns="0" rIns="0" tIns="0" bIns="0">
-            <a:spAutoFit/>
-          </a:bodyPr>
-          <a:lstStyle/>
-          <a:p>
-            <a:pPr algn="l">
-              <a:spcBef>
-                <a:spcPts val="0"/>
-              </a:spcBef>
-              <a:spcAft>
-                <a:spcPts val="0"/>
-              </a:spcAft>
-            </a:pPr>
-            <a:r>
-              <a:rPr sz="2900" b="1">
-                <a:solidFill>
-                  <a:srgbClr val="F2F5FA"/>
-                </a:solidFill>
-                <a:latin typeface="Microsoft JhengHei"/>
-                <a:ea typeface="Microsoft JhengHei"/>
-                <a:cs typeface="Microsoft JhengHei"/>
-              </a:rPr>
-              <a:t>这是什么</a:t>
-            </a:r>
-          </a:p>
-        </p:txBody>
-      </p:sp>
-      <p:sp>
-        <p:nvSpPr>
-          <p:cNvPr id="4" name="Rectangle 3"/>
-          <p:cNvSpPr/>
-          <p:nvPr/>
-        </p:nvSpPr>
-        <p:spPr>
-          <a:xfrm>
-            <a:off x="548640" y="932688"/>
-            <a:ext cx="2194560" cy="54864"/>
-          </a:xfrm>
-          <a:prstGeom prst="rect">
-            <a:avLst/>
-          </a:prstGeom>
-          <a:solidFill>
-            <a:srgbClr val="5AB0FF"/>
-          </a:solidFill>
-          <a:ln>
-            <a:noFill/>
-          </a:ln>
-          <a:effectLst/>
-        </p:spPr>
-        <p:style>
-          <a:lnRef idx="1">
-            <a:schemeClr val="accent1"/>
-          </a:lnRef>
-          <a:fillRef idx="3">
-            <a:schemeClr val="accent1"/>
-          </a:fillRef>
-          <a:effectRef idx="2">
-            <a:schemeClr val="accent1"/>
-          </a:effectRef>
-          <a:fontRef idx="minor">
-            <a:schemeClr val="lt1"/>
-          </a:fontRef>
-        </p:style>
-        <p:txBody>
-          <a:bodyPr rtlCol="0" anchor="ctr"/>
-          <a:lstStyle/>
-          <a:p>
-            <a:pPr algn="ctr"/>
-          </a:p>
-        </p:txBody>
-      </p:sp>
-      <p:sp>
-        <p:nvSpPr>
-          <p:cNvPr id="5" name="TextBox 4"/>
-          <p:cNvSpPr txBox="1"/>
-          <p:nvPr/>
-        </p:nvSpPr>
-        <p:spPr>
-          <a:xfrm>
-            <a:off x="530352" y="1024128"/>
-            <a:ext cx="10789920" cy="292608"/>
-          </a:xfrm>
-          <a:prstGeom prst="rect">
-            <a:avLst/>
-          </a:prstGeom>
-          <a:noFill/>
-        </p:spPr>
-        <p:txBody>
-          <a:bodyPr wrap="square" anchor="t" lIns="0" rIns="0" tIns="0" bIns="0">
-            <a:spAutoFit/>
-          </a:bodyPr>
-          <a:lstStyle/>
-          <a:p>
-            <a:pPr algn="l">
-              <a:spcBef>
-                <a:spcPts val="0"/>
-              </a:spcBef>
-              <a:spcAft>
-                <a:spcPts val="0"/>
-              </a:spcAft>
-            </a:pPr>
-            <a:r>
-              <a:rPr sz="1400" b="1">
-                <a:solidFill>
-                  <a:srgbClr val="9AA4B2"/>
-                </a:solidFill>
-                <a:latin typeface="Microsoft JhengHei"/>
-                <a:ea typeface="Microsoft JhengHei"/>
-                <a:cs typeface="Microsoft JhengHei"/>
-              </a:rPr>
-              <a:t>WHAT IT IS</a:t>
-            </a:r>
-          </a:p>
-        </p:txBody>
-      </p:sp>
-      <p:pic>
-        <p:nvPicPr>
-          <p:cNvPr id="6" name="Picture 5" descr="flow.png"/>
-          <p:cNvPicPr>
-            <a:picLocks noChangeAspect="1"/>
-          </p:cNvPicPr>
-          <p:nvPr/>
-        </p:nvPicPr>
-        <p:blipFill>
-          <a:blip r:embed="rId2"/>
-          <a:stretch>
-            <a:fillRect/>
-          </a:stretch>
-        </p:blipFill>
-        <p:spPr>
-          <a:xfrm>
-            <a:off x="640080" y="1940453"/>
-            <a:ext cx="10881360" cy="2519893"/>
-          </a:xfrm>
-          <a:prstGeom prst="rect">
-            <a:avLst/>
-          </a:prstGeom>
-        </p:spPr>
-      </p:pic>
-      <p:sp>
-        <p:nvSpPr>
-          <p:cNvPr id="7" name="TextBox 6"/>
-          <p:cNvSpPr txBox="1"/>
-          <p:nvPr/>
-        </p:nvSpPr>
-        <p:spPr>
-          <a:xfrm>
-            <a:off x="640080" y="5029200"/>
-            <a:ext cx="10881360" cy="1280160"/>
-          </a:xfrm>
-          <a:prstGeom prst="rect">
-            <a:avLst/>
-          </a:prstGeom>
-          <a:noFill/>
-        </p:spPr>
-        <p:txBody>
-          <a:bodyPr wrap="square" anchor="t" lIns="0" rIns="0" tIns="0" bIns="0">
-            <a:spAutoFit/>
-          </a:bodyPr>
-          <a:lstStyle/>
-          <a:p>
-            <a:pPr algn="l">
-              <a:spcBef>
-                <a:spcPts val="0"/>
-              </a:spcBef>
-              <a:spcAft>
-                <a:spcPts val="0"/>
-              </a:spcAft>
-            </a:pPr>
-            <a:r>
-              <a:rPr sz="1600" b="1">
-                <a:solidFill>
-                  <a:srgbClr val="F2F5FA"/>
-                </a:solidFill>
-                <a:latin typeface="Microsoft JhengHei"/>
-                <a:ea typeface="Microsoft JhengHei"/>
-                <a:cs typeface="Microsoft JhengHei"/>
-              </a:rPr>
-              <a:t>真实建筑 → 贴角色 → 切权力情景（只改高度）→ 看天际线</a:t>
-            </a:r>
-          </a:p>
-          <a:p>
-            <a:pPr>
-              <a:spcBef>
-                <a:spcPts val="600"/>
-              </a:spcBef>
-              <a:spcAft>
-                <a:spcPts val="0"/>
-              </a:spcAft>
-            </a:pPr>
-            <a:r>
-              <a:rPr sz="1600" b="1">
-                <a:solidFill>
-                  <a:srgbClr val="F2F5FA"/>
-                </a:solidFill>
-                <a:latin typeface="Microsoft JhengHei"/>
-                <a:ea typeface="Microsoft JhengHei"/>
-                <a:cs typeface="Microsoft JhengHei"/>
-              </a:rPr>
-              <a:t>方向单向：由权力推导形态，不从形状反推身份</a:t>
-            </a:r>
+            <a:endParaRPr/>
           </a:p>
         </p:txBody>
       </p:sp>
@@ -4664,19 +5775,20 @@
           <a:lstStyle/>
           <a:p>
             <a:pPr algn="ctr"/>
-          </a:p>
-        </p:txBody>
-      </p:sp>
-      <p:sp>
-        <p:nvSpPr>
-          <p:cNvPr id="9" name="TextBox 8"/>
+            <a:endParaRPr/>
+          </a:p>
+        </p:txBody>
+      </p:sp>
+      <p:sp>
+        <p:nvSpPr>
+          <p:cNvPr id="10" name="TextBox 9"/>
           <p:cNvSpPr txBox="1"/>
           <p:nvPr/>
         </p:nvSpPr>
         <p:spPr>
           <a:xfrm>
-            <a:off x="457200" y="6492240"/>
-            <a:ext cx="10058400" cy="310896"/>
+            <a:off x="11155680" y="6492240"/>
+            <a:ext cx="822960" cy="310896"/>
           </a:xfrm>
           <a:prstGeom prst="rect">
             <a:avLst/>
@@ -4684,12 +5796,12 @@
           <a:noFill/>
         </p:spPr>
         <p:txBody>
-          <a:bodyPr wrap="square" anchor="t" lIns="0" rIns="0" tIns="0" bIns="0">
+          <a:bodyPr wrap="square" lIns="0" tIns="0" rIns="0" bIns="0" anchor="t">
             <a:spAutoFit/>
           </a:bodyPr>
           <a:lstStyle/>
           <a:p>
-            <a:pPr algn="l">
+            <a:pPr algn="r">
               <a:spcBef>
                 <a:spcPts val="0"/>
               </a:spcBef>
@@ -4706,21 +5818,27 @@
                 <a:ea typeface="Microsoft JhengHei"/>
                 <a:cs typeface="Microsoft JhengHei"/>
               </a:rPr>
-              <a:t>OSM 权力到形态 · 图解说明</a:t>
-            </a:r>
-          </a:p>
-        </p:txBody>
-      </p:sp>
-      <p:sp>
-        <p:nvSpPr>
-          <p:cNvPr id="10" name="TextBox 9"/>
+              <a:t>2</a:t>
+            </a:r>
+          </a:p>
+        </p:txBody>
+      </p:sp>
+      <p:sp>
+        <p:nvSpPr>
+          <p:cNvPr id="16" name="文字方塊 15">
+            <a:extLst>
+              <a:ext uri="{FF2B5EF4-FFF2-40B4-BE49-F238E27FC236}">
+                <a16:creationId xmlns:a16="http://schemas.microsoft.com/office/drawing/2014/main" id="{3182E73F-8A21-41C9-AC16-7822665E1CA6}"/>
+              </a:ext>
+            </a:extLst>
+          </p:cNvPr>
           <p:cNvSpPr txBox="1"/>
           <p:nvPr/>
         </p:nvSpPr>
         <p:spPr>
           <a:xfrm>
-            <a:off x="11155680" y="6492240"/>
-            <a:ext cx="822960" cy="310896"/>
+            <a:off x="807633" y="2950001"/>
+            <a:ext cx="1656223" cy="1200329"/>
           </a:xfrm>
           <a:prstGeom prst="rect">
             <a:avLst/>
@@ -4728,34 +5846,702 @@
           <a:noFill/>
         </p:spPr>
         <p:txBody>
-          <a:bodyPr wrap="square" anchor="t" lIns="0" rIns="0" tIns="0" bIns="0">
+          <a:bodyPr wrap="none" rtlCol="0">
             <a:spAutoFit/>
           </a:bodyPr>
           <a:lstStyle/>
           <a:p>
-            <a:pPr algn="r">
-              <a:spcBef>
-                <a:spcPts val="0"/>
-              </a:spcBef>
-              <a:spcAft>
-                <a:spcPts val="0"/>
-              </a:spcAft>
-            </a:pPr>
-            <a:r>
-              <a:rPr sz="1200" b="1">
-                <a:solidFill>
-                  <a:srgbClr val="9AA4B2"/>
-                </a:solidFill>
-                <a:latin typeface="Microsoft JhengHei"/>
-                <a:ea typeface="Microsoft JhengHei"/>
-                <a:cs typeface="Microsoft JhengHei"/>
-              </a:rPr>
-              <a:t>2</a:t>
-            </a:r>
-          </a:p>
-        </p:txBody>
-      </p:sp>
+            <a:r>
+              <a:rPr lang="en-US" altLang="zh-TW" dirty="0">
+                <a:solidFill>
+                  <a:schemeClr val="bg1"/>
+                </a:solidFill>
+                <a:latin typeface="微軟正黑體" panose="020B0604030504040204" pitchFamily="34" charset="-120"/>
+                <a:ea typeface="微軟正黑體" panose="020B0604030504040204" pitchFamily="34" charset="-120"/>
+              </a:rPr>
+              <a:t>GH </a:t>
+            </a:r>
+            <a:r>
+              <a:rPr lang="en-US" altLang="zh-TW" dirty="0" err="1">
+                <a:solidFill>
+                  <a:schemeClr val="bg1"/>
+                </a:solidFill>
+                <a:latin typeface="微軟正黑體" panose="020B0604030504040204" pitchFamily="34" charset="-120"/>
+                <a:ea typeface="微軟正黑體" panose="020B0604030504040204" pitchFamily="34" charset="-120"/>
+              </a:rPr>
+              <a:t>osm</a:t>
+            </a:r>
+            <a:r>
+              <a:rPr lang="en-US" altLang="zh-TW" dirty="0">
+                <a:solidFill>
+                  <a:schemeClr val="bg1"/>
+                </a:solidFill>
+                <a:latin typeface="微軟正黑體" panose="020B0604030504040204" pitchFamily="34" charset="-120"/>
+                <a:ea typeface="微軟正黑體" panose="020B0604030504040204" pitchFamily="34" charset="-120"/>
+              </a:rPr>
+              <a:t> </a:t>
+            </a:r>
+            <a:r>
+              <a:rPr lang="en-US" altLang="zh-TW" dirty="0" err="1">
+                <a:solidFill>
+                  <a:schemeClr val="bg1"/>
+                </a:solidFill>
+                <a:latin typeface="微軟正黑體" panose="020B0604030504040204" pitchFamily="34" charset="-120"/>
+                <a:ea typeface="微軟正黑體" panose="020B0604030504040204" pitchFamily="34" charset="-120"/>
+              </a:rPr>
+              <a:t>api</a:t>
+            </a:r>
+            <a:endParaRPr lang="en-US" altLang="zh-TW" dirty="0">
+              <a:solidFill>
+                <a:schemeClr val="bg1"/>
+              </a:solidFill>
+              <a:latin typeface="微軟正黑體" panose="020B0604030504040204" pitchFamily="34" charset="-120"/>
+              <a:ea typeface="微軟正黑體" panose="020B0604030504040204" pitchFamily="34" charset="-120"/>
+            </a:endParaRPr>
+          </a:p>
+          <a:p>
+            <a:r>
+              <a:rPr lang="en-US" altLang="zh-TW" dirty="0">
+                <a:solidFill>
+                  <a:schemeClr val="bg1"/>
+                </a:solidFill>
+                <a:latin typeface="微軟正黑體" panose="020B0604030504040204" pitchFamily="34" charset="-120"/>
+                <a:ea typeface="微軟正黑體" panose="020B0604030504040204" pitchFamily="34" charset="-120"/>
+              </a:rPr>
+              <a:t>GH </a:t>
+            </a:r>
+            <a:r>
+              <a:rPr lang="en-US" altLang="zh-TW" dirty="0" err="1">
+                <a:solidFill>
+                  <a:schemeClr val="bg1"/>
+                </a:solidFill>
+                <a:latin typeface="微軟正黑體" panose="020B0604030504040204" pitchFamily="34" charset="-120"/>
+                <a:ea typeface="微軟正黑體" panose="020B0604030504040204" pitchFamily="34" charset="-120"/>
+              </a:rPr>
+              <a:t>osm</a:t>
+            </a:r>
+            <a:r>
+              <a:rPr lang="en-US" altLang="zh-TW" dirty="0">
+                <a:solidFill>
+                  <a:schemeClr val="bg1"/>
+                </a:solidFill>
+                <a:latin typeface="微軟正黑體" panose="020B0604030504040204" pitchFamily="34" charset="-120"/>
+                <a:ea typeface="微軟正黑體" panose="020B0604030504040204" pitchFamily="34" charset="-120"/>
+              </a:rPr>
+              <a:t> local</a:t>
+            </a:r>
+          </a:p>
+          <a:p>
+            <a:endParaRPr lang="en-US" altLang="zh-TW" dirty="0">
+              <a:solidFill>
+                <a:schemeClr val="bg1"/>
+              </a:solidFill>
+              <a:latin typeface="微軟正黑體" panose="020B0604030504040204" pitchFamily="34" charset="-120"/>
+              <a:ea typeface="微軟正黑體" panose="020B0604030504040204" pitchFamily="34" charset="-120"/>
+            </a:endParaRPr>
+          </a:p>
+          <a:p>
+            <a:endParaRPr lang="zh-TW" altLang="en-US" dirty="0">
+              <a:solidFill>
+                <a:schemeClr val="bg1"/>
+              </a:solidFill>
+              <a:latin typeface="微軟正黑體" panose="020B0604030504040204" pitchFamily="34" charset="-120"/>
+              <a:ea typeface="微軟正黑體" panose="020B0604030504040204" pitchFamily="34" charset="-120"/>
+            </a:endParaRPr>
+          </a:p>
+        </p:txBody>
+      </p:sp>
+      <p:sp>
+        <p:nvSpPr>
+          <p:cNvPr id="17" name="文字方塊 16">
+            <a:extLst>
+              <a:ext uri="{FF2B5EF4-FFF2-40B4-BE49-F238E27FC236}">
+                <a16:creationId xmlns:a16="http://schemas.microsoft.com/office/drawing/2014/main" id="{738F00E3-3C82-46A0-AE71-23F6422BA729}"/>
+              </a:ext>
+            </a:extLst>
+          </p:cNvPr>
+          <p:cNvSpPr txBox="1"/>
+          <p:nvPr/>
+        </p:nvSpPr>
+        <p:spPr>
+          <a:xfrm>
+            <a:off x="9594115" y="2950001"/>
+            <a:ext cx="1680204" cy="923330"/>
+          </a:xfrm>
+          <a:prstGeom prst="rect">
+            <a:avLst/>
+          </a:prstGeom>
+          <a:noFill/>
+        </p:spPr>
+        <p:txBody>
+          <a:bodyPr wrap="none" rtlCol="0">
+            <a:spAutoFit/>
+          </a:bodyPr>
+          <a:lstStyle/>
+          <a:p>
+            <a:r>
+              <a:rPr lang="en-US" altLang="zh-TW" dirty="0">
+                <a:solidFill>
+                  <a:schemeClr val="bg1"/>
+                </a:solidFill>
+                <a:latin typeface="微軟正黑體" panose="020B0604030504040204" pitchFamily="34" charset="-120"/>
+                <a:ea typeface="微軟正黑體" panose="020B0604030504040204" pitchFamily="34" charset="-120"/>
+              </a:rPr>
+              <a:t>Color preview</a:t>
+            </a:r>
+          </a:p>
+          <a:p>
+            <a:r>
+              <a:rPr lang="en-US" altLang="zh-TW" dirty="0">
+                <a:solidFill>
+                  <a:schemeClr val="bg1"/>
+                </a:solidFill>
+                <a:latin typeface="微軟正黑體" panose="020B0604030504040204" pitchFamily="34" charset="-120"/>
+                <a:ea typeface="微軟正黑體" panose="020B0604030504040204" pitchFamily="34" charset="-120"/>
+              </a:rPr>
+              <a:t>GH animate</a:t>
+            </a:r>
+          </a:p>
+          <a:p>
+            <a:endParaRPr lang="zh-TW" altLang="en-US" dirty="0">
+              <a:solidFill>
+                <a:schemeClr val="bg1"/>
+              </a:solidFill>
+              <a:latin typeface="微軟正黑體" panose="020B0604030504040204" pitchFamily="34" charset="-120"/>
+              <a:ea typeface="微軟正黑體" panose="020B0604030504040204" pitchFamily="34" charset="-120"/>
+            </a:endParaRPr>
+          </a:p>
+        </p:txBody>
+      </p:sp>
+      <p:sp>
+        <p:nvSpPr>
+          <p:cNvPr id="18" name="矩形 17">
+            <a:extLst>
+              <a:ext uri="{FF2B5EF4-FFF2-40B4-BE49-F238E27FC236}">
+                <a16:creationId xmlns:a16="http://schemas.microsoft.com/office/drawing/2014/main" id="{8118A83F-94D8-4A6C-ADCE-DF8780A4794F}"/>
+              </a:ext>
+            </a:extLst>
+          </p:cNvPr>
+          <p:cNvSpPr/>
+          <p:nvPr/>
+        </p:nvSpPr>
+        <p:spPr>
+          <a:xfrm>
+            <a:off x="843251" y="1684919"/>
+            <a:ext cx="1584989" cy="904240"/>
+          </a:xfrm>
+          <a:prstGeom prst="rect">
+            <a:avLst/>
+          </a:prstGeom>
+          <a:solidFill>
+            <a:srgbClr val="241634"/>
+          </a:solidFill>
+          <a:ln w="15875">
+            <a:solidFill>
+              <a:srgbClr val="C79BFF"/>
+            </a:solidFill>
+          </a:ln>
+          <a:effectLst/>
+        </p:spPr>
+        <p:style>
+          <a:lnRef idx="1">
+            <a:schemeClr val="accent1"/>
+          </a:lnRef>
+          <a:fillRef idx="3">
+            <a:schemeClr val="accent1"/>
+          </a:fillRef>
+          <a:effectRef idx="2">
+            <a:schemeClr val="accent1"/>
+          </a:effectRef>
+          <a:fontRef idx="minor">
+            <a:schemeClr val="lt1"/>
+          </a:fontRef>
+        </p:style>
+        <p:txBody>
+          <a:bodyPr wrap="square" lIns="45720" tIns="27432" rIns="45720" bIns="27432" rtlCol="0" anchor="ctr"/>
+          <a:lstStyle/>
+          <a:p>
+            <a:pPr algn="ctr"/>
+            <a:r>
+              <a:rPr lang="zh-TW" altLang="en-US" sz="1600" b="1" dirty="0">
+                <a:solidFill>
+                  <a:schemeClr val="bg1"/>
+                </a:solidFill>
+                <a:latin typeface="微軟正黑體" panose="020B0604030504040204" pitchFamily="34" charset="-120"/>
+                <a:ea typeface="微軟正黑體" panose="020B0604030504040204" pitchFamily="34" charset="-120"/>
+              </a:rPr>
+              <a:t>城市資料讀取</a:t>
+            </a:r>
+          </a:p>
+        </p:txBody>
+      </p:sp>
+      <p:sp>
+        <p:nvSpPr>
+          <p:cNvPr id="19" name="矩形 18">
+            <a:extLst>
+              <a:ext uri="{FF2B5EF4-FFF2-40B4-BE49-F238E27FC236}">
+                <a16:creationId xmlns:a16="http://schemas.microsoft.com/office/drawing/2014/main" id="{0A69D54E-D118-4643-BEFA-A7860FED4314}"/>
+              </a:ext>
+            </a:extLst>
+          </p:cNvPr>
+          <p:cNvSpPr/>
+          <p:nvPr/>
+        </p:nvSpPr>
+        <p:spPr>
+          <a:xfrm>
+            <a:off x="7464761" y="1684919"/>
+            <a:ext cx="1463040" cy="904240"/>
+          </a:xfrm>
+          <a:prstGeom prst="rect">
+            <a:avLst/>
+          </a:prstGeom>
+          <a:solidFill>
+            <a:srgbClr val="10301A"/>
+          </a:solidFill>
+          <a:ln w="15875">
+            <a:solidFill>
+              <a:srgbClr val="6FE36F"/>
+            </a:solidFill>
+          </a:ln>
+          <a:effectLst/>
+        </p:spPr>
+        <p:style>
+          <a:lnRef idx="1">
+            <a:schemeClr val="accent1"/>
+          </a:lnRef>
+          <a:fillRef idx="3">
+            <a:schemeClr val="accent1"/>
+          </a:fillRef>
+          <a:effectRef idx="2">
+            <a:schemeClr val="accent1"/>
+          </a:effectRef>
+          <a:fontRef idx="minor">
+            <a:schemeClr val="lt1"/>
+          </a:fontRef>
+        </p:style>
+        <p:txBody>
+          <a:bodyPr wrap="square" lIns="45720" tIns="27432" rIns="45720" bIns="27432" rtlCol="0" anchor="ctr"/>
+          <a:lstStyle/>
+          <a:p>
+            <a:pPr algn="ctr"/>
+            <a:r>
+              <a:rPr lang="zh-TW" altLang="en-US" b="1" dirty="0">
+                <a:solidFill>
+                  <a:schemeClr val="bg1"/>
+                </a:solidFill>
+                <a:latin typeface="微軟正黑體" panose="020B0604030504040204" pitchFamily="34" charset="-120"/>
+                <a:ea typeface="微軟正黑體" panose="020B0604030504040204" pitchFamily="34" charset="-120"/>
+              </a:rPr>
+              <a:t>生成新城市</a:t>
+            </a:r>
+          </a:p>
+        </p:txBody>
+      </p:sp>
+      <p:sp>
+        <p:nvSpPr>
+          <p:cNvPr id="20" name="矩形 19">
+            <a:extLst>
+              <a:ext uri="{FF2B5EF4-FFF2-40B4-BE49-F238E27FC236}">
+                <a16:creationId xmlns:a16="http://schemas.microsoft.com/office/drawing/2014/main" id="{8C4758C9-A805-4D96-9A29-566386DFC915}"/>
+              </a:ext>
+            </a:extLst>
+          </p:cNvPr>
+          <p:cNvSpPr/>
+          <p:nvPr/>
+        </p:nvSpPr>
+        <p:spPr>
+          <a:xfrm>
+            <a:off x="3131720" y="1684919"/>
+            <a:ext cx="1463040" cy="904240"/>
+          </a:xfrm>
+          <a:prstGeom prst="rect">
+            <a:avLst/>
+          </a:prstGeom>
+          <a:solidFill>
+            <a:srgbClr val="12253C"/>
+          </a:solidFill>
+          <a:ln w="15875">
+            <a:solidFill>
+              <a:srgbClr val="5AB0FF"/>
+            </a:solidFill>
+          </a:ln>
+          <a:effectLst/>
+        </p:spPr>
+        <p:style>
+          <a:lnRef idx="1">
+            <a:schemeClr val="accent1"/>
+          </a:lnRef>
+          <a:fillRef idx="3">
+            <a:schemeClr val="accent1"/>
+          </a:fillRef>
+          <a:effectRef idx="2">
+            <a:schemeClr val="accent1"/>
+          </a:effectRef>
+          <a:fontRef idx="minor">
+            <a:schemeClr val="lt1"/>
+          </a:fontRef>
+        </p:style>
+        <p:txBody>
+          <a:bodyPr wrap="square" lIns="45720" tIns="27432" rIns="45720" bIns="27432" rtlCol="0" anchor="ctr"/>
+          <a:lstStyle/>
+          <a:p>
+            <a:pPr algn="ctr"/>
+            <a:r>
+              <a:rPr lang="zh-TW" altLang="en-US" sz="1600" b="1" dirty="0">
+                <a:solidFill>
+                  <a:schemeClr val="bg1"/>
+                </a:solidFill>
+                <a:latin typeface="微軟正黑體" panose="020B0604030504040204" pitchFamily="34" charset="-120"/>
+                <a:ea typeface="微軟正黑體" panose="020B0604030504040204" pitchFamily="34" charset="-120"/>
+              </a:rPr>
+              <a:t>資料編碼</a:t>
+            </a:r>
+          </a:p>
+        </p:txBody>
+      </p:sp>
+      <p:sp>
+        <p:nvSpPr>
+          <p:cNvPr id="21" name="矩形 20">
+            <a:extLst>
+              <a:ext uri="{FF2B5EF4-FFF2-40B4-BE49-F238E27FC236}">
+                <a16:creationId xmlns:a16="http://schemas.microsoft.com/office/drawing/2014/main" id="{5C65D037-2199-4C06-9DB0-B4ADB6C22B39}"/>
+              </a:ext>
+            </a:extLst>
+          </p:cNvPr>
+          <p:cNvSpPr/>
+          <p:nvPr/>
+        </p:nvSpPr>
+        <p:spPr>
+          <a:xfrm>
+            <a:off x="9631282" y="1684919"/>
+            <a:ext cx="1463040" cy="904240"/>
+          </a:xfrm>
+          <a:prstGeom prst="rect">
+            <a:avLst/>
+          </a:prstGeom>
+          <a:solidFill>
+            <a:srgbClr val="322910"/>
+          </a:solidFill>
+          <a:ln w="15875">
+            <a:solidFill>
+              <a:srgbClr val="FFD166"/>
+            </a:solidFill>
+          </a:ln>
+          <a:effectLst/>
+        </p:spPr>
+        <p:style>
+          <a:lnRef idx="1">
+            <a:schemeClr val="accent1"/>
+          </a:lnRef>
+          <a:fillRef idx="3">
+            <a:schemeClr val="accent1"/>
+          </a:fillRef>
+          <a:effectRef idx="2">
+            <a:schemeClr val="accent1"/>
+          </a:effectRef>
+          <a:fontRef idx="minor">
+            <a:schemeClr val="lt1"/>
+          </a:fontRef>
+        </p:style>
+        <p:txBody>
+          <a:bodyPr wrap="square" lIns="45720" tIns="27432" rIns="45720" bIns="27432" rtlCol="0" anchor="ctr"/>
+          <a:lstStyle/>
+          <a:p>
+            <a:pPr algn="ctr"/>
+            <a:r>
+              <a:rPr lang="zh-TW" altLang="en-US" sz="1600" b="1" dirty="0">
+                <a:solidFill>
+                  <a:schemeClr val="bg1"/>
+                </a:solidFill>
+                <a:latin typeface="微軟正黑體" panose="020B0604030504040204" pitchFamily="34" charset="-120"/>
+                <a:ea typeface="微軟正黑體" panose="020B0604030504040204" pitchFamily="34" charset="-120"/>
+              </a:rPr>
+              <a:t>後續导出</a:t>
+            </a:r>
+            <a:endParaRPr lang="en-US" altLang="zh-TW" sz="1600" b="1" dirty="0">
+              <a:solidFill>
+                <a:schemeClr val="bg1"/>
+              </a:solidFill>
+              <a:latin typeface="微軟正黑體" panose="020B0604030504040204" pitchFamily="34" charset="-120"/>
+              <a:ea typeface="微軟正黑體" panose="020B0604030504040204" pitchFamily="34" charset="-120"/>
+            </a:endParaRPr>
+          </a:p>
+          <a:p>
+            <a:pPr algn="ctr"/>
+            <a:r>
+              <a:rPr lang="zh-TW" altLang="en-US" sz="1600" b="1" dirty="0">
+                <a:solidFill>
+                  <a:schemeClr val="bg1"/>
+                </a:solidFill>
+                <a:latin typeface="微軟正黑體" panose="020B0604030504040204" pitchFamily="34" charset="-120"/>
+                <a:ea typeface="微軟正黑體" panose="020B0604030504040204" pitchFamily="34" charset="-120"/>
+              </a:rPr>
+              <a:t>可視化</a:t>
+            </a:r>
+          </a:p>
+        </p:txBody>
+      </p:sp>
+      <p:sp>
+        <p:nvSpPr>
+          <p:cNvPr id="23" name="矩形 22">
+            <a:extLst>
+              <a:ext uri="{FF2B5EF4-FFF2-40B4-BE49-F238E27FC236}">
+                <a16:creationId xmlns:a16="http://schemas.microsoft.com/office/drawing/2014/main" id="{4C743694-911E-42B6-BDC9-3A16071848AF}"/>
+              </a:ext>
+            </a:extLst>
+          </p:cNvPr>
+          <p:cNvSpPr/>
+          <p:nvPr/>
+        </p:nvSpPr>
+        <p:spPr>
+          <a:xfrm>
+            <a:off x="5298240" y="1684919"/>
+            <a:ext cx="1463040" cy="904240"/>
+          </a:xfrm>
+          <a:prstGeom prst="rect">
+            <a:avLst/>
+          </a:prstGeom>
+          <a:solidFill>
+            <a:schemeClr val="tx1">
+              <a:lumMod val="85000"/>
+              <a:lumOff val="15000"/>
+            </a:schemeClr>
+          </a:solidFill>
+          <a:ln w="15875">
+            <a:solidFill>
+              <a:schemeClr val="bg1">
+                <a:lumMod val="95000"/>
+              </a:schemeClr>
+            </a:solidFill>
+          </a:ln>
+          <a:effectLst/>
+        </p:spPr>
+        <p:style>
+          <a:lnRef idx="1">
+            <a:schemeClr val="accent1"/>
+          </a:lnRef>
+          <a:fillRef idx="3">
+            <a:schemeClr val="accent1"/>
+          </a:fillRef>
+          <a:effectRef idx="2">
+            <a:schemeClr val="accent1"/>
+          </a:effectRef>
+          <a:fontRef idx="minor">
+            <a:schemeClr val="lt1"/>
+          </a:fontRef>
+        </p:style>
+        <p:txBody>
+          <a:bodyPr wrap="square" lIns="45720" tIns="27432" rIns="45720" bIns="27432" rtlCol="0" anchor="ctr"/>
+          <a:lstStyle/>
+          <a:p>
+            <a:pPr algn="ctr"/>
+            <a:r>
+              <a:rPr lang="zh-TW" altLang="en-US" b="1" dirty="0">
+                <a:solidFill>
+                  <a:schemeClr val="bg1"/>
+                </a:solidFill>
+                <a:latin typeface="微軟正黑體" panose="020B0604030504040204" pitchFamily="34" charset="-120"/>
+                <a:ea typeface="微軟正黑體" panose="020B0604030504040204" pitchFamily="34" charset="-120"/>
+              </a:rPr>
+              <a:t>權力重分配</a:t>
+            </a:r>
+          </a:p>
+        </p:txBody>
+      </p:sp>
+      <p:cxnSp>
+        <p:nvCxnSpPr>
+          <p:cNvPr id="4" name="直線單箭頭接點 3">
+            <a:extLst>
+              <a:ext uri="{FF2B5EF4-FFF2-40B4-BE49-F238E27FC236}">
+                <a16:creationId xmlns:a16="http://schemas.microsoft.com/office/drawing/2014/main" id="{256ACBCC-2124-4E9E-AEF4-39E5012ABE3B}"/>
+              </a:ext>
+            </a:extLst>
+          </p:cNvPr>
+          <p:cNvCxnSpPr>
+            <a:stCxn id="18" idx="3"/>
+            <a:endCxn id="20" idx="1"/>
+          </p:cNvCxnSpPr>
+          <p:nvPr/>
+        </p:nvCxnSpPr>
+        <p:spPr>
+          <a:xfrm>
+            <a:off x="2428240" y="2137039"/>
+            <a:ext cx="703480" cy="0"/>
+          </a:xfrm>
+          <a:prstGeom prst="straightConnector1">
+            <a:avLst/>
+          </a:prstGeom>
+          <a:ln>
+            <a:solidFill>
+              <a:schemeClr val="bg1">
+                <a:lumMod val="95000"/>
+              </a:schemeClr>
+            </a:solidFill>
+            <a:tailEnd type="triangle"/>
+          </a:ln>
+        </p:spPr>
+        <p:style>
+          <a:lnRef idx="2">
+            <a:schemeClr val="dk1"/>
+          </a:lnRef>
+          <a:fillRef idx="0">
+            <a:schemeClr val="dk1"/>
+          </a:fillRef>
+          <a:effectRef idx="1">
+            <a:schemeClr val="dk1"/>
+          </a:effectRef>
+          <a:fontRef idx="minor">
+            <a:schemeClr val="tx1"/>
+          </a:fontRef>
+        </p:style>
+      </p:cxnSp>
+      <p:cxnSp>
+        <p:nvCxnSpPr>
+          <p:cNvPr id="7" name="直線單箭頭接點 6">
+            <a:extLst>
+              <a:ext uri="{FF2B5EF4-FFF2-40B4-BE49-F238E27FC236}">
+                <a16:creationId xmlns:a16="http://schemas.microsoft.com/office/drawing/2014/main" id="{118AECBA-3B7E-4462-AC32-5091DC6FE71A}"/>
+              </a:ext>
+            </a:extLst>
+          </p:cNvPr>
+          <p:cNvCxnSpPr>
+            <a:stCxn id="20" idx="3"/>
+            <a:endCxn id="23" idx="1"/>
+          </p:cNvCxnSpPr>
+          <p:nvPr/>
+        </p:nvCxnSpPr>
+        <p:spPr>
+          <a:xfrm>
+            <a:off x="4594760" y="2137039"/>
+            <a:ext cx="703480" cy="0"/>
+          </a:xfrm>
+          <a:prstGeom prst="straightConnector1">
+            <a:avLst/>
+          </a:prstGeom>
+          <a:ln>
+            <a:solidFill>
+              <a:schemeClr val="bg1">
+                <a:lumMod val="95000"/>
+              </a:schemeClr>
+            </a:solidFill>
+            <a:tailEnd type="triangle"/>
+          </a:ln>
+        </p:spPr>
+        <p:style>
+          <a:lnRef idx="2">
+            <a:schemeClr val="accent1"/>
+          </a:lnRef>
+          <a:fillRef idx="0">
+            <a:schemeClr val="accent1"/>
+          </a:fillRef>
+          <a:effectRef idx="1">
+            <a:schemeClr val="accent1"/>
+          </a:effectRef>
+          <a:fontRef idx="minor">
+            <a:schemeClr val="tx1"/>
+          </a:fontRef>
+        </p:style>
+      </p:cxnSp>
+      <p:cxnSp>
+        <p:nvCxnSpPr>
+          <p:cNvPr id="24" name="直線單箭頭接點 23">
+            <a:extLst>
+              <a:ext uri="{FF2B5EF4-FFF2-40B4-BE49-F238E27FC236}">
+                <a16:creationId xmlns:a16="http://schemas.microsoft.com/office/drawing/2014/main" id="{0F7357E4-749E-4A99-B1A1-59E84039DD1A}"/>
+              </a:ext>
+            </a:extLst>
+          </p:cNvPr>
+          <p:cNvCxnSpPr>
+            <a:stCxn id="23" idx="3"/>
+            <a:endCxn id="19" idx="1"/>
+          </p:cNvCxnSpPr>
+          <p:nvPr/>
+        </p:nvCxnSpPr>
+        <p:spPr>
+          <a:xfrm>
+            <a:off x="6761280" y="2137039"/>
+            <a:ext cx="703481" cy="0"/>
+          </a:xfrm>
+          <a:prstGeom prst="straightConnector1">
+            <a:avLst/>
+          </a:prstGeom>
+          <a:ln>
+            <a:solidFill>
+              <a:schemeClr val="bg1">
+                <a:lumMod val="95000"/>
+              </a:schemeClr>
+            </a:solidFill>
+            <a:tailEnd type="triangle"/>
+          </a:ln>
+        </p:spPr>
+        <p:style>
+          <a:lnRef idx="2">
+            <a:schemeClr val="accent1"/>
+          </a:lnRef>
+          <a:fillRef idx="0">
+            <a:schemeClr val="accent1"/>
+          </a:fillRef>
+          <a:effectRef idx="1">
+            <a:schemeClr val="accent1"/>
+          </a:effectRef>
+          <a:fontRef idx="minor">
+            <a:schemeClr val="tx1"/>
+          </a:fontRef>
+        </p:style>
+      </p:cxnSp>
+      <p:cxnSp>
+        <p:nvCxnSpPr>
+          <p:cNvPr id="26" name="直線單箭頭接點 25">
+            <a:extLst>
+              <a:ext uri="{FF2B5EF4-FFF2-40B4-BE49-F238E27FC236}">
+                <a16:creationId xmlns:a16="http://schemas.microsoft.com/office/drawing/2014/main" id="{72658D94-56F3-490D-9539-96B578B4C134}"/>
+              </a:ext>
+            </a:extLst>
+          </p:cNvPr>
+          <p:cNvCxnSpPr>
+            <a:stCxn id="19" idx="3"/>
+            <a:endCxn id="21" idx="1"/>
+          </p:cNvCxnSpPr>
+          <p:nvPr/>
+        </p:nvCxnSpPr>
+        <p:spPr>
+          <a:xfrm>
+            <a:off x="8927801" y="2137039"/>
+            <a:ext cx="703481" cy="0"/>
+          </a:xfrm>
+          <a:prstGeom prst="straightConnector1">
+            <a:avLst/>
+          </a:prstGeom>
+          <a:ln>
+            <a:solidFill>
+              <a:schemeClr val="bg1">
+                <a:lumMod val="95000"/>
+              </a:schemeClr>
+            </a:solidFill>
+            <a:tailEnd type="triangle"/>
+          </a:ln>
+        </p:spPr>
+        <p:style>
+          <a:lnRef idx="2">
+            <a:schemeClr val="accent1"/>
+          </a:lnRef>
+          <a:fillRef idx="0">
+            <a:schemeClr val="accent1"/>
+          </a:fillRef>
+          <a:effectRef idx="1">
+            <a:schemeClr val="accent1"/>
+          </a:effectRef>
+          <a:fontRef idx="minor">
+            <a:schemeClr val="tx1"/>
+          </a:fontRef>
+        </p:style>
+      </p:cxnSp>
     </p:spTree>
+    <p:extLst>
+      <p:ext uri="{BB962C8B-B14F-4D97-AF65-F5344CB8AC3E}">
+        <p14:creationId xmlns:p14="http://schemas.microsoft.com/office/powerpoint/2010/main" val="916159696"/>
+      </p:ext>
+    </p:extLst>
   </p:cSld>
   <p:clrMapOvr>
     <a:masterClrMapping/>
@@ -4764,7 +6550,7 @@
 </file>
 
 <file path=ppt/slides/slide3.xml><?xml version="1.0" encoding="utf-8"?>
-<p:sld xmlns:a="http://schemas.openxmlformats.org/drawingml/2006/main" xmlns:p="http://schemas.openxmlformats.org/presentationml/2006/main" xmlns:r="http://schemas.openxmlformats.org/officeDocument/2006/relationships">
+<p:sld xmlns:a="http://schemas.openxmlformats.org/drawingml/2006/main" xmlns:r="http://schemas.openxmlformats.org/officeDocument/2006/relationships" xmlns:p="http://schemas.openxmlformats.org/presentationml/2006/main">
   <p:cSld>
     <p:spTree>
       <p:nvGrpSpPr>
@@ -4772,7 +6558,14 @@
         <p:cNvGrpSpPr/>
         <p:nvPr/>
       </p:nvGrpSpPr>
-      <p:grpSpPr/>
+      <p:grpSpPr>
+        <a:xfrm>
+          <a:off x="0" y="0"/>
+          <a:ext cx="0" cy="0"/>
+          <a:chOff x="0" y="0"/>
+          <a:chExt cx="0" cy="0"/>
+        </a:xfrm>
+      </p:grpSpPr>
       <p:sp>
         <p:nvSpPr>
           <p:cNvPr id="2" name="Rectangle 1"/>
@@ -4781,7 +6574,7 @@
         </p:nvSpPr>
         <p:spPr>
           <a:xfrm>
-            <a:off x="0" y="0"/>
+            <a:off x="-15088" y="0"/>
             <a:ext cx="12191695" cy="6858000"/>
           </a:xfrm>
           <a:prstGeom prst="rect">
@@ -4814,269 +6607,7 @@
           <a:lstStyle/>
           <a:p>
             <a:pPr algn="ctr"/>
-          </a:p>
-        </p:txBody>
-      </p:sp>
-      <p:sp>
-        <p:nvSpPr>
-          <p:cNvPr id="3" name="TextBox 2"/>
-          <p:cNvSpPr txBox="1"/>
-          <p:nvPr/>
-        </p:nvSpPr>
-        <p:spPr>
-          <a:xfrm>
-            <a:off x="502920" y="256032"/>
-            <a:ext cx="11155680" cy="640080"/>
-          </a:xfrm>
-          <a:prstGeom prst="rect">
-            <a:avLst/>
-          </a:prstGeom>
-          <a:noFill/>
-        </p:spPr>
-        <p:txBody>
-          <a:bodyPr wrap="square" anchor="t" lIns="0" rIns="0" tIns="0" bIns="0">
-            <a:spAutoFit/>
-          </a:bodyPr>
-          <a:lstStyle/>
-          <a:p>
-            <a:pPr algn="l">
-              <a:spcBef>
-                <a:spcPts val="0"/>
-              </a:spcBef>
-              <a:spcAft>
-                <a:spcPts val="0"/>
-              </a:spcAft>
-            </a:pPr>
-            <a:r>
-              <a:rPr sz="2900" b="1">
-                <a:solidFill>
-                  <a:srgbClr val="F2F5FA"/>
-                </a:solidFill>
-                <a:latin typeface="Microsoft JhengHei"/>
-                <a:ea typeface="Microsoft JhengHei"/>
-                <a:cs typeface="Microsoft JhengHei"/>
-              </a:rPr>
-              <a:t>什么是占地</a:t>
-            </a:r>
-          </a:p>
-        </p:txBody>
-      </p:sp>
-      <p:sp>
-        <p:nvSpPr>
-          <p:cNvPr id="4" name="Rectangle 3"/>
-          <p:cNvSpPr/>
-          <p:nvPr/>
-        </p:nvSpPr>
-        <p:spPr>
-          <a:xfrm>
-            <a:off x="548640" y="932688"/>
-            <a:ext cx="2194560" cy="54864"/>
-          </a:xfrm>
-          <a:prstGeom prst="rect">
-            <a:avLst/>
-          </a:prstGeom>
-          <a:solidFill>
-            <a:srgbClr val="6FE36F"/>
-          </a:solidFill>
-          <a:ln>
-            <a:noFill/>
-          </a:ln>
-          <a:effectLst/>
-        </p:spPr>
-        <p:style>
-          <a:lnRef idx="1">
-            <a:schemeClr val="accent1"/>
-          </a:lnRef>
-          <a:fillRef idx="3">
-            <a:schemeClr val="accent1"/>
-          </a:fillRef>
-          <a:effectRef idx="2">
-            <a:schemeClr val="accent1"/>
-          </a:effectRef>
-          <a:fontRef idx="minor">
-            <a:schemeClr val="lt1"/>
-          </a:fontRef>
-        </p:style>
-        <p:txBody>
-          <a:bodyPr rtlCol="0" anchor="ctr"/>
-          <a:lstStyle/>
-          <a:p>
-            <a:pPr algn="ctr"/>
-          </a:p>
-        </p:txBody>
-      </p:sp>
-      <p:sp>
-        <p:nvSpPr>
-          <p:cNvPr id="5" name="TextBox 4"/>
-          <p:cNvSpPr txBox="1"/>
-          <p:nvPr/>
-        </p:nvSpPr>
-        <p:spPr>
-          <a:xfrm>
-            <a:off x="530352" y="1024128"/>
-            <a:ext cx="10789920" cy="292608"/>
-          </a:xfrm>
-          <a:prstGeom prst="rect">
-            <a:avLst/>
-          </a:prstGeom>
-          <a:noFill/>
-        </p:spPr>
-        <p:txBody>
-          <a:bodyPr wrap="square" anchor="t" lIns="0" rIns="0" tIns="0" bIns="0">
-            <a:spAutoFit/>
-          </a:bodyPr>
-          <a:lstStyle/>
-          <a:p>
-            <a:pPr algn="l">
-              <a:spcBef>
-                <a:spcPts val="0"/>
-              </a:spcBef>
-              <a:spcAft>
-                <a:spcPts val="0"/>
-              </a:spcAft>
-            </a:pPr>
-            <a:r>
-              <a:rPr sz="1400" b="1">
-                <a:solidFill>
-                  <a:srgbClr val="9AA4B2"/>
-                </a:solidFill>
-                <a:latin typeface="Microsoft JhengHei"/>
-                <a:ea typeface="Microsoft JhengHei"/>
-                <a:cs typeface="Microsoft JhengHei"/>
-              </a:rPr>
-              <a:t>FOOTPRINT</a:t>
-            </a:r>
-          </a:p>
-        </p:txBody>
-      </p:sp>
-      <p:pic>
-        <p:nvPicPr>
-          <p:cNvPr id="6" name="Picture 5" descr="footprint_gray.png"/>
-          <p:cNvPicPr>
-            <a:picLocks noChangeAspect="1"/>
-          </p:cNvPicPr>
-          <p:nvPr/>
-        </p:nvPicPr>
-        <p:blipFill>
-          <a:blip r:embed="rId2"/>
-          <a:stretch>
-            <a:fillRect/>
-          </a:stretch>
-        </p:blipFill>
-        <p:spPr>
-          <a:xfrm>
-            <a:off x="1077943" y="1554480"/>
-            <a:ext cx="4976432" cy="4480560"/>
-          </a:xfrm>
-          <a:prstGeom prst="rect">
-            <a:avLst/>
-          </a:prstGeom>
-        </p:spPr>
-      </p:pic>
-      <p:sp>
-        <p:nvSpPr>
-          <p:cNvPr id="7" name="TextBox 6"/>
-          <p:cNvSpPr txBox="1"/>
-          <p:nvPr/>
-        </p:nvSpPr>
-        <p:spPr>
-          <a:xfrm>
-            <a:off x="6949440" y="1737360"/>
-            <a:ext cx="4754880" cy="4297680"/>
-          </a:xfrm>
-          <a:prstGeom prst="rect">
-            <a:avLst/>
-          </a:prstGeom>
-          <a:noFill/>
-        </p:spPr>
-        <p:txBody>
-          <a:bodyPr wrap="square" anchor="t" lIns="0" rIns="0" tIns="0" bIns="0">
-            <a:spAutoFit/>
-          </a:bodyPr>
-          <a:lstStyle/>
-          <a:p>
-            <a:pPr algn="l">
-              <a:spcBef>
-                <a:spcPts val="0"/>
-              </a:spcBef>
-              <a:spcAft>
-                <a:spcPts val="0"/>
-              </a:spcAft>
-            </a:pPr>
-            <a:r>
-              <a:rPr sz="1700" b="1">
-                <a:solidFill>
-                  <a:srgbClr val="F2F5FA"/>
-                </a:solidFill>
-                <a:latin typeface="Microsoft JhengHei"/>
-                <a:ea typeface="Microsoft JhengHei"/>
-                <a:cs typeface="Microsoft JhengHei"/>
-              </a:rPr>
-              <a:t>占地：从空中俯视，一栋楼盖住的那块地的轮廓。</a:t>
-            </a:r>
-          </a:p>
-          <a:p>
-            <a:pPr>
-              <a:spcBef>
-                <a:spcPts val="1200"/>
-              </a:spcBef>
-              <a:spcAft>
-                <a:spcPts val="0"/>
-              </a:spcAft>
-            </a:pPr>
-            <a:r>
-              <a:rPr sz="1700" b="1">
-                <a:solidFill>
-                  <a:srgbClr val="F2F5FA"/>
-                </a:solidFill>
-                <a:latin typeface="Microsoft JhengHei"/>
-                <a:ea typeface="Microsoft JhengHei"/>
-                <a:cs typeface="Microsoft JhengHei"/>
-              </a:rPr>
-              <a:t>这里先不上色，看清原始的一批真实建筑。</a:t>
-            </a:r>
-          </a:p>
-          <a:p>
-            <a:pPr>
-              <a:spcBef>
-                <a:spcPts val="1200"/>
-              </a:spcBef>
-              <a:spcAft>
-                <a:spcPts val="0"/>
-              </a:spcAft>
-            </a:pPr>
-            <a:r>
-              <a:rPr sz="1700" b="1">
-                <a:solidFill>
-                  <a:srgbClr val="F2F5FA"/>
-                </a:solidFill>
-                <a:latin typeface="Microsoft JhengHei"/>
-                <a:ea typeface="Microsoft JhengHei"/>
-                <a:cs typeface="Microsoft JhengHei"/>
-              </a:rPr>
-              <a:t>样本：新加坡大巴窑，1163 栋。</a:t>
-            </a:r>
-          </a:p>
-          <a:p>
-            <a:pPr>
-              <a:spcBef>
-                <a:spcPts val="1200"/>
-              </a:spcBef>
-              <a:spcAft>
-                <a:spcPts val="0"/>
-              </a:spcAft>
-            </a:pPr>
-            <a:r>
-              <a:rPr sz="1700" b="1">
-                <a:solidFill>
-                  <a:srgbClr val="F2F5FA"/>
-                </a:solidFill>
-                <a:latin typeface="Microsoft JhengHei"/>
-                <a:ea typeface="Microsoft JhengHei"/>
-                <a:cs typeface="Microsoft JhengHei"/>
-              </a:rPr>
-              <a:t>占地固定不动；后面只让高度变化。</a:t>
-            </a:r>
+            <a:endParaRPr lang="zh-TW" altLang="en-US" dirty="0"/>
           </a:p>
         </p:txBody>
       </p:sp>
@@ -5121,19 +6652,20 @@
           <a:lstStyle/>
           <a:p>
             <a:pPr algn="ctr"/>
-          </a:p>
-        </p:txBody>
-      </p:sp>
-      <p:sp>
-        <p:nvSpPr>
-          <p:cNvPr id="9" name="TextBox 8"/>
+            <a:endParaRPr/>
+          </a:p>
+        </p:txBody>
+      </p:sp>
+      <p:sp>
+        <p:nvSpPr>
+          <p:cNvPr id="10" name="TextBox 9"/>
           <p:cNvSpPr txBox="1"/>
           <p:nvPr/>
         </p:nvSpPr>
         <p:spPr>
           <a:xfrm>
-            <a:off x="457200" y="6492240"/>
-            <a:ext cx="10058400" cy="310896"/>
+            <a:off x="11155680" y="6492240"/>
+            <a:ext cx="822960" cy="310896"/>
           </a:xfrm>
           <a:prstGeom prst="rect">
             <a:avLst/>
@@ -5141,12 +6673,12 @@
           <a:noFill/>
         </p:spPr>
         <p:txBody>
-          <a:bodyPr wrap="square" anchor="t" lIns="0" rIns="0" tIns="0" bIns="0">
+          <a:bodyPr wrap="square" lIns="0" tIns="0" rIns="0" bIns="0" anchor="t">
             <a:spAutoFit/>
           </a:bodyPr>
           <a:lstStyle/>
           <a:p>
-            <a:pPr algn="l">
+            <a:pPr algn="r">
               <a:spcBef>
                 <a:spcPts val="0"/>
               </a:spcBef>
@@ -5163,21 +6695,27 @@
                 <a:ea typeface="Microsoft JhengHei"/>
                 <a:cs typeface="Microsoft JhengHei"/>
               </a:rPr>
-              <a:t>OSM 权力到形态 · 图解说明</a:t>
-            </a:r>
-          </a:p>
-        </p:txBody>
-      </p:sp>
-      <p:sp>
-        <p:nvSpPr>
-          <p:cNvPr id="10" name="TextBox 9"/>
+              <a:t>2</a:t>
+            </a:r>
+          </a:p>
+        </p:txBody>
+      </p:sp>
+      <p:sp>
+        <p:nvSpPr>
+          <p:cNvPr id="16" name="文字方塊 15">
+            <a:extLst>
+              <a:ext uri="{FF2B5EF4-FFF2-40B4-BE49-F238E27FC236}">
+                <a16:creationId xmlns:a16="http://schemas.microsoft.com/office/drawing/2014/main" id="{3182E73F-8A21-41C9-AC16-7822665E1CA6}"/>
+              </a:ext>
+            </a:extLst>
+          </p:cNvPr>
           <p:cNvSpPr txBox="1"/>
           <p:nvPr/>
         </p:nvSpPr>
         <p:spPr>
           <a:xfrm>
-            <a:off x="11155680" y="6492240"/>
-            <a:ext cx="822960" cy="310896"/>
+            <a:off x="807633" y="2950001"/>
+            <a:ext cx="1617751" cy="2862322"/>
           </a:xfrm>
           <a:prstGeom prst="rect">
             <a:avLst/>
@@ -5185,34 +6723,1178 @@
           <a:noFill/>
         </p:spPr>
         <p:txBody>
-          <a:bodyPr wrap="square" anchor="t" lIns="0" rIns="0" tIns="0" bIns="0">
+          <a:bodyPr wrap="none" rtlCol="0">
             <a:spAutoFit/>
           </a:bodyPr>
           <a:lstStyle/>
           <a:p>
-            <a:pPr algn="r">
-              <a:spcBef>
-                <a:spcPts val="0"/>
-              </a:spcBef>
-              <a:spcAft>
-                <a:spcPts val="0"/>
-              </a:spcAft>
-            </a:pPr>
-            <a:r>
-              <a:rPr sz="1200" b="1">
-                <a:solidFill>
-                  <a:srgbClr val="9AA4B2"/>
-                </a:solidFill>
-                <a:latin typeface="Microsoft JhengHei"/>
-                <a:ea typeface="Microsoft JhengHei"/>
-                <a:cs typeface="Microsoft JhengHei"/>
-              </a:rPr>
-              <a:t>3</a:t>
+            <a:r>
+              <a:rPr lang="en-US" altLang="zh-TW" dirty="0">
+                <a:solidFill>
+                  <a:schemeClr val="bg1"/>
+                </a:solidFill>
+                <a:latin typeface="微軟正黑體" panose="020B0604030504040204" pitchFamily="34" charset="-120"/>
+                <a:ea typeface="微軟正黑體" panose="020B0604030504040204" pitchFamily="34" charset="-120"/>
+              </a:rPr>
+              <a:t>GH </a:t>
+            </a:r>
+            <a:r>
+              <a:rPr lang="en-US" altLang="zh-TW" dirty="0" err="1">
+                <a:solidFill>
+                  <a:schemeClr val="bg1"/>
+                </a:solidFill>
+                <a:latin typeface="微軟正黑體" panose="020B0604030504040204" pitchFamily="34" charset="-120"/>
+                <a:ea typeface="微軟正黑體" panose="020B0604030504040204" pitchFamily="34" charset="-120"/>
+              </a:rPr>
+              <a:t>osm</a:t>
+            </a:r>
+            <a:r>
+              <a:rPr lang="en-US" altLang="zh-TW" dirty="0">
+                <a:solidFill>
+                  <a:schemeClr val="bg1"/>
+                </a:solidFill>
+                <a:latin typeface="微軟正黑體" panose="020B0604030504040204" pitchFamily="34" charset="-120"/>
+                <a:ea typeface="微軟正黑體" panose="020B0604030504040204" pitchFamily="34" charset="-120"/>
+              </a:rPr>
+              <a:t> </a:t>
+            </a:r>
+            <a:r>
+              <a:rPr lang="en-US" altLang="zh-TW" dirty="0" err="1">
+                <a:solidFill>
+                  <a:schemeClr val="bg1"/>
+                </a:solidFill>
+                <a:latin typeface="微軟正黑體" panose="020B0604030504040204" pitchFamily="34" charset="-120"/>
+                <a:ea typeface="微軟正黑體" panose="020B0604030504040204" pitchFamily="34" charset="-120"/>
+              </a:rPr>
+              <a:t>api</a:t>
+            </a:r>
+            <a:endParaRPr lang="en-US" altLang="zh-TW" dirty="0">
+              <a:solidFill>
+                <a:schemeClr val="bg1"/>
+              </a:solidFill>
+              <a:latin typeface="微軟正黑體" panose="020B0604030504040204" pitchFamily="34" charset="-120"/>
+              <a:ea typeface="微軟正黑體" panose="020B0604030504040204" pitchFamily="34" charset="-120"/>
+            </a:endParaRPr>
+          </a:p>
+          <a:p>
+            <a:r>
+              <a:rPr lang="en-US" altLang="zh-TW" dirty="0">
+                <a:solidFill>
+                  <a:schemeClr val="bg1"/>
+                </a:solidFill>
+                <a:latin typeface="微軟正黑體" panose="020B0604030504040204" pitchFamily="34" charset="-120"/>
+                <a:ea typeface="微軟正黑體" panose="020B0604030504040204" pitchFamily="34" charset="-120"/>
+              </a:rPr>
+              <a:t>GH </a:t>
+            </a:r>
+            <a:r>
+              <a:rPr lang="en-US" altLang="zh-TW" dirty="0" err="1">
+                <a:solidFill>
+                  <a:schemeClr val="bg1"/>
+                </a:solidFill>
+                <a:latin typeface="微軟正黑體" panose="020B0604030504040204" pitchFamily="34" charset="-120"/>
+                <a:ea typeface="微軟正黑體" panose="020B0604030504040204" pitchFamily="34" charset="-120"/>
+              </a:rPr>
+              <a:t>osm</a:t>
+            </a:r>
+            <a:r>
+              <a:rPr lang="en-US" altLang="zh-TW" dirty="0">
+                <a:solidFill>
+                  <a:schemeClr val="bg1"/>
+                </a:solidFill>
+                <a:latin typeface="微軟正黑體" panose="020B0604030504040204" pitchFamily="34" charset="-120"/>
+                <a:ea typeface="微軟正黑體" panose="020B0604030504040204" pitchFamily="34" charset="-120"/>
+              </a:rPr>
+              <a:t> local</a:t>
+            </a:r>
+          </a:p>
+          <a:p>
+            <a:endParaRPr lang="en-US" altLang="zh-TW" dirty="0">
+              <a:solidFill>
+                <a:schemeClr val="bg1"/>
+              </a:solidFill>
+              <a:latin typeface="微軟正黑體" panose="020B0604030504040204" pitchFamily="34" charset="-120"/>
+              <a:ea typeface="微軟正黑體" panose="020B0604030504040204" pitchFamily="34" charset="-120"/>
+            </a:endParaRPr>
+          </a:p>
+          <a:p>
+            <a:endParaRPr lang="en-US" altLang="zh-TW" dirty="0">
+              <a:solidFill>
+                <a:schemeClr val="bg1"/>
+              </a:solidFill>
+              <a:latin typeface="微軟正黑體" panose="020B0604030504040204" pitchFamily="34" charset="-120"/>
+              <a:ea typeface="微軟正黑體" panose="020B0604030504040204" pitchFamily="34" charset="-120"/>
+            </a:endParaRPr>
+          </a:p>
+          <a:p>
+            <a:r>
+              <a:rPr lang="en-US" altLang="zh-TW" dirty="0">
+                <a:solidFill>
+                  <a:srgbClr val="00B0F0"/>
+                </a:solidFill>
+                <a:latin typeface="微軟正黑體" panose="020B0604030504040204" pitchFamily="34" charset="-120"/>
+                <a:ea typeface="微軟正黑體" panose="020B0604030504040204" pitchFamily="34" charset="-120"/>
+              </a:rPr>
+              <a:t>Building csv</a:t>
+            </a:r>
+          </a:p>
+          <a:p>
+            <a:endParaRPr lang="en-US" altLang="zh-TW" dirty="0">
+              <a:solidFill>
+                <a:schemeClr val="bg1"/>
+              </a:solidFill>
+              <a:latin typeface="微軟正黑體" panose="020B0604030504040204" pitchFamily="34" charset="-120"/>
+              <a:ea typeface="微軟正黑體" panose="020B0604030504040204" pitchFamily="34" charset="-120"/>
+            </a:endParaRPr>
+          </a:p>
+          <a:p>
+            <a:endParaRPr lang="en-US" altLang="zh-TW" dirty="0">
+              <a:solidFill>
+                <a:schemeClr val="bg1"/>
+              </a:solidFill>
+              <a:latin typeface="微軟正黑體" panose="020B0604030504040204" pitchFamily="34" charset="-120"/>
+              <a:ea typeface="微軟正黑體" panose="020B0604030504040204" pitchFamily="34" charset="-120"/>
+            </a:endParaRPr>
+          </a:p>
+          <a:p>
+            <a:r>
+              <a:rPr lang="zh-TW" altLang="en-US" dirty="0">
+                <a:solidFill>
+                  <a:schemeClr val="bg1"/>
+                </a:solidFill>
+                <a:latin typeface="微軟正黑體" panose="020B0604030504040204" pitchFamily="34" charset="-120"/>
+                <a:ea typeface="微軟正黑體" panose="020B0604030504040204" pitchFamily="34" charset="-120"/>
+              </a:rPr>
+              <a:t>上海數據</a:t>
+            </a:r>
+            <a:endParaRPr lang="en-US" altLang="zh-TW" dirty="0">
+              <a:solidFill>
+                <a:schemeClr val="bg1"/>
+              </a:solidFill>
+              <a:latin typeface="微軟正黑體" panose="020B0604030504040204" pitchFamily="34" charset="-120"/>
+              <a:ea typeface="微軟正黑體" panose="020B0604030504040204" pitchFamily="34" charset="-120"/>
+            </a:endParaRPr>
+          </a:p>
+          <a:p>
+            <a:endParaRPr lang="en-US" altLang="zh-TW" dirty="0">
+              <a:solidFill>
+                <a:schemeClr val="bg1"/>
+              </a:solidFill>
+              <a:latin typeface="微軟正黑體" panose="020B0604030504040204" pitchFamily="34" charset="-120"/>
+              <a:ea typeface="微軟正黑體" panose="020B0604030504040204" pitchFamily="34" charset="-120"/>
+            </a:endParaRPr>
+          </a:p>
+          <a:p>
+            <a:endParaRPr lang="zh-TW" altLang="en-US" dirty="0">
+              <a:solidFill>
+                <a:schemeClr val="bg1"/>
+              </a:solidFill>
+              <a:latin typeface="微軟正黑體" panose="020B0604030504040204" pitchFamily="34" charset="-120"/>
+              <a:ea typeface="微軟正黑體" panose="020B0604030504040204" pitchFamily="34" charset="-120"/>
+            </a:endParaRPr>
+          </a:p>
+        </p:txBody>
+      </p:sp>
+      <p:sp>
+        <p:nvSpPr>
+          <p:cNvPr id="17" name="文字方塊 16">
+            <a:extLst>
+              <a:ext uri="{FF2B5EF4-FFF2-40B4-BE49-F238E27FC236}">
+                <a16:creationId xmlns:a16="http://schemas.microsoft.com/office/drawing/2014/main" id="{738F00E3-3C82-46A0-AE71-23F6422BA729}"/>
+              </a:ext>
+            </a:extLst>
+          </p:cNvPr>
+          <p:cNvSpPr txBox="1"/>
+          <p:nvPr/>
+        </p:nvSpPr>
+        <p:spPr>
+          <a:xfrm>
+            <a:off x="9594115" y="2950001"/>
+            <a:ext cx="1680204" cy="1754326"/>
+          </a:xfrm>
+          <a:prstGeom prst="rect">
+            <a:avLst/>
+          </a:prstGeom>
+          <a:noFill/>
+        </p:spPr>
+        <p:txBody>
+          <a:bodyPr wrap="none" rtlCol="0">
+            <a:spAutoFit/>
+          </a:bodyPr>
+          <a:lstStyle/>
+          <a:p>
+            <a:r>
+              <a:rPr lang="en-US" altLang="zh-TW" dirty="0">
+                <a:solidFill>
+                  <a:schemeClr val="bg1"/>
+                </a:solidFill>
+                <a:latin typeface="微軟正黑體" panose="020B0604030504040204" pitchFamily="34" charset="-120"/>
+                <a:ea typeface="微軟正黑體" panose="020B0604030504040204" pitchFamily="34" charset="-120"/>
+              </a:rPr>
+              <a:t>Color preview</a:t>
+            </a:r>
+          </a:p>
+          <a:p>
+            <a:r>
+              <a:rPr lang="en-US" altLang="zh-TW" dirty="0">
+                <a:solidFill>
+                  <a:schemeClr val="bg1"/>
+                </a:solidFill>
+                <a:latin typeface="微軟正黑體" panose="020B0604030504040204" pitchFamily="34" charset="-120"/>
+                <a:ea typeface="微軟正黑體" panose="020B0604030504040204" pitchFamily="34" charset="-120"/>
+              </a:rPr>
+              <a:t>GH animate</a:t>
+            </a:r>
+          </a:p>
+          <a:p>
+            <a:endParaRPr lang="en-US" altLang="zh-TW" dirty="0">
+              <a:solidFill>
+                <a:srgbClr val="00B0F0"/>
+              </a:solidFill>
+              <a:latin typeface="微軟正黑體" panose="020B0604030504040204" pitchFamily="34" charset="-120"/>
+              <a:ea typeface="微軟正黑體" panose="020B0604030504040204" pitchFamily="34" charset="-120"/>
+            </a:endParaRPr>
+          </a:p>
+          <a:p>
+            <a:endParaRPr lang="en-US" altLang="zh-TW" dirty="0">
+              <a:solidFill>
+                <a:srgbClr val="00B0F0"/>
+              </a:solidFill>
+              <a:latin typeface="微軟正黑體" panose="020B0604030504040204" pitchFamily="34" charset="-120"/>
+              <a:ea typeface="微軟正黑體" panose="020B0604030504040204" pitchFamily="34" charset="-120"/>
+            </a:endParaRPr>
+          </a:p>
+          <a:p>
+            <a:r>
+              <a:rPr lang="en-US" altLang="zh-TW" dirty="0" err="1">
+                <a:solidFill>
+                  <a:srgbClr val="00B0F0"/>
+                </a:solidFill>
+                <a:latin typeface="微軟正黑體" panose="020B0604030504040204" pitchFamily="34" charset="-120"/>
+                <a:ea typeface="微軟正黑體" panose="020B0604030504040204" pitchFamily="34" charset="-120"/>
+              </a:rPr>
+              <a:t>Py</a:t>
+            </a:r>
+            <a:r>
+              <a:rPr lang="en-US" altLang="zh-TW" dirty="0">
+                <a:solidFill>
+                  <a:srgbClr val="00B0F0"/>
+                </a:solidFill>
+                <a:latin typeface="微軟正黑體" panose="020B0604030504040204" pitchFamily="34" charset="-120"/>
+                <a:ea typeface="微軟正黑體" panose="020B0604030504040204" pitchFamily="34" charset="-120"/>
+              </a:rPr>
+              <a:t> </a:t>
+            </a:r>
+            <a:r>
+              <a:rPr lang="en-US" altLang="zh-TW" dirty="0" err="1">
+                <a:solidFill>
+                  <a:srgbClr val="00B0F0"/>
+                </a:solidFill>
+                <a:latin typeface="微軟正黑體" panose="020B0604030504040204" pitchFamily="34" charset="-120"/>
+                <a:ea typeface="微軟正黑體" panose="020B0604030504040204" pitchFamily="34" charset="-120"/>
+              </a:rPr>
+              <a:t>png</a:t>
+            </a:r>
+            <a:r>
+              <a:rPr lang="en-US" altLang="zh-TW" dirty="0">
+                <a:solidFill>
+                  <a:srgbClr val="00B0F0"/>
+                </a:solidFill>
+                <a:latin typeface="微軟正黑體" panose="020B0604030504040204" pitchFamily="34" charset="-120"/>
+                <a:ea typeface="微軟正黑體" panose="020B0604030504040204" pitchFamily="34" charset="-120"/>
+              </a:rPr>
+              <a:t> </a:t>
+            </a:r>
+          </a:p>
+          <a:p>
+            <a:endParaRPr lang="zh-TW" altLang="en-US" dirty="0">
+              <a:solidFill>
+                <a:schemeClr val="bg1"/>
+              </a:solidFill>
+              <a:latin typeface="微軟正黑體" panose="020B0604030504040204" pitchFamily="34" charset="-120"/>
+              <a:ea typeface="微軟正黑體" panose="020B0604030504040204" pitchFamily="34" charset="-120"/>
+            </a:endParaRPr>
+          </a:p>
+        </p:txBody>
+      </p:sp>
+      <p:sp>
+        <p:nvSpPr>
+          <p:cNvPr id="18" name="矩形 17">
+            <a:extLst>
+              <a:ext uri="{FF2B5EF4-FFF2-40B4-BE49-F238E27FC236}">
+                <a16:creationId xmlns:a16="http://schemas.microsoft.com/office/drawing/2014/main" id="{8118A83F-94D8-4A6C-ADCE-DF8780A4794F}"/>
+              </a:ext>
+            </a:extLst>
+          </p:cNvPr>
+          <p:cNvSpPr/>
+          <p:nvPr/>
+        </p:nvSpPr>
+        <p:spPr>
+          <a:xfrm>
+            <a:off x="843251" y="1684919"/>
+            <a:ext cx="1584989" cy="904240"/>
+          </a:xfrm>
+          <a:prstGeom prst="rect">
+            <a:avLst/>
+          </a:prstGeom>
+          <a:solidFill>
+            <a:srgbClr val="241634"/>
+          </a:solidFill>
+          <a:ln w="15875">
+            <a:solidFill>
+              <a:srgbClr val="C79BFF"/>
+            </a:solidFill>
+          </a:ln>
+          <a:effectLst/>
+        </p:spPr>
+        <p:style>
+          <a:lnRef idx="1">
+            <a:schemeClr val="accent1"/>
+          </a:lnRef>
+          <a:fillRef idx="3">
+            <a:schemeClr val="accent1"/>
+          </a:fillRef>
+          <a:effectRef idx="2">
+            <a:schemeClr val="accent1"/>
+          </a:effectRef>
+          <a:fontRef idx="minor">
+            <a:schemeClr val="lt1"/>
+          </a:fontRef>
+        </p:style>
+        <p:txBody>
+          <a:bodyPr wrap="square" lIns="45720" tIns="27432" rIns="45720" bIns="27432" rtlCol="0" anchor="ctr"/>
+          <a:lstStyle/>
+          <a:p>
+            <a:pPr algn="ctr"/>
+            <a:r>
+              <a:rPr lang="zh-TW" altLang="en-US" sz="1600" b="1" dirty="0">
+                <a:solidFill>
+                  <a:schemeClr val="bg1"/>
+                </a:solidFill>
+                <a:latin typeface="微軟正黑體" panose="020B0604030504040204" pitchFamily="34" charset="-120"/>
+                <a:ea typeface="微軟正黑體" panose="020B0604030504040204" pitchFamily="34" charset="-120"/>
+              </a:rPr>
+              <a:t>城市資料讀取</a:t>
+            </a:r>
+          </a:p>
+        </p:txBody>
+      </p:sp>
+      <p:sp>
+        <p:nvSpPr>
+          <p:cNvPr id="19" name="矩形 18">
+            <a:extLst>
+              <a:ext uri="{FF2B5EF4-FFF2-40B4-BE49-F238E27FC236}">
+                <a16:creationId xmlns:a16="http://schemas.microsoft.com/office/drawing/2014/main" id="{0A69D54E-D118-4643-BEFA-A7860FED4314}"/>
+              </a:ext>
+            </a:extLst>
+          </p:cNvPr>
+          <p:cNvSpPr/>
+          <p:nvPr/>
+        </p:nvSpPr>
+        <p:spPr>
+          <a:xfrm>
+            <a:off x="7464761" y="1684919"/>
+            <a:ext cx="1463040" cy="904240"/>
+          </a:xfrm>
+          <a:prstGeom prst="rect">
+            <a:avLst/>
+          </a:prstGeom>
+          <a:solidFill>
+            <a:srgbClr val="10301A"/>
+          </a:solidFill>
+          <a:ln w="15875">
+            <a:solidFill>
+              <a:srgbClr val="6FE36F"/>
+            </a:solidFill>
+          </a:ln>
+          <a:effectLst/>
+        </p:spPr>
+        <p:style>
+          <a:lnRef idx="1">
+            <a:schemeClr val="accent1"/>
+          </a:lnRef>
+          <a:fillRef idx="3">
+            <a:schemeClr val="accent1"/>
+          </a:fillRef>
+          <a:effectRef idx="2">
+            <a:schemeClr val="accent1"/>
+          </a:effectRef>
+          <a:fontRef idx="minor">
+            <a:schemeClr val="lt1"/>
+          </a:fontRef>
+        </p:style>
+        <p:txBody>
+          <a:bodyPr wrap="square" lIns="45720" tIns="27432" rIns="45720" bIns="27432" rtlCol="0" anchor="ctr"/>
+          <a:lstStyle/>
+          <a:p>
+            <a:pPr algn="ctr"/>
+            <a:r>
+              <a:rPr lang="zh-TW" altLang="en-US" b="1" dirty="0">
+                <a:solidFill>
+                  <a:schemeClr val="bg1"/>
+                </a:solidFill>
+                <a:latin typeface="微軟正黑體" panose="020B0604030504040204" pitchFamily="34" charset="-120"/>
+                <a:ea typeface="微軟正黑體" panose="020B0604030504040204" pitchFamily="34" charset="-120"/>
+              </a:rPr>
+              <a:t>生成新城市</a:t>
+            </a:r>
+          </a:p>
+        </p:txBody>
+      </p:sp>
+      <p:sp>
+        <p:nvSpPr>
+          <p:cNvPr id="20" name="矩形 19">
+            <a:extLst>
+              <a:ext uri="{FF2B5EF4-FFF2-40B4-BE49-F238E27FC236}">
+                <a16:creationId xmlns:a16="http://schemas.microsoft.com/office/drawing/2014/main" id="{8C4758C9-A805-4D96-9A29-566386DFC915}"/>
+              </a:ext>
+            </a:extLst>
+          </p:cNvPr>
+          <p:cNvSpPr/>
+          <p:nvPr/>
+        </p:nvSpPr>
+        <p:spPr>
+          <a:xfrm>
+            <a:off x="3131720" y="1684919"/>
+            <a:ext cx="1463040" cy="904240"/>
+          </a:xfrm>
+          <a:prstGeom prst="rect">
+            <a:avLst/>
+          </a:prstGeom>
+          <a:solidFill>
+            <a:srgbClr val="12253C"/>
+          </a:solidFill>
+          <a:ln w="15875">
+            <a:solidFill>
+              <a:srgbClr val="5AB0FF"/>
+            </a:solidFill>
+          </a:ln>
+          <a:effectLst/>
+        </p:spPr>
+        <p:style>
+          <a:lnRef idx="1">
+            <a:schemeClr val="accent1"/>
+          </a:lnRef>
+          <a:fillRef idx="3">
+            <a:schemeClr val="accent1"/>
+          </a:fillRef>
+          <a:effectRef idx="2">
+            <a:schemeClr val="accent1"/>
+          </a:effectRef>
+          <a:fontRef idx="minor">
+            <a:schemeClr val="lt1"/>
+          </a:fontRef>
+        </p:style>
+        <p:txBody>
+          <a:bodyPr wrap="square" lIns="45720" tIns="27432" rIns="45720" bIns="27432" rtlCol="0" anchor="ctr"/>
+          <a:lstStyle/>
+          <a:p>
+            <a:pPr algn="ctr"/>
+            <a:r>
+              <a:rPr lang="zh-TW" altLang="en-US" sz="1600" b="1" dirty="0">
+                <a:solidFill>
+                  <a:schemeClr val="bg1"/>
+                </a:solidFill>
+                <a:latin typeface="微軟正黑體" panose="020B0604030504040204" pitchFamily="34" charset="-120"/>
+                <a:ea typeface="微軟正黑體" panose="020B0604030504040204" pitchFamily="34" charset="-120"/>
+              </a:rPr>
+              <a:t>資料編碼</a:t>
+            </a:r>
+          </a:p>
+        </p:txBody>
+      </p:sp>
+      <p:sp>
+        <p:nvSpPr>
+          <p:cNvPr id="21" name="矩形 20">
+            <a:extLst>
+              <a:ext uri="{FF2B5EF4-FFF2-40B4-BE49-F238E27FC236}">
+                <a16:creationId xmlns:a16="http://schemas.microsoft.com/office/drawing/2014/main" id="{5C65D037-2199-4C06-9DB0-B4ADB6C22B39}"/>
+              </a:ext>
+            </a:extLst>
+          </p:cNvPr>
+          <p:cNvSpPr/>
+          <p:nvPr/>
+        </p:nvSpPr>
+        <p:spPr>
+          <a:xfrm>
+            <a:off x="9631282" y="1684919"/>
+            <a:ext cx="1463040" cy="904240"/>
+          </a:xfrm>
+          <a:prstGeom prst="rect">
+            <a:avLst/>
+          </a:prstGeom>
+          <a:solidFill>
+            <a:srgbClr val="322910"/>
+          </a:solidFill>
+          <a:ln w="15875">
+            <a:solidFill>
+              <a:srgbClr val="FFD166"/>
+            </a:solidFill>
+          </a:ln>
+          <a:effectLst/>
+        </p:spPr>
+        <p:style>
+          <a:lnRef idx="1">
+            <a:schemeClr val="accent1"/>
+          </a:lnRef>
+          <a:fillRef idx="3">
+            <a:schemeClr val="accent1"/>
+          </a:fillRef>
+          <a:effectRef idx="2">
+            <a:schemeClr val="accent1"/>
+          </a:effectRef>
+          <a:fontRef idx="minor">
+            <a:schemeClr val="lt1"/>
+          </a:fontRef>
+        </p:style>
+        <p:txBody>
+          <a:bodyPr wrap="square" lIns="45720" tIns="27432" rIns="45720" bIns="27432" rtlCol="0" anchor="ctr"/>
+          <a:lstStyle/>
+          <a:p>
+            <a:pPr algn="ctr"/>
+            <a:r>
+              <a:rPr lang="zh-TW" altLang="en-US" sz="1600" b="1" dirty="0">
+                <a:solidFill>
+                  <a:schemeClr val="bg1"/>
+                </a:solidFill>
+                <a:latin typeface="微軟正黑體" panose="020B0604030504040204" pitchFamily="34" charset="-120"/>
+                <a:ea typeface="微軟正黑體" panose="020B0604030504040204" pitchFamily="34" charset="-120"/>
+              </a:rPr>
+              <a:t>後續导出</a:t>
+            </a:r>
+            <a:endParaRPr lang="en-US" altLang="zh-TW" sz="1600" b="1" dirty="0">
+              <a:solidFill>
+                <a:schemeClr val="bg1"/>
+              </a:solidFill>
+              <a:latin typeface="微軟正黑體" panose="020B0604030504040204" pitchFamily="34" charset="-120"/>
+              <a:ea typeface="微軟正黑體" panose="020B0604030504040204" pitchFamily="34" charset="-120"/>
+            </a:endParaRPr>
+          </a:p>
+          <a:p>
+            <a:pPr algn="ctr"/>
+            <a:r>
+              <a:rPr lang="zh-TW" altLang="en-US" sz="1600" b="1" dirty="0">
+                <a:solidFill>
+                  <a:schemeClr val="bg1"/>
+                </a:solidFill>
+                <a:latin typeface="微軟正黑體" panose="020B0604030504040204" pitchFamily="34" charset="-120"/>
+                <a:ea typeface="微軟正黑體" panose="020B0604030504040204" pitchFamily="34" charset="-120"/>
+              </a:rPr>
+              <a:t>可視化</a:t>
+            </a:r>
+          </a:p>
+        </p:txBody>
+      </p:sp>
+      <p:sp>
+        <p:nvSpPr>
+          <p:cNvPr id="23" name="矩形 22">
+            <a:extLst>
+              <a:ext uri="{FF2B5EF4-FFF2-40B4-BE49-F238E27FC236}">
+                <a16:creationId xmlns:a16="http://schemas.microsoft.com/office/drawing/2014/main" id="{4C743694-911E-42B6-BDC9-3A16071848AF}"/>
+              </a:ext>
+            </a:extLst>
+          </p:cNvPr>
+          <p:cNvSpPr/>
+          <p:nvPr/>
+        </p:nvSpPr>
+        <p:spPr>
+          <a:xfrm>
+            <a:off x="5298240" y="1684919"/>
+            <a:ext cx="1463040" cy="904240"/>
+          </a:xfrm>
+          <a:prstGeom prst="rect">
+            <a:avLst/>
+          </a:prstGeom>
+          <a:solidFill>
+            <a:schemeClr val="tx1">
+              <a:lumMod val="85000"/>
+              <a:lumOff val="15000"/>
+            </a:schemeClr>
+          </a:solidFill>
+          <a:ln w="15875">
+            <a:solidFill>
+              <a:schemeClr val="bg1">
+                <a:lumMod val="95000"/>
+              </a:schemeClr>
+            </a:solidFill>
+          </a:ln>
+          <a:effectLst/>
+        </p:spPr>
+        <p:style>
+          <a:lnRef idx="1">
+            <a:schemeClr val="accent1"/>
+          </a:lnRef>
+          <a:fillRef idx="3">
+            <a:schemeClr val="accent1"/>
+          </a:fillRef>
+          <a:effectRef idx="2">
+            <a:schemeClr val="accent1"/>
+          </a:effectRef>
+          <a:fontRef idx="minor">
+            <a:schemeClr val="lt1"/>
+          </a:fontRef>
+        </p:style>
+        <p:txBody>
+          <a:bodyPr wrap="square" lIns="45720" tIns="27432" rIns="45720" bIns="27432" rtlCol="0" anchor="ctr"/>
+          <a:lstStyle/>
+          <a:p>
+            <a:pPr algn="ctr"/>
+            <a:r>
+              <a:rPr lang="zh-TW" altLang="en-US" b="1" dirty="0">
+                <a:solidFill>
+                  <a:schemeClr val="bg1"/>
+                </a:solidFill>
+                <a:latin typeface="微軟正黑體" panose="020B0604030504040204" pitchFamily="34" charset="-120"/>
+                <a:ea typeface="微軟正黑體" panose="020B0604030504040204" pitchFamily="34" charset="-120"/>
+              </a:rPr>
+              <a:t>權力重分配</a:t>
+            </a:r>
+          </a:p>
+        </p:txBody>
+      </p:sp>
+      <p:cxnSp>
+        <p:nvCxnSpPr>
+          <p:cNvPr id="4" name="直線單箭頭接點 3">
+            <a:extLst>
+              <a:ext uri="{FF2B5EF4-FFF2-40B4-BE49-F238E27FC236}">
+                <a16:creationId xmlns:a16="http://schemas.microsoft.com/office/drawing/2014/main" id="{256ACBCC-2124-4E9E-AEF4-39E5012ABE3B}"/>
+              </a:ext>
+            </a:extLst>
+          </p:cNvPr>
+          <p:cNvCxnSpPr>
+            <a:stCxn id="18" idx="3"/>
+            <a:endCxn id="20" idx="1"/>
+          </p:cNvCxnSpPr>
+          <p:nvPr/>
+        </p:nvCxnSpPr>
+        <p:spPr>
+          <a:xfrm>
+            <a:off x="2428240" y="2137039"/>
+            <a:ext cx="703480" cy="0"/>
+          </a:xfrm>
+          <a:prstGeom prst="straightConnector1">
+            <a:avLst/>
+          </a:prstGeom>
+          <a:ln>
+            <a:solidFill>
+              <a:schemeClr val="bg1">
+                <a:lumMod val="95000"/>
+              </a:schemeClr>
+            </a:solidFill>
+            <a:tailEnd type="triangle"/>
+          </a:ln>
+        </p:spPr>
+        <p:style>
+          <a:lnRef idx="2">
+            <a:schemeClr val="dk1"/>
+          </a:lnRef>
+          <a:fillRef idx="0">
+            <a:schemeClr val="dk1"/>
+          </a:fillRef>
+          <a:effectRef idx="1">
+            <a:schemeClr val="dk1"/>
+          </a:effectRef>
+          <a:fontRef idx="minor">
+            <a:schemeClr val="tx1"/>
+          </a:fontRef>
+        </p:style>
+      </p:cxnSp>
+      <p:cxnSp>
+        <p:nvCxnSpPr>
+          <p:cNvPr id="7" name="直線單箭頭接點 6">
+            <a:extLst>
+              <a:ext uri="{FF2B5EF4-FFF2-40B4-BE49-F238E27FC236}">
+                <a16:creationId xmlns:a16="http://schemas.microsoft.com/office/drawing/2014/main" id="{118AECBA-3B7E-4462-AC32-5091DC6FE71A}"/>
+              </a:ext>
+            </a:extLst>
+          </p:cNvPr>
+          <p:cNvCxnSpPr>
+            <a:stCxn id="20" idx="3"/>
+            <a:endCxn id="23" idx="1"/>
+          </p:cNvCxnSpPr>
+          <p:nvPr/>
+        </p:nvCxnSpPr>
+        <p:spPr>
+          <a:xfrm>
+            <a:off x="4594760" y="2137039"/>
+            <a:ext cx="703480" cy="0"/>
+          </a:xfrm>
+          <a:prstGeom prst="straightConnector1">
+            <a:avLst/>
+          </a:prstGeom>
+          <a:ln>
+            <a:solidFill>
+              <a:schemeClr val="bg1">
+                <a:lumMod val="95000"/>
+              </a:schemeClr>
+            </a:solidFill>
+            <a:tailEnd type="triangle"/>
+          </a:ln>
+        </p:spPr>
+        <p:style>
+          <a:lnRef idx="2">
+            <a:schemeClr val="accent1"/>
+          </a:lnRef>
+          <a:fillRef idx="0">
+            <a:schemeClr val="accent1"/>
+          </a:fillRef>
+          <a:effectRef idx="1">
+            <a:schemeClr val="accent1"/>
+          </a:effectRef>
+          <a:fontRef idx="minor">
+            <a:schemeClr val="tx1"/>
+          </a:fontRef>
+        </p:style>
+      </p:cxnSp>
+      <p:cxnSp>
+        <p:nvCxnSpPr>
+          <p:cNvPr id="24" name="直線單箭頭接點 23">
+            <a:extLst>
+              <a:ext uri="{FF2B5EF4-FFF2-40B4-BE49-F238E27FC236}">
+                <a16:creationId xmlns:a16="http://schemas.microsoft.com/office/drawing/2014/main" id="{0F7357E4-749E-4A99-B1A1-59E84039DD1A}"/>
+              </a:ext>
+            </a:extLst>
+          </p:cNvPr>
+          <p:cNvCxnSpPr>
+            <a:stCxn id="23" idx="3"/>
+            <a:endCxn id="19" idx="1"/>
+          </p:cNvCxnSpPr>
+          <p:nvPr/>
+        </p:nvCxnSpPr>
+        <p:spPr>
+          <a:xfrm>
+            <a:off x="6761280" y="2137039"/>
+            <a:ext cx="703481" cy="0"/>
+          </a:xfrm>
+          <a:prstGeom prst="straightConnector1">
+            <a:avLst/>
+          </a:prstGeom>
+          <a:ln>
+            <a:solidFill>
+              <a:schemeClr val="bg1">
+                <a:lumMod val="95000"/>
+              </a:schemeClr>
+            </a:solidFill>
+            <a:tailEnd type="triangle"/>
+          </a:ln>
+        </p:spPr>
+        <p:style>
+          <a:lnRef idx="2">
+            <a:schemeClr val="accent1"/>
+          </a:lnRef>
+          <a:fillRef idx="0">
+            <a:schemeClr val="accent1"/>
+          </a:fillRef>
+          <a:effectRef idx="1">
+            <a:schemeClr val="accent1"/>
+          </a:effectRef>
+          <a:fontRef idx="minor">
+            <a:schemeClr val="tx1"/>
+          </a:fontRef>
+        </p:style>
+      </p:cxnSp>
+      <p:cxnSp>
+        <p:nvCxnSpPr>
+          <p:cNvPr id="26" name="直線單箭頭接點 25">
+            <a:extLst>
+              <a:ext uri="{FF2B5EF4-FFF2-40B4-BE49-F238E27FC236}">
+                <a16:creationId xmlns:a16="http://schemas.microsoft.com/office/drawing/2014/main" id="{72658D94-56F3-490D-9539-96B578B4C134}"/>
+              </a:ext>
+            </a:extLst>
+          </p:cNvPr>
+          <p:cNvCxnSpPr>
+            <a:stCxn id="19" idx="3"/>
+            <a:endCxn id="21" idx="1"/>
+          </p:cNvCxnSpPr>
+          <p:nvPr/>
+        </p:nvCxnSpPr>
+        <p:spPr>
+          <a:xfrm>
+            <a:off x="8927801" y="2137039"/>
+            <a:ext cx="703481" cy="0"/>
+          </a:xfrm>
+          <a:prstGeom prst="straightConnector1">
+            <a:avLst/>
+          </a:prstGeom>
+          <a:ln>
+            <a:solidFill>
+              <a:schemeClr val="bg1">
+                <a:lumMod val="95000"/>
+              </a:schemeClr>
+            </a:solidFill>
+            <a:tailEnd type="triangle"/>
+          </a:ln>
+        </p:spPr>
+        <p:style>
+          <a:lnRef idx="2">
+            <a:schemeClr val="accent1"/>
+          </a:lnRef>
+          <a:fillRef idx="0">
+            <a:schemeClr val="accent1"/>
+          </a:fillRef>
+          <a:effectRef idx="1">
+            <a:schemeClr val="accent1"/>
+          </a:effectRef>
+          <a:fontRef idx="minor">
+            <a:schemeClr val="tx1"/>
+          </a:fontRef>
+        </p:style>
+      </p:cxnSp>
+      <p:sp>
+        <p:nvSpPr>
+          <p:cNvPr id="27" name="文字方塊 26">
+            <a:extLst>
+              <a:ext uri="{FF2B5EF4-FFF2-40B4-BE49-F238E27FC236}">
+                <a16:creationId xmlns:a16="http://schemas.microsoft.com/office/drawing/2014/main" id="{5D19D070-6C2D-40C3-BCCE-02025C7EFD11}"/>
+              </a:ext>
+            </a:extLst>
+          </p:cNvPr>
+          <p:cNvSpPr txBox="1"/>
+          <p:nvPr/>
+        </p:nvSpPr>
+        <p:spPr>
+          <a:xfrm>
+            <a:off x="2994473" y="2979508"/>
+            <a:ext cx="2395464" cy="2585323"/>
+          </a:xfrm>
+          <a:prstGeom prst="rect">
+            <a:avLst/>
+          </a:prstGeom>
+          <a:noFill/>
+        </p:spPr>
+        <p:txBody>
+          <a:bodyPr wrap="none" rtlCol="0">
+            <a:spAutoFit/>
+          </a:bodyPr>
+          <a:lstStyle/>
+          <a:p>
+            <a:endParaRPr lang="en-US" altLang="zh-TW" dirty="0">
+              <a:solidFill>
+                <a:srgbClr val="00B0F0"/>
+              </a:solidFill>
+              <a:latin typeface="微軟正黑體" panose="020B0604030504040204" pitchFamily="34" charset="-120"/>
+              <a:ea typeface="微軟正黑體" panose="020B0604030504040204" pitchFamily="34" charset="-120"/>
+            </a:endParaRPr>
+          </a:p>
+          <a:p>
+            <a:endParaRPr lang="en-US" altLang="zh-TW" dirty="0">
+              <a:solidFill>
+                <a:srgbClr val="00B0F0"/>
+              </a:solidFill>
+              <a:latin typeface="微軟正黑體" panose="020B0604030504040204" pitchFamily="34" charset="-120"/>
+              <a:ea typeface="微軟正黑體" panose="020B0604030504040204" pitchFamily="34" charset="-120"/>
+            </a:endParaRPr>
+          </a:p>
+          <a:p>
+            <a:endParaRPr lang="en-US" altLang="zh-TW" dirty="0">
+              <a:solidFill>
+                <a:srgbClr val="00B0F0"/>
+              </a:solidFill>
+              <a:latin typeface="微軟正黑體" panose="020B0604030504040204" pitchFamily="34" charset="-120"/>
+              <a:ea typeface="微軟正黑體" panose="020B0604030504040204" pitchFamily="34" charset="-120"/>
+            </a:endParaRPr>
+          </a:p>
+          <a:p>
+            <a:endParaRPr lang="en-US" altLang="zh-TW" dirty="0">
+              <a:solidFill>
+                <a:srgbClr val="00B0F0"/>
+              </a:solidFill>
+              <a:latin typeface="微軟正黑體" panose="020B0604030504040204" pitchFamily="34" charset="-120"/>
+              <a:ea typeface="微軟正黑體" panose="020B0604030504040204" pitchFamily="34" charset="-120"/>
+            </a:endParaRPr>
+          </a:p>
+          <a:p>
+            <a:r>
+              <a:rPr lang="en-US" altLang="zh-TW" dirty="0">
+                <a:solidFill>
+                  <a:srgbClr val="00B0F0"/>
+                </a:solidFill>
+                <a:latin typeface="微軟正黑體" panose="020B0604030504040204" pitchFamily="34" charset="-120"/>
+                <a:ea typeface="微軟正黑體" panose="020B0604030504040204" pitchFamily="34" charset="-120"/>
+              </a:rPr>
+              <a:t>Lookup table</a:t>
+            </a:r>
+          </a:p>
+          <a:p>
+            <a:endParaRPr lang="en-US" altLang="zh-TW" dirty="0">
+              <a:solidFill>
+                <a:schemeClr val="bg1"/>
+              </a:solidFill>
+              <a:latin typeface="微軟正黑體" panose="020B0604030504040204" pitchFamily="34" charset="-120"/>
+              <a:ea typeface="微軟正黑體" panose="020B0604030504040204" pitchFamily="34" charset="-120"/>
+            </a:endParaRPr>
+          </a:p>
+          <a:p>
+            <a:endParaRPr lang="en-US" altLang="zh-TW" dirty="0">
+              <a:solidFill>
+                <a:schemeClr val="bg1"/>
+              </a:solidFill>
+              <a:latin typeface="微軟正黑體" panose="020B0604030504040204" pitchFamily="34" charset="-120"/>
+              <a:ea typeface="微軟正黑體" panose="020B0604030504040204" pitchFamily="34" charset="-120"/>
+            </a:endParaRPr>
+          </a:p>
+          <a:p>
+            <a:r>
+              <a:rPr lang="en-US" altLang="zh-TW" dirty="0">
+                <a:solidFill>
+                  <a:schemeClr val="bg1"/>
+                </a:solidFill>
+                <a:latin typeface="微軟正黑體" panose="020B0604030504040204" pitchFamily="34" charset="-120"/>
+                <a:ea typeface="微軟正黑體" panose="020B0604030504040204" pitchFamily="34" charset="-120"/>
+              </a:rPr>
+              <a:t>PCA</a:t>
+            </a:r>
+            <a:r>
+              <a:rPr lang="zh-TW" altLang="en-US" dirty="0">
+                <a:solidFill>
+                  <a:schemeClr val="bg1"/>
+                </a:solidFill>
+                <a:latin typeface="微軟正黑體" panose="020B0604030504040204" pitchFamily="34" charset="-120"/>
+                <a:ea typeface="微軟正黑體" panose="020B0604030504040204" pitchFamily="34" charset="-120"/>
+              </a:rPr>
+              <a:t> 統計編碼</a:t>
+            </a:r>
+            <a:endParaRPr lang="en-US" altLang="zh-TW" dirty="0">
+              <a:solidFill>
+                <a:schemeClr val="bg1"/>
+              </a:solidFill>
+              <a:latin typeface="微軟正黑體" panose="020B0604030504040204" pitchFamily="34" charset="-120"/>
+              <a:ea typeface="微軟正黑體" panose="020B0604030504040204" pitchFamily="34" charset="-120"/>
+            </a:endParaRPr>
+          </a:p>
+          <a:p>
+            <a:r>
+              <a:rPr lang="en-US" altLang="zh-TW" dirty="0">
+                <a:solidFill>
+                  <a:schemeClr val="bg1"/>
+                </a:solidFill>
+                <a:latin typeface="微軟正黑體" panose="020B0604030504040204" pitchFamily="34" charset="-120"/>
+                <a:ea typeface="微軟正黑體" panose="020B0604030504040204" pitchFamily="34" charset="-120"/>
+              </a:rPr>
+              <a:t>AE</a:t>
+            </a:r>
+            <a:r>
+              <a:rPr lang="zh-TW" altLang="en-US" dirty="0">
+                <a:solidFill>
+                  <a:schemeClr val="bg1"/>
+                </a:solidFill>
+                <a:latin typeface="微軟正黑體" panose="020B0604030504040204" pitchFamily="34" charset="-120"/>
+                <a:ea typeface="微軟正黑體" panose="020B0604030504040204" pitchFamily="34" charset="-120"/>
+              </a:rPr>
+              <a:t> </a:t>
+            </a:r>
+            <a:r>
+              <a:rPr lang="en-US" altLang="zh-TW" dirty="0">
+                <a:solidFill>
+                  <a:schemeClr val="bg1"/>
+                </a:solidFill>
+                <a:latin typeface="微軟正黑體" panose="020B0604030504040204" pitchFamily="34" charset="-120"/>
+                <a:ea typeface="微軟正黑體" panose="020B0604030504040204" pitchFamily="34" charset="-120"/>
+              </a:rPr>
+              <a:t>VAE</a:t>
+            </a:r>
+            <a:r>
+              <a:rPr lang="zh-TW" altLang="en-US" dirty="0">
+                <a:solidFill>
+                  <a:schemeClr val="bg1"/>
+                </a:solidFill>
+                <a:latin typeface="微軟正黑體" panose="020B0604030504040204" pitchFamily="34" charset="-120"/>
+                <a:ea typeface="微軟正黑體" panose="020B0604030504040204" pitchFamily="34" charset="-120"/>
+              </a:rPr>
+              <a:t>深度學習編碼</a:t>
+            </a:r>
+            <a:r>
+              <a:rPr lang="en-US" altLang="zh-TW" dirty="0">
+                <a:solidFill>
+                  <a:schemeClr val="bg1"/>
+                </a:solidFill>
+                <a:latin typeface="微軟正黑體" panose="020B0604030504040204" pitchFamily="34" charset="-120"/>
+                <a:ea typeface="微軟正黑體" panose="020B0604030504040204" pitchFamily="34" charset="-120"/>
+              </a:rPr>
+              <a:t> </a:t>
+            </a:r>
+            <a:endParaRPr lang="zh-TW" altLang="en-US" dirty="0">
+              <a:solidFill>
+                <a:schemeClr val="bg1"/>
+              </a:solidFill>
+              <a:latin typeface="微軟正黑體" panose="020B0604030504040204" pitchFamily="34" charset="-120"/>
+              <a:ea typeface="微軟正黑體" panose="020B0604030504040204" pitchFamily="34" charset="-120"/>
+            </a:endParaRPr>
+          </a:p>
+        </p:txBody>
+      </p:sp>
+      <p:sp>
+        <p:nvSpPr>
+          <p:cNvPr id="29" name="文字方塊 28">
+            <a:extLst>
+              <a:ext uri="{FF2B5EF4-FFF2-40B4-BE49-F238E27FC236}">
+                <a16:creationId xmlns:a16="http://schemas.microsoft.com/office/drawing/2014/main" id="{D7BA9D75-2A0D-4EE5-AE42-3EF3BDE15EEA}"/>
+              </a:ext>
+            </a:extLst>
+          </p:cNvPr>
+          <p:cNvSpPr txBox="1"/>
+          <p:nvPr/>
+        </p:nvSpPr>
+        <p:spPr>
+          <a:xfrm>
+            <a:off x="7310150" y="2931627"/>
+            <a:ext cx="1876091" cy="2585323"/>
+          </a:xfrm>
+          <a:prstGeom prst="rect">
+            <a:avLst/>
+          </a:prstGeom>
+          <a:noFill/>
+        </p:spPr>
+        <p:txBody>
+          <a:bodyPr wrap="none" rtlCol="0">
+            <a:spAutoFit/>
+          </a:bodyPr>
+          <a:lstStyle/>
+          <a:p>
+            <a:endParaRPr lang="en-US" altLang="zh-TW" dirty="0">
+              <a:solidFill>
+                <a:srgbClr val="00B0F0"/>
+              </a:solidFill>
+              <a:latin typeface="微軟正黑體" panose="020B0604030504040204" pitchFamily="34" charset="-120"/>
+              <a:ea typeface="微軟正黑體" panose="020B0604030504040204" pitchFamily="34" charset="-120"/>
+            </a:endParaRPr>
+          </a:p>
+          <a:p>
+            <a:endParaRPr lang="en-US" altLang="zh-TW" dirty="0">
+              <a:solidFill>
+                <a:srgbClr val="00B0F0"/>
+              </a:solidFill>
+              <a:latin typeface="微軟正黑體" panose="020B0604030504040204" pitchFamily="34" charset="-120"/>
+              <a:ea typeface="微軟正黑體" panose="020B0604030504040204" pitchFamily="34" charset="-120"/>
+            </a:endParaRPr>
+          </a:p>
+          <a:p>
+            <a:endParaRPr lang="en-US" altLang="zh-TW" dirty="0">
+              <a:solidFill>
+                <a:srgbClr val="00B0F0"/>
+              </a:solidFill>
+              <a:latin typeface="微軟正黑體" panose="020B0604030504040204" pitchFamily="34" charset="-120"/>
+              <a:ea typeface="微軟正黑體" panose="020B0604030504040204" pitchFamily="34" charset="-120"/>
+            </a:endParaRPr>
+          </a:p>
+          <a:p>
+            <a:endParaRPr lang="en-US" altLang="zh-TW" dirty="0">
+              <a:solidFill>
+                <a:srgbClr val="00B0F0"/>
+              </a:solidFill>
+              <a:latin typeface="微軟正黑體" panose="020B0604030504040204" pitchFamily="34" charset="-120"/>
+              <a:ea typeface="微軟正黑體" panose="020B0604030504040204" pitchFamily="34" charset="-120"/>
+            </a:endParaRPr>
+          </a:p>
+          <a:p>
+            <a:r>
+              <a:rPr lang="en-US" altLang="zh-TW" dirty="0">
+                <a:solidFill>
+                  <a:srgbClr val="00B0F0"/>
+                </a:solidFill>
+                <a:latin typeface="微軟正黑體" panose="020B0604030504040204" pitchFamily="34" charset="-120"/>
+                <a:ea typeface="微軟正黑體" panose="020B0604030504040204" pitchFamily="34" charset="-120"/>
+              </a:rPr>
+              <a:t>Lookup search</a:t>
+            </a:r>
+          </a:p>
+          <a:p>
+            <a:endParaRPr lang="en-US" altLang="zh-TW" dirty="0">
+              <a:solidFill>
+                <a:schemeClr val="bg1"/>
+              </a:solidFill>
+              <a:latin typeface="微軟正黑體" panose="020B0604030504040204" pitchFamily="34" charset="-120"/>
+              <a:ea typeface="微軟正黑體" panose="020B0604030504040204" pitchFamily="34" charset="-120"/>
+            </a:endParaRPr>
+          </a:p>
+          <a:p>
+            <a:endParaRPr lang="en-US" altLang="zh-TW" dirty="0">
+              <a:solidFill>
+                <a:schemeClr val="bg1"/>
+              </a:solidFill>
+              <a:latin typeface="微軟正黑體" panose="020B0604030504040204" pitchFamily="34" charset="-120"/>
+              <a:ea typeface="微軟正黑體" panose="020B0604030504040204" pitchFamily="34" charset="-120"/>
+            </a:endParaRPr>
+          </a:p>
+          <a:p>
+            <a:r>
+              <a:rPr lang="en-US" altLang="zh-TW" dirty="0">
+                <a:solidFill>
+                  <a:schemeClr val="bg1"/>
+                </a:solidFill>
+                <a:latin typeface="微軟正黑體" panose="020B0604030504040204" pitchFamily="34" charset="-120"/>
+                <a:ea typeface="微軟正黑體" panose="020B0604030504040204" pitchFamily="34" charset="-120"/>
+              </a:rPr>
+              <a:t>PCA</a:t>
+            </a:r>
+            <a:r>
+              <a:rPr lang="zh-TW" altLang="en-US" dirty="0">
+                <a:solidFill>
+                  <a:schemeClr val="bg1"/>
+                </a:solidFill>
+                <a:latin typeface="微軟正黑體" panose="020B0604030504040204" pitchFamily="34" charset="-120"/>
+                <a:ea typeface="微軟正黑體" panose="020B0604030504040204" pitchFamily="34" charset="-120"/>
+              </a:rPr>
+              <a:t> 採樣生成</a:t>
+            </a:r>
+            <a:endParaRPr lang="en-US" altLang="zh-TW" dirty="0">
+              <a:solidFill>
+                <a:schemeClr val="bg1"/>
+              </a:solidFill>
+              <a:latin typeface="微軟正黑體" panose="020B0604030504040204" pitchFamily="34" charset="-120"/>
+              <a:ea typeface="微軟正黑體" panose="020B0604030504040204" pitchFamily="34" charset="-120"/>
+            </a:endParaRPr>
+          </a:p>
+          <a:p>
+            <a:r>
+              <a:rPr lang="en-US" altLang="zh-TW" dirty="0">
+                <a:solidFill>
+                  <a:schemeClr val="bg1"/>
+                </a:solidFill>
+                <a:latin typeface="微軟正黑體" panose="020B0604030504040204" pitchFamily="34" charset="-120"/>
+                <a:ea typeface="微軟正黑體" panose="020B0604030504040204" pitchFamily="34" charset="-120"/>
+              </a:rPr>
+              <a:t>AE</a:t>
+            </a:r>
+            <a:r>
+              <a:rPr lang="zh-TW" altLang="en-US" dirty="0">
+                <a:solidFill>
+                  <a:schemeClr val="bg1"/>
+                </a:solidFill>
+                <a:latin typeface="微軟正黑體" panose="020B0604030504040204" pitchFamily="34" charset="-120"/>
+                <a:ea typeface="微軟正黑體" panose="020B0604030504040204" pitchFamily="34" charset="-120"/>
+              </a:rPr>
+              <a:t> </a:t>
+            </a:r>
+            <a:r>
+              <a:rPr lang="en-US" altLang="zh-TW" dirty="0">
+                <a:solidFill>
+                  <a:schemeClr val="bg1"/>
+                </a:solidFill>
+                <a:latin typeface="微軟正黑體" panose="020B0604030504040204" pitchFamily="34" charset="-120"/>
+                <a:ea typeface="微軟正黑體" panose="020B0604030504040204" pitchFamily="34" charset="-120"/>
+              </a:rPr>
+              <a:t>VAE</a:t>
+            </a:r>
+            <a:r>
+              <a:rPr lang="zh-TW" altLang="en-US" dirty="0">
+                <a:solidFill>
+                  <a:schemeClr val="bg1"/>
+                </a:solidFill>
+                <a:latin typeface="微軟正黑體" panose="020B0604030504040204" pitchFamily="34" charset="-120"/>
+                <a:ea typeface="微軟正黑體" panose="020B0604030504040204" pitchFamily="34" charset="-120"/>
+              </a:rPr>
+              <a:t>採樣生成</a:t>
             </a:r>
           </a:p>
         </p:txBody>
       </p:sp>
     </p:spTree>
+    <p:extLst>
+      <p:ext uri="{BB962C8B-B14F-4D97-AF65-F5344CB8AC3E}">
+        <p14:creationId xmlns:p14="http://schemas.microsoft.com/office/powerpoint/2010/main" val="4106481717"/>
+      </p:ext>
+    </p:extLst>
   </p:cSld>
   <p:clrMapOvr>
     <a:masterClrMapping/>
@@ -5221,7 +7903,7 @@
 </file>
 
 <file path=ppt/slides/slide4.xml><?xml version="1.0" encoding="utf-8"?>
-<p:sld xmlns:a="http://schemas.openxmlformats.org/drawingml/2006/main" xmlns:p="http://schemas.openxmlformats.org/presentationml/2006/main" xmlns:r="http://schemas.openxmlformats.org/officeDocument/2006/relationships">
+<p:sld xmlns:a="http://schemas.openxmlformats.org/drawingml/2006/main" xmlns:r="http://schemas.openxmlformats.org/officeDocument/2006/relationships" xmlns:p="http://schemas.openxmlformats.org/presentationml/2006/main">
   <p:cSld>
     <p:spTree>
       <p:nvGrpSpPr>
@@ -5229,7 +7911,14 @@
         <p:cNvGrpSpPr/>
         <p:nvPr/>
       </p:nvGrpSpPr>
-      <p:grpSpPr/>
+      <p:grpSpPr>
+        <a:xfrm>
+          <a:off x="0" y="0"/>
+          <a:ext cx="0" cy="0"/>
+          <a:chOff x="0" y="0"/>
+          <a:chExt cx="0" cy="0"/>
+        </a:xfrm>
+      </p:grpSpPr>
       <p:sp>
         <p:nvSpPr>
           <p:cNvPr id="2" name="Rectangle 1"/>
@@ -5271,6 +7960,7 @@
           <a:lstStyle/>
           <a:p>
             <a:pPr algn="ctr"/>
+            <a:endParaRPr/>
           </a:p>
         </p:txBody>
       </p:sp>
@@ -5283,7 +7973,7 @@
         <p:spPr>
           <a:xfrm>
             <a:off x="502920" y="256032"/>
-            <a:ext cx="11155680" cy="640080"/>
+            <a:ext cx="11155680" cy="446276"/>
           </a:xfrm>
           <a:prstGeom prst="rect">
             <a:avLst/>
@@ -5291,7 +7981,7 @@
           <a:noFill/>
         </p:spPr>
         <p:txBody>
-          <a:bodyPr wrap="square" anchor="t" lIns="0" rIns="0" tIns="0" bIns="0">
+          <a:bodyPr wrap="square" lIns="0" tIns="0" rIns="0" bIns="0" anchor="t">
             <a:spAutoFit/>
           </a:bodyPr>
           <a:lstStyle/>
@@ -5305,7 +7995,7 @@
               </a:spcAft>
             </a:pPr>
             <a:r>
-              <a:rPr sz="2900" b="1">
+              <a:rPr lang="en-US" sz="2900" b="1" dirty="0">
                 <a:solidFill>
                   <a:srgbClr val="F2F5FA"/>
                 </a:solidFill>
@@ -5313,8 +8003,16 @@
                 <a:ea typeface="Microsoft JhengHei"/>
                 <a:cs typeface="Microsoft JhengHei"/>
               </a:rPr>
-              <a:t>四个角色</a:t>
-            </a:r>
+              <a:t>5 steps</a:t>
+            </a:r>
+            <a:endParaRPr sz="2900" b="1" dirty="0">
+              <a:solidFill>
+                <a:srgbClr val="F2F5FA"/>
+              </a:solidFill>
+              <a:latin typeface="Microsoft JhengHei"/>
+              <a:ea typeface="Microsoft JhengHei"/>
+              <a:cs typeface="Microsoft JhengHei"/>
+            </a:endParaRPr>
           </a:p>
         </p:txBody>
       </p:sp>
@@ -5333,7 +8031,7 @@
             <a:avLst/>
           </a:prstGeom>
           <a:solidFill>
-            <a:srgbClr val="FFB454"/>
+            <a:srgbClr val="5AB0FF"/>
           </a:solidFill>
           <a:ln>
             <a:noFill/>
@@ -5359,6 +8057,7 @@
           <a:lstStyle/>
           <a:p>
             <a:pPr algn="ctr"/>
+            <a:endParaRPr/>
           </a:p>
         </p:txBody>
       </p:sp>
@@ -5379,7 +8078,7 @@
           <a:noFill/>
         </p:spPr>
         <p:txBody>
-          <a:bodyPr wrap="square" anchor="t" lIns="0" rIns="0" tIns="0" bIns="0">
+          <a:bodyPr wrap="square" lIns="0" tIns="0" rIns="0" bIns="0" anchor="t">
             <a:spAutoFit/>
           </a:bodyPr>
           <a:lstStyle/>
@@ -5401,14 +8100,14 @@
                 <a:ea typeface="Microsoft JhengHei"/>
                 <a:cs typeface="Microsoft JhengHei"/>
               </a:rPr>
-              <a:t>FOUR STAKEHOLDERS</a:t>
+              <a:t>WHAT IT IS</a:t>
             </a:r>
           </a:p>
         </p:txBody>
       </p:sp>
       <p:pic>
         <p:nvPicPr>
-          <p:cNvPr id="6" name="Picture 5" descr="stakeholder.png"/>
+          <p:cNvPr id="6" name="Picture 5" descr="flow.png"/>
           <p:cNvPicPr>
             <a:picLocks noChangeAspect="1"/>
           </p:cNvPicPr>
@@ -5422,8 +8121,8 @@
         </p:blipFill>
         <p:spPr>
           <a:xfrm>
-            <a:off x="1077943" y="1554480"/>
-            <a:ext cx="4976432" cy="4480560"/>
+            <a:off x="640080" y="1940453"/>
+            <a:ext cx="10881360" cy="2519893"/>
           </a:xfrm>
           <a:prstGeom prst="rect">
             <a:avLst/>
@@ -5438,8 +8137,8 @@
         </p:nvSpPr>
         <p:spPr>
           <a:xfrm>
-            <a:off x="6949440" y="1737360"/>
-            <a:ext cx="4754880" cy="4297680"/>
+            <a:off x="640080" y="5029200"/>
+            <a:ext cx="10881360" cy="1280160"/>
           </a:xfrm>
           <a:prstGeom prst="rect">
             <a:avLst/>
@@ -5447,7 +8146,7 @@
           <a:noFill/>
         </p:spPr>
         <p:txBody>
-          <a:bodyPr wrap="square" anchor="t" lIns="0" rIns="0" tIns="0" bIns="0">
+          <a:bodyPr wrap="square" lIns="0" tIns="0" rIns="0" bIns="0" anchor="t">
             <a:spAutoFit/>
           </a:bodyPr>
           <a:lstStyle/>
@@ -5461,7 +8160,7 @@
               </a:spcAft>
             </a:pPr>
             <a:r>
-              <a:rPr sz="1700" b="1">
+              <a:rPr sz="1600" b="1">
                 <a:solidFill>
                   <a:srgbClr val="F2F5FA"/>
                 </a:solidFill>
@@ -5469,20 +8168,20 @@
                 <a:ea typeface="Microsoft JhengHei"/>
                 <a:cs typeface="Microsoft JhengHei"/>
               </a:rPr>
-              <a:t>按一张对照表，给每栋楼贴一个角色。</a:t>
+              <a:t>真实建筑 → 贴角色 → 切权力情景（只改高度）→ 看天际线</a:t>
             </a:r>
           </a:p>
           <a:p>
             <a:pPr>
               <a:spcBef>
-                <a:spcPts val="1200"/>
+                <a:spcPts val="600"/>
               </a:spcBef>
               <a:spcAft>
                 <a:spcPts val="0"/>
               </a:spcAft>
             </a:pPr>
             <a:r>
-              <a:rPr sz="1700" b="1">
+              <a:rPr sz="1600" b="1">
                 <a:solidFill>
                   <a:srgbClr val="F2F5FA"/>
                 </a:solidFill>
@@ -5490,49 +8189,7 @@
                 <a:ea typeface="Microsoft JhengHei"/>
                 <a:cs typeface="Microsoft JhengHei"/>
               </a:rPr>
-              <a:t>政府公共 / 开发商 / 居民 / 在地非正式。</a:t>
-            </a:r>
-          </a:p>
-          <a:p>
-            <a:pPr>
-              <a:spcBef>
-                <a:spcPts val="1200"/>
-              </a:spcBef>
-              <a:spcAft>
-                <a:spcPts val="0"/>
-              </a:spcAft>
-            </a:pPr>
-            <a:r>
-              <a:rPr sz="1700" b="1">
-                <a:solidFill>
-                  <a:srgbClr val="F2F5FA"/>
-                </a:solidFill>
-                <a:latin typeface="Microsoft JhengHei"/>
-                <a:ea typeface="Microsoft JhengHei"/>
-                <a:cs typeface="Microsoft JhengHei"/>
-              </a:rPr>
-              <a:t>看不出用途的标为 unknown，不猜测。</a:t>
-            </a:r>
-          </a:p>
-          <a:p>
-            <a:pPr>
-              <a:spcBef>
-                <a:spcPts val="1200"/>
-              </a:spcBef>
-              <a:spcAft>
-                <a:spcPts val="0"/>
-              </a:spcAft>
-            </a:pPr>
-            <a:r>
-              <a:rPr sz="1700" b="1">
-                <a:solidFill>
-                  <a:srgbClr val="F2F5FA"/>
-                </a:solidFill>
-                <a:latin typeface="Microsoft JhengHei"/>
-                <a:ea typeface="Microsoft JhengHei"/>
-                <a:cs typeface="Microsoft JhengHei"/>
-              </a:rPr>
-              <a:t>靠查表，不是 AI 推断。</a:t>
+              <a:t>方向单向：由权力推导形态，不从形状反推身份</a:t>
             </a:r>
           </a:p>
         </p:txBody>
@@ -5578,6 +8235,7 @@
           <a:lstStyle/>
           <a:p>
             <a:pPr algn="ctr"/>
+            <a:endParaRPr/>
           </a:p>
         </p:txBody>
       </p:sp>
@@ -5598,7 +8256,7 @@
           <a:noFill/>
         </p:spPr>
         <p:txBody>
-          <a:bodyPr wrap="square" anchor="t" lIns="0" rIns="0" tIns="0" bIns="0">
+          <a:bodyPr wrap="square" lIns="0" tIns="0" rIns="0" bIns="0" anchor="t">
             <a:spAutoFit/>
           </a:bodyPr>
           <a:lstStyle/>
@@ -5642,7 +8300,7 @@
           <a:noFill/>
         </p:spPr>
         <p:txBody>
-          <a:bodyPr wrap="square" anchor="t" lIns="0" rIns="0" tIns="0" bIns="0">
+          <a:bodyPr wrap="square" lIns="0" tIns="0" rIns="0" bIns="0" anchor="t">
             <a:spAutoFit/>
           </a:bodyPr>
           <a:lstStyle/>
@@ -5664,7 +8322,7 @@
                 <a:ea typeface="Microsoft JhengHei"/>
                 <a:cs typeface="Microsoft JhengHei"/>
               </a:rPr>
-              <a:t>4</a:t>
+              <a:t>2</a:t>
             </a:r>
           </a:p>
         </p:txBody>
@@ -5678,7 +8336,7 @@
 </file>
 
 <file path=ppt/slides/slide5.xml><?xml version="1.0" encoding="utf-8"?>
-<p:sld xmlns:a="http://schemas.openxmlformats.org/drawingml/2006/main" xmlns:p="http://schemas.openxmlformats.org/presentationml/2006/main" xmlns:r="http://schemas.openxmlformats.org/officeDocument/2006/relationships">
+<p:sld xmlns:a="http://schemas.openxmlformats.org/drawingml/2006/main" xmlns:r="http://schemas.openxmlformats.org/officeDocument/2006/relationships" xmlns:p="http://schemas.openxmlformats.org/presentationml/2006/main">
   <p:cSld>
     <p:spTree>
       <p:nvGrpSpPr>
@@ -5686,7 +8344,14 @@
         <p:cNvGrpSpPr/>
         <p:nvPr/>
       </p:nvGrpSpPr>
-      <p:grpSpPr/>
+      <p:grpSpPr>
+        <a:xfrm>
+          <a:off x="0" y="0"/>
+          <a:ext cx="0" cy="0"/>
+          <a:chOff x="0" y="0"/>
+          <a:chExt cx="0" cy="0"/>
+        </a:xfrm>
+      </p:grpSpPr>
       <p:sp>
         <p:nvSpPr>
           <p:cNvPr id="2" name="Rectangle 1"/>
@@ -5695,7 +8360,7 @@
         </p:nvSpPr>
         <p:spPr>
           <a:xfrm>
-            <a:off x="0" y="0"/>
+            <a:off x="-15088" y="0"/>
             <a:ext cx="12191695" cy="6858000"/>
           </a:xfrm>
           <a:prstGeom prst="rect">
@@ -5728,144 +8393,13 @@
           <a:lstStyle/>
           <a:p>
             <a:pPr algn="ctr"/>
-          </a:p>
-        </p:txBody>
-      </p:sp>
-      <p:sp>
-        <p:nvSpPr>
-          <p:cNvPr id="3" name="TextBox 2"/>
-          <p:cNvSpPr txBox="1"/>
-          <p:nvPr/>
-        </p:nvSpPr>
-        <p:spPr>
-          <a:xfrm>
-            <a:off x="502920" y="256032"/>
-            <a:ext cx="11155680" cy="640080"/>
-          </a:xfrm>
-          <a:prstGeom prst="rect">
-            <a:avLst/>
-          </a:prstGeom>
-          <a:noFill/>
-        </p:spPr>
-        <p:txBody>
-          <a:bodyPr wrap="square" anchor="t" lIns="0" rIns="0" tIns="0" bIns="0">
-            <a:spAutoFit/>
-          </a:bodyPr>
-          <a:lstStyle/>
-          <a:p>
-            <a:pPr algn="l">
-              <a:spcBef>
-                <a:spcPts val="0"/>
-              </a:spcBef>
-              <a:spcAft>
-                <a:spcPts val="0"/>
-              </a:spcAft>
-            </a:pPr>
-            <a:r>
-              <a:rPr sz="2900" b="1">
-                <a:solidFill>
-                  <a:srgbClr val="F2F5FA"/>
-                </a:solidFill>
-                <a:latin typeface="Microsoft JhengHei"/>
-                <a:ea typeface="Microsoft JhengHei"/>
-                <a:cs typeface="Microsoft JhengHei"/>
-              </a:rPr>
-              <a:t>各角色的规模</a:t>
-            </a:r>
-          </a:p>
-        </p:txBody>
-      </p:sp>
-      <p:sp>
-        <p:nvSpPr>
-          <p:cNvPr id="4" name="Rectangle 3"/>
-          <p:cNvSpPr/>
-          <p:nvPr/>
-        </p:nvSpPr>
-        <p:spPr>
-          <a:xfrm>
-            <a:off x="548640" y="932688"/>
-            <a:ext cx="2194560" cy="54864"/>
-          </a:xfrm>
-          <a:prstGeom prst="rect">
-            <a:avLst/>
-          </a:prstGeom>
-          <a:solidFill>
-            <a:srgbClr val="4FD6D6"/>
-          </a:solidFill>
-          <a:ln>
-            <a:noFill/>
-          </a:ln>
-          <a:effectLst/>
-        </p:spPr>
-        <p:style>
-          <a:lnRef idx="1">
-            <a:schemeClr val="accent1"/>
-          </a:lnRef>
-          <a:fillRef idx="3">
-            <a:schemeClr val="accent1"/>
-          </a:fillRef>
-          <a:effectRef idx="2">
-            <a:schemeClr val="accent1"/>
-          </a:effectRef>
-          <a:fontRef idx="minor">
-            <a:schemeClr val="lt1"/>
-          </a:fontRef>
-        </p:style>
-        <p:txBody>
-          <a:bodyPr rtlCol="0" anchor="ctr"/>
-          <a:lstStyle/>
-          <a:p>
-            <a:pPr algn="ctr"/>
-          </a:p>
-        </p:txBody>
-      </p:sp>
-      <p:sp>
-        <p:nvSpPr>
-          <p:cNvPr id="5" name="TextBox 4"/>
-          <p:cNvSpPr txBox="1"/>
-          <p:nvPr/>
-        </p:nvSpPr>
-        <p:spPr>
-          <a:xfrm>
-            <a:off x="530352" y="1024128"/>
-            <a:ext cx="10789920" cy="292608"/>
-          </a:xfrm>
-          <a:prstGeom prst="rect">
-            <a:avLst/>
-          </a:prstGeom>
-          <a:noFill/>
-        </p:spPr>
-        <p:txBody>
-          <a:bodyPr wrap="square" anchor="t" lIns="0" rIns="0" tIns="0" bIns="0">
-            <a:spAutoFit/>
-          </a:bodyPr>
-          <a:lstStyle/>
-          <a:p>
-            <a:pPr algn="l">
-              <a:spcBef>
-                <a:spcPts val="0"/>
-              </a:spcBef>
-              <a:spcAft>
-                <a:spcPts val="0"/>
-              </a:spcAft>
-            </a:pPr>
-            <a:r>
-              <a:rPr sz="1400" b="1">
-                <a:solidFill>
-                  <a:srgbClr val="9AA4B2"/>
-                </a:solidFill>
-                <a:latin typeface="Microsoft JhengHei"/>
-                <a:ea typeface="Microsoft JhengHei"/>
-                <a:cs typeface="Microsoft JhengHei"/>
-              </a:rPr>
-              <a:t>WHO HOLDS WHAT</a:t>
-            </a:r>
+            <a:endParaRPr/>
           </a:p>
         </p:txBody>
       </p:sp>
       <p:pic>
         <p:nvPicPr>
-          <p:cNvPr id="6" name="Picture 5" descr="stakeholder_bars.png"/>
+          <p:cNvPr id="6" name="Picture 5" descr="flow.png"/>
           <p:cNvPicPr>
             <a:picLocks noChangeAspect="1"/>
           </p:cNvPicPr>
@@ -5879,79 +8413,14 @@
         </p:blipFill>
         <p:spPr>
           <a:xfrm>
-            <a:off x="2342648" y="1508760"/>
-            <a:ext cx="7476223" cy="3383280"/>
+            <a:off x="640080" y="1940453"/>
+            <a:ext cx="10881360" cy="2519893"/>
           </a:xfrm>
           <a:prstGeom prst="rect">
             <a:avLst/>
           </a:prstGeom>
         </p:spPr>
       </p:pic>
-      <p:sp>
-        <p:nvSpPr>
-          <p:cNvPr id="7" name="TextBox 6"/>
-          <p:cNvSpPr txBox="1"/>
-          <p:nvPr/>
-        </p:nvSpPr>
-        <p:spPr>
-          <a:xfrm>
-            <a:off x="640080" y="5029200"/>
-            <a:ext cx="10881360" cy="1280160"/>
-          </a:xfrm>
-          <a:prstGeom prst="rect">
-            <a:avLst/>
-          </a:prstGeom>
-          <a:noFill/>
-        </p:spPr>
-        <p:txBody>
-          <a:bodyPr wrap="square" anchor="t" lIns="0" rIns="0" tIns="0" bIns="0">
-            <a:spAutoFit/>
-          </a:bodyPr>
-          <a:lstStyle/>
-          <a:p>
-            <a:pPr algn="l">
-              <a:spcBef>
-                <a:spcPts val="0"/>
-              </a:spcBef>
-              <a:spcAft>
-                <a:spcPts val="0"/>
-              </a:spcAft>
-            </a:pPr>
-            <a:r>
-              <a:rPr sz="1600" b="1">
-                <a:solidFill>
-                  <a:srgbClr val="F2F5FA"/>
-                </a:solidFill>
-                <a:latin typeface="Microsoft JhengHei"/>
-                <a:ea typeface="Microsoft JhengHei"/>
-                <a:cs typeface="Microsoft JhengHei"/>
-              </a:rPr>
-              <a:t>左：每个角色有多少栋。右：各占多少面积。</a:t>
-            </a:r>
-          </a:p>
-          <a:p>
-            <a:pPr>
-              <a:spcBef>
-                <a:spcPts val="600"/>
-              </a:spcBef>
-              <a:spcAft>
-                <a:spcPts val="0"/>
-              </a:spcAft>
-            </a:pPr>
-            <a:r>
-              <a:rPr sz="1600" b="1">
-                <a:solidFill>
-                  <a:srgbClr val="F2F5FA"/>
-                </a:solidFill>
-                <a:latin typeface="Microsoft JhengHei"/>
-                <a:ea typeface="Microsoft JhengHei"/>
-                <a:cs typeface="Microsoft JhengHei"/>
-              </a:rPr>
-              <a:t>这是改高度之前的起点。</a:t>
-            </a:r>
-          </a:p>
-        </p:txBody>
-      </p:sp>
       <p:sp>
         <p:nvSpPr>
           <p:cNvPr id="8" name="Rectangle 7"/>
@@ -5993,19 +8462,20 @@
           <a:lstStyle/>
           <a:p>
             <a:pPr algn="ctr"/>
-          </a:p>
-        </p:txBody>
-      </p:sp>
-      <p:sp>
-        <p:nvSpPr>
-          <p:cNvPr id="9" name="TextBox 8"/>
+            <a:endParaRPr/>
+          </a:p>
+        </p:txBody>
+      </p:sp>
+      <p:sp>
+        <p:nvSpPr>
+          <p:cNvPr id="10" name="TextBox 9"/>
           <p:cNvSpPr txBox="1"/>
           <p:nvPr/>
         </p:nvSpPr>
         <p:spPr>
           <a:xfrm>
-            <a:off x="457200" y="6492240"/>
-            <a:ext cx="10058400" cy="310896"/>
+            <a:off x="11155680" y="6492240"/>
+            <a:ext cx="822960" cy="310896"/>
           </a:xfrm>
           <a:prstGeom prst="rect">
             <a:avLst/>
@@ -6013,12 +8483,12 @@
           <a:noFill/>
         </p:spPr>
         <p:txBody>
-          <a:bodyPr wrap="square" anchor="t" lIns="0" rIns="0" tIns="0" bIns="0">
+          <a:bodyPr wrap="square" lIns="0" tIns="0" rIns="0" bIns="0" anchor="t">
             <a:spAutoFit/>
           </a:bodyPr>
           <a:lstStyle/>
           <a:p>
-            <a:pPr algn="l">
+            <a:pPr algn="r">
               <a:spcBef>
                 <a:spcPts val="0"/>
               </a:spcBef>
@@ -6035,21 +8505,27 @@
                 <a:ea typeface="Microsoft JhengHei"/>
                 <a:cs typeface="Microsoft JhengHei"/>
               </a:rPr>
-              <a:t>OSM 权力到形态 · 图解说明</a:t>
-            </a:r>
-          </a:p>
-        </p:txBody>
-      </p:sp>
-      <p:sp>
-        <p:nvSpPr>
-          <p:cNvPr id="10" name="TextBox 9"/>
+              <a:t>2</a:t>
+            </a:r>
+          </a:p>
+        </p:txBody>
+      </p:sp>
+      <p:sp>
+        <p:nvSpPr>
+          <p:cNvPr id="11" name="文字方塊 10">
+            <a:extLst>
+              <a:ext uri="{FF2B5EF4-FFF2-40B4-BE49-F238E27FC236}">
+                <a16:creationId xmlns:a16="http://schemas.microsoft.com/office/drawing/2014/main" id="{D245241B-F157-40CD-A4DB-440B856399A7}"/>
+              </a:ext>
+            </a:extLst>
+          </p:cNvPr>
           <p:cNvSpPr txBox="1"/>
           <p:nvPr/>
         </p:nvSpPr>
         <p:spPr>
           <a:xfrm>
-            <a:off x="11155680" y="6492240"/>
-            <a:ext cx="822960" cy="310896"/>
+            <a:off x="1150621" y="2075720"/>
+            <a:ext cx="1569660" cy="369332"/>
           </a:xfrm>
           <a:prstGeom prst="rect">
             <a:avLst/>
@@ -6057,34 +8533,414 @@
           <a:noFill/>
         </p:spPr>
         <p:txBody>
-          <a:bodyPr wrap="square" anchor="t" lIns="0" rIns="0" tIns="0" bIns="0">
+          <a:bodyPr wrap="none" rtlCol="0">
             <a:spAutoFit/>
           </a:bodyPr>
           <a:lstStyle/>
           <a:p>
-            <a:pPr algn="r">
-              <a:spcBef>
-                <a:spcPts val="0"/>
-              </a:spcBef>
-              <a:spcAft>
-                <a:spcPts val="0"/>
-              </a:spcAft>
-            </a:pPr>
-            <a:r>
-              <a:rPr sz="1200" b="1">
-                <a:solidFill>
-                  <a:srgbClr val="9AA4B2"/>
-                </a:solidFill>
-                <a:latin typeface="Microsoft JhengHei"/>
-                <a:ea typeface="Microsoft JhengHei"/>
-                <a:cs typeface="Microsoft JhengHei"/>
-              </a:rPr>
-              <a:t>5</a:t>
-            </a:r>
+            <a:r>
+              <a:rPr lang="zh-TW" altLang="en-US" b="1" dirty="0">
+                <a:solidFill>
+                  <a:schemeClr val="bg1"/>
+                </a:solidFill>
+                <a:latin typeface="微軟正黑體" panose="020B0604030504040204" pitchFamily="34" charset="-120"/>
+                <a:ea typeface="微軟正黑體" panose="020B0604030504040204" pitchFamily="34" charset="-120"/>
+              </a:rPr>
+              <a:t>城市資料讀取</a:t>
+            </a:r>
+          </a:p>
+        </p:txBody>
+      </p:sp>
+      <p:sp>
+        <p:nvSpPr>
+          <p:cNvPr id="12" name="文字方塊 11">
+            <a:extLst>
+              <a:ext uri="{FF2B5EF4-FFF2-40B4-BE49-F238E27FC236}">
+                <a16:creationId xmlns:a16="http://schemas.microsoft.com/office/drawing/2014/main" id="{EE1B3829-C937-445E-AEA0-C27C0CB37052}"/>
+              </a:ext>
+            </a:extLst>
+          </p:cNvPr>
+          <p:cNvSpPr txBox="1"/>
+          <p:nvPr/>
+        </p:nvSpPr>
+        <p:spPr>
+          <a:xfrm>
+            <a:off x="3484812" y="2082308"/>
+            <a:ext cx="1107996" cy="369332"/>
+          </a:xfrm>
+          <a:prstGeom prst="rect">
+            <a:avLst/>
+          </a:prstGeom>
+          <a:noFill/>
+        </p:spPr>
+        <p:txBody>
+          <a:bodyPr wrap="none" rtlCol="0">
+            <a:spAutoFit/>
+          </a:bodyPr>
+          <a:lstStyle/>
+          <a:p>
+            <a:r>
+              <a:rPr lang="zh-TW" altLang="en-US" b="1" dirty="0">
+                <a:solidFill>
+                  <a:schemeClr val="bg1"/>
+                </a:solidFill>
+                <a:latin typeface="微軟正黑體" panose="020B0604030504040204" pitchFamily="34" charset="-120"/>
+                <a:ea typeface="微軟正黑體" panose="020B0604030504040204" pitchFamily="34" charset="-120"/>
+              </a:rPr>
+              <a:t>資料編碼</a:t>
+            </a:r>
+          </a:p>
+        </p:txBody>
+      </p:sp>
+      <p:sp>
+        <p:nvSpPr>
+          <p:cNvPr id="13" name="文字方塊 12">
+            <a:extLst>
+              <a:ext uri="{FF2B5EF4-FFF2-40B4-BE49-F238E27FC236}">
+                <a16:creationId xmlns:a16="http://schemas.microsoft.com/office/drawing/2014/main" id="{510BDEF2-1FC1-4D84-9868-C16A970374C4}"/>
+              </a:ext>
+            </a:extLst>
+          </p:cNvPr>
+          <p:cNvSpPr txBox="1"/>
+          <p:nvPr/>
+        </p:nvSpPr>
+        <p:spPr>
+          <a:xfrm>
+            <a:off x="5357339" y="2099548"/>
+            <a:ext cx="1338828" cy="369332"/>
+          </a:xfrm>
+          <a:prstGeom prst="rect">
+            <a:avLst/>
+          </a:prstGeom>
+          <a:noFill/>
+        </p:spPr>
+        <p:txBody>
+          <a:bodyPr wrap="none" rtlCol="0">
+            <a:spAutoFit/>
+          </a:bodyPr>
+          <a:lstStyle/>
+          <a:p>
+            <a:r>
+              <a:rPr lang="zh-TW" altLang="en-US" b="1" dirty="0">
+                <a:solidFill>
+                  <a:schemeClr val="bg1"/>
+                </a:solidFill>
+                <a:latin typeface="微軟正黑體" panose="020B0604030504040204" pitchFamily="34" charset="-120"/>
+                <a:ea typeface="微軟正黑體" panose="020B0604030504040204" pitchFamily="34" charset="-120"/>
+              </a:rPr>
+              <a:t>權力重分配</a:t>
+            </a:r>
+          </a:p>
+        </p:txBody>
+      </p:sp>
+      <p:sp>
+        <p:nvSpPr>
+          <p:cNvPr id="14" name="文字方塊 13">
+            <a:extLst>
+              <a:ext uri="{FF2B5EF4-FFF2-40B4-BE49-F238E27FC236}">
+                <a16:creationId xmlns:a16="http://schemas.microsoft.com/office/drawing/2014/main" id="{87B86E00-35BF-41F1-8F3A-D1B26C435119}"/>
+              </a:ext>
+            </a:extLst>
+          </p:cNvPr>
+          <p:cNvSpPr txBox="1"/>
+          <p:nvPr/>
+        </p:nvSpPr>
+        <p:spPr>
+          <a:xfrm>
+            <a:off x="7460698" y="2099548"/>
+            <a:ext cx="1338828" cy="369332"/>
+          </a:xfrm>
+          <a:prstGeom prst="rect">
+            <a:avLst/>
+          </a:prstGeom>
+          <a:noFill/>
+        </p:spPr>
+        <p:txBody>
+          <a:bodyPr wrap="none" rtlCol="0">
+            <a:spAutoFit/>
+          </a:bodyPr>
+          <a:lstStyle/>
+          <a:p>
+            <a:r>
+              <a:rPr lang="zh-TW" altLang="en-US" b="1" dirty="0">
+                <a:solidFill>
+                  <a:schemeClr val="bg1"/>
+                </a:solidFill>
+                <a:latin typeface="微軟正黑體" panose="020B0604030504040204" pitchFamily="34" charset="-120"/>
+                <a:ea typeface="微軟正黑體" panose="020B0604030504040204" pitchFamily="34" charset="-120"/>
+              </a:rPr>
+              <a:t>生成新城市</a:t>
+            </a:r>
+          </a:p>
+        </p:txBody>
+      </p:sp>
+      <p:sp>
+        <p:nvSpPr>
+          <p:cNvPr id="15" name="文字方塊 14">
+            <a:extLst>
+              <a:ext uri="{FF2B5EF4-FFF2-40B4-BE49-F238E27FC236}">
+                <a16:creationId xmlns:a16="http://schemas.microsoft.com/office/drawing/2014/main" id="{AB3004F4-7AA4-4C2A-B1CB-7E9C058CB826}"/>
+              </a:ext>
+            </a:extLst>
+          </p:cNvPr>
+          <p:cNvSpPr txBox="1"/>
+          <p:nvPr/>
+        </p:nvSpPr>
+        <p:spPr>
+          <a:xfrm>
+            <a:off x="9564057" y="2099548"/>
+            <a:ext cx="1903085" cy="369332"/>
+          </a:xfrm>
+          <a:prstGeom prst="rect">
+            <a:avLst/>
+          </a:prstGeom>
+          <a:noFill/>
+        </p:spPr>
+        <p:txBody>
+          <a:bodyPr wrap="none" rtlCol="0">
+            <a:spAutoFit/>
+          </a:bodyPr>
+          <a:lstStyle/>
+          <a:p>
+            <a:r>
+              <a:rPr lang="zh-TW" altLang="en-US" b="1" dirty="0">
+                <a:solidFill>
+                  <a:schemeClr val="bg1"/>
+                </a:solidFill>
+                <a:latin typeface="微軟正黑體" panose="020B0604030504040204" pitchFamily="34" charset="-120"/>
+                <a:ea typeface="微軟正黑體" panose="020B0604030504040204" pitchFamily="34" charset="-120"/>
+              </a:rPr>
+              <a:t>後續导出</a:t>
+            </a:r>
+            <a:r>
+              <a:rPr lang="en-US" altLang="zh-TW" b="1" dirty="0">
+                <a:solidFill>
+                  <a:schemeClr val="bg1"/>
+                </a:solidFill>
+                <a:latin typeface="微軟正黑體" panose="020B0604030504040204" pitchFamily="34" charset="-120"/>
+                <a:ea typeface="微軟正黑體" panose="020B0604030504040204" pitchFamily="34" charset="-120"/>
+              </a:rPr>
+              <a:t>/</a:t>
+            </a:r>
+            <a:r>
+              <a:rPr lang="zh-TW" altLang="en-US" b="1" dirty="0">
+                <a:solidFill>
+                  <a:schemeClr val="bg1"/>
+                </a:solidFill>
+                <a:latin typeface="微軟正黑體" panose="020B0604030504040204" pitchFamily="34" charset="-120"/>
+                <a:ea typeface="微軟正黑體" panose="020B0604030504040204" pitchFamily="34" charset="-120"/>
+              </a:rPr>
+              <a:t>可視化</a:t>
+            </a:r>
+          </a:p>
+        </p:txBody>
+      </p:sp>
+      <p:sp>
+        <p:nvSpPr>
+          <p:cNvPr id="16" name="文字方塊 15">
+            <a:extLst>
+              <a:ext uri="{FF2B5EF4-FFF2-40B4-BE49-F238E27FC236}">
+                <a16:creationId xmlns:a16="http://schemas.microsoft.com/office/drawing/2014/main" id="{3182E73F-8A21-41C9-AC16-7822665E1CA6}"/>
+              </a:ext>
+            </a:extLst>
+          </p:cNvPr>
+          <p:cNvSpPr txBox="1"/>
+          <p:nvPr/>
+        </p:nvSpPr>
+        <p:spPr>
+          <a:xfrm>
+            <a:off x="1064058" y="4065008"/>
+            <a:ext cx="1617751" cy="1754326"/>
+          </a:xfrm>
+          <a:prstGeom prst="rect">
+            <a:avLst/>
+          </a:prstGeom>
+          <a:noFill/>
+        </p:spPr>
+        <p:txBody>
+          <a:bodyPr wrap="none" rtlCol="0">
+            <a:spAutoFit/>
+          </a:bodyPr>
+          <a:lstStyle/>
+          <a:p>
+            <a:r>
+              <a:rPr lang="en-US" altLang="zh-TW" dirty="0">
+                <a:solidFill>
+                  <a:schemeClr val="bg1"/>
+                </a:solidFill>
+                <a:latin typeface="微軟正黑體" panose="020B0604030504040204" pitchFamily="34" charset="-120"/>
+                <a:ea typeface="微軟正黑體" panose="020B0604030504040204" pitchFamily="34" charset="-120"/>
+              </a:rPr>
+              <a:t>GH </a:t>
+            </a:r>
+            <a:r>
+              <a:rPr lang="en-US" altLang="zh-TW" dirty="0" err="1">
+                <a:solidFill>
+                  <a:schemeClr val="bg1"/>
+                </a:solidFill>
+                <a:latin typeface="微軟正黑體" panose="020B0604030504040204" pitchFamily="34" charset="-120"/>
+                <a:ea typeface="微軟正黑體" panose="020B0604030504040204" pitchFamily="34" charset="-120"/>
+              </a:rPr>
+              <a:t>osm</a:t>
+            </a:r>
+            <a:r>
+              <a:rPr lang="en-US" altLang="zh-TW" dirty="0">
+                <a:solidFill>
+                  <a:schemeClr val="bg1"/>
+                </a:solidFill>
+                <a:latin typeface="微軟正黑體" panose="020B0604030504040204" pitchFamily="34" charset="-120"/>
+                <a:ea typeface="微軟正黑體" panose="020B0604030504040204" pitchFamily="34" charset="-120"/>
+              </a:rPr>
+              <a:t> </a:t>
+            </a:r>
+            <a:r>
+              <a:rPr lang="en-US" altLang="zh-TW" dirty="0" err="1">
+                <a:solidFill>
+                  <a:schemeClr val="bg1"/>
+                </a:solidFill>
+                <a:latin typeface="微軟正黑體" panose="020B0604030504040204" pitchFamily="34" charset="-120"/>
+                <a:ea typeface="微軟正黑體" panose="020B0604030504040204" pitchFamily="34" charset="-120"/>
+              </a:rPr>
+              <a:t>api</a:t>
+            </a:r>
+            <a:endParaRPr lang="en-US" altLang="zh-TW" dirty="0">
+              <a:solidFill>
+                <a:schemeClr val="bg1"/>
+              </a:solidFill>
+              <a:latin typeface="微軟正黑體" panose="020B0604030504040204" pitchFamily="34" charset="-120"/>
+              <a:ea typeface="微軟正黑體" panose="020B0604030504040204" pitchFamily="34" charset="-120"/>
+            </a:endParaRPr>
+          </a:p>
+          <a:p>
+            <a:r>
+              <a:rPr lang="en-US" altLang="zh-TW" dirty="0">
+                <a:solidFill>
+                  <a:schemeClr val="bg1"/>
+                </a:solidFill>
+                <a:latin typeface="微軟正黑體" panose="020B0604030504040204" pitchFamily="34" charset="-120"/>
+                <a:ea typeface="微軟正黑體" panose="020B0604030504040204" pitchFamily="34" charset="-120"/>
+              </a:rPr>
+              <a:t>GH </a:t>
+            </a:r>
+            <a:r>
+              <a:rPr lang="en-US" altLang="zh-TW" dirty="0" err="1">
+                <a:solidFill>
+                  <a:schemeClr val="bg1"/>
+                </a:solidFill>
+                <a:latin typeface="微軟正黑體" panose="020B0604030504040204" pitchFamily="34" charset="-120"/>
+                <a:ea typeface="微軟正黑體" panose="020B0604030504040204" pitchFamily="34" charset="-120"/>
+              </a:rPr>
+              <a:t>osm</a:t>
+            </a:r>
+            <a:r>
+              <a:rPr lang="en-US" altLang="zh-TW" dirty="0">
+                <a:solidFill>
+                  <a:schemeClr val="bg1"/>
+                </a:solidFill>
+                <a:latin typeface="微軟正黑體" panose="020B0604030504040204" pitchFamily="34" charset="-120"/>
+                <a:ea typeface="微軟正黑體" panose="020B0604030504040204" pitchFamily="34" charset="-120"/>
+              </a:rPr>
+              <a:t> local</a:t>
+            </a:r>
+          </a:p>
+          <a:p>
+            <a:endParaRPr lang="en-US" altLang="zh-TW" dirty="0">
+              <a:solidFill>
+                <a:schemeClr val="bg1"/>
+              </a:solidFill>
+              <a:latin typeface="微軟正黑體" panose="020B0604030504040204" pitchFamily="34" charset="-120"/>
+              <a:ea typeface="微軟正黑體" panose="020B0604030504040204" pitchFamily="34" charset="-120"/>
+            </a:endParaRPr>
+          </a:p>
+          <a:p>
+            <a:r>
+              <a:rPr lang="en-US" altLang="zh-TW" dirty="0">
+                <a:solidFill>
+                  <a:schemeClr val="bg1"/>
+                </a:solidFill>
+                <a:latin typeface="微軟正黑體" panose="020B0604030504040204" pitchFamily="34" charset="-120"/>
+                <a:ea typeface="微軟正黑體" panose="020B0604030504040204" pitchFamily="34" charset="-120"/>
+              </a:rPr>
+              <a:t>Building csv</a:t>
+            </a:r>
+          </a:p>
+          <a:p>
+            <a:endParaRPr lang="en-US" altLang="zh-TW" dirty="0">
+              <a:solidFill>
+                <a:schemeClr val="bg1"/>
+              </a:solidFill>
+              <a:latin typeface="微軟正黑體" panose="020B0604030504040204" pitchFamily="34" charset="-120"/>
+              <a:ea typeface="微軟正黑體" panose="020B0604030504040204" pitchFamily="34" charset="-120"/>
+            </a:endParaRPr>
+          </a:p>
+          <a:p>
+            <a:r>
+              <a:rPr lang="zh-TW" altLang="en-US" dirty="0">
+                <a:solidFill>
+                  <a:schemeClr val="bg1"/>
+                </a:solidFill>
+                <a:latin typeface="微軟正黑體" panose="020B0604030504040204" pitchFamily="34" charset="-120"/>
+                <a:ea typeface="微軟正黑體" panose="020B0604030504040204" pitchFamily="34" charset="-120"/>
+              </a:rPr>
+              <a:t>上海資料集</a:t>
+            </a:r>
+          </a:p>
+        </p:txBody>
+      </p:sp>
+      <p:sp>
+        <p:nvSpPr>
+          <p:cNvPr id="17" name="文字方塊 16">
+            <a:extLst>
+              <a:ext uri="{FF2B5EF4-FFF2-40B4-BE49-F238E27FC236}">
+                <a16:creationId xmlns:a16="http://schemas.microsoft.com/office/drawing/2014/main" id="{738F00E3-3C82-46A0-AE71-23F6422BA729}"/>
+              </a:ext>
+            </a:extLst>
+          </p:cNvPr>
+          <p:cNvSpPr txBox="1"/>
+          <p:nvPr/>
+        </p:nvSpPr>
+        <p:spPr>
+          <a:xfrm>
+            <a:off x="9499457" y="4108105"/>
+            <a:ext cx="1726691" cy="369332"/>
+          </a:xfrm>
+          <a:prstGeom prst="rect">
+            <a:avLst/>
+          </a:prstGeom>
+          <a:noFill/>
+        </p:spPr>
+        <p:txBody>
+          <a:bodyPr wrap="none" rtlCol="0">
+            <a:spAutoFit/>
+          </a:bodyPr>
+          <a:lstStyle/>
+          <a:p>
+            <a:r>
+              <a:rPr lang="en-US" altLang="zh-TW" dirty="0">
+                <a:solidFill>
+                  <a:schemeClr val="bg1"/>
+                </a:solidFill>
+                <a:latin typeface="微軟正黑體" panose="020B0604030504040204" pitchFamily="34" charset="-120"/>
+                <a:ea typeface="微軟正黑體" panose="020B0604030504040204" pitchFamily="34" charset="-120"/>
+              </a:rPr>
+              <a:t>Color preview</a:t>
+            </a:r>
+            <a:endParaRPr lang="zh-TW" altLang="en-US" dirty="0">
+              <a:solidFill>
+                <a:schemeClr val="bg1"/>
+              </a:solidFill>
+              <a:latin typeface="微軟正黑體" panose="020B0604030504040204" pitchFamily="34" charset="-120"/>
+              <a:ea typeface="微軟正黑體" panose="020B0604030504040204" pitchFamily="34" charset="-120"/>
+            </a:endParaRPr>
           </a:p>
         </p:txBody>
       </p:sp>
     </p:spTree>
+    <p:extLst>
+      <p:ext uri="{BB962C8B-B14F-4D97-AF65-F5344CB8AC3E}">
+        <p14:creationId xmlns:p14="http://schemas.microsoft.com/office/powerpoint/2010/main" val="1625447323"/>
+      </p:ext>
+    </p:extLst>
   </p:cSld>
   <p:clrMapOvr>
     <a:masterClrMapping/>
@@ -6093,7 +8949,7 @@
 </file>
 
 <file path=ppt/slides/slide6.xml><?xml version="1.0" encoding="utf-8"?>
-<p:sld xmlns:a="http://schemas.openxmlformats.org/drawingml/2006/main" xmlns:p="http://schemas.openxmlformats.org/presentationml/2006/main" xmlns:r="http://schemas.openxmlformats.org/officeDocument/2006/relationships">
+<p:sld xmlns:a="http://schemas.openxmlformats.org/drawingml/2006/main" xmlns:r="http://schemas.openxmlformats.org/officeDocument/2006/relationships" xmlns:p="http://schemas.openxmlformats.org/presentationml/2006/main">
   <p:cSld>
     <p:spTree>
       <p:nvGrpSpPr>
@@ -6101,7 +8957,14 @@
         <p:cNvGrpSpPr/>
         <p:nvPr/>
       </p:nvGrpSpPr>
-      <p:grpSpPr/>
+      <p:grpSpPr>
+        <a:xfrm>
+          <a:off x="0" y="0"/>
+          <a:ext cx="0" cy="0"/>
+          <a:chOff x="0" y="0"/>
+          <a:chExt cx="0" cy="0"/>
+        </a:xfrm>
+      </p:grpSpPr>
       <p:sp>
         <p:nvSpPr>
           <p:cNvPr id="2" name="Rectangle 1"/>
@@ -6143,6 +9006,7 @@
           <a:lstStyle/>
           <a:p>
             <a:pPr algn="ctr"/>
+            <a:endParaRPr/>
           </a:p>
         </p:txBody>
       </p:sp>
@@ -6163,7 +9027,7 @@
           <a:noFill/>
         </p:spPr>
         <p:txBody>
-          <a:bodyPr wrap="square" anchor="t" lIns="0" rIns="0" tIns="0" bIns="0">
+          <a:bodyPr wrap="square" lIns="0" tIns="0" rIns="0" bIns="0" anchor="t">
             <a:spAutoFit/>
           </a:bodyPr>
           <a:lstStyle/>
@@ -6185,7 +9049,7 @@
                 <a:ea typeface="Microsoft JhengHei"/>
                 <a:cs typeface="Microsoft JhengHei"/>
               </a:rPr>
-              <a:t>两个可改的设定</a:t>
+              <a:t>什么是占地</a:t>
             </a:r>
           </a:p>
         </p:txBody>
@@ -6205,7 +9069,7 @@
             <a:avLst/>
           </a:prstGeom>
           <a:solidFill>
-            <a:srgbClr val="C79BFF"/>
+            <a:srgbClr val="6FE36F"/>
           </a:solidFill>
           <a:ln>
             <a:noFill/>
@@ -6231,6 +9095,7 @@
           <a:lstStyle/>
           <a:p>
             <a:pPr algn="ctr"/>
+            <a:endParaRPr/>
           </a:p>
         </p:txBody>
       </p:sp>
@@ -6251,7 +9116,7 @@
           <a:noFill/>
         </p:spPr>
         <p:txBody>
-          <a:bodyPr wrap="square" anchor="t" lIns="0" rIns="0" tIns="0" bIns="0">
+          <a:bodyPr wrap="square" lIns="0" tIns="0" rIns="0" bIns="0" anchor="t">
             <a:spAutoFit/>
           </a:bodyPr>
           <a:lstStyle/>
@@ -6273,21 +9138,45 @@
                 <a:ea typeface="Microsoft JhengHei"/>
                 <a:cs typeface="Microsoft JhengHei"/>
               </a:rPr>
-              <a:t>TWO KNOBS</a:t>
-            </a:r>
-          </a:p>
-        </p:txBody>
-      </p:sp>
-      <p:sp>
-        <p:nvSpPr>
-          <p:cNvPr id="6" name="TextBox 5"/>
+              <a:t>FOOTPRINT</a:t>
+            </a:r>
+          </a:p>
+        </p:txBody>
+      </p:sp>
+      <p:pic>
+        <p:nvPicPr>
+          <p:cNvPr id="6" name="Picture 5" descr="footprint_gray.png"/>
+          <p:cNvPicPr>
+            <a:picLocks noChangeAspect="1"/>
+          </p:cNvPicPr>
+          <p:nvPr/>
+        </p:nvPicPr>
+        <p:blipFill>
+          <a:blip r:embed="rId2"/>
+          <a:stretch>
+            <a:fillRect/>
+          </a:stretch>
+        </p:blipFill>
+        <p:spPr>
+          <a:xfrm>
+            <a:off x="1077943" y="1554480"/>
+            <a:ext cx="4976432" cy="4480560"/>
+          </a:xfrm>
+          <a:prstGeom prst="rect">
+            <a:avLst/>
+          </a:prstGeom>
+        </p:spPr>
+      </p:pic>
+      <p:sp>
+        <p:nvSpPr>
+          <p:cNvPr id="7" name="TextBox 6"/>
           <p:cNvSpPr txBox="1"/>
           <p:nvPr/>
         </p:nvSpPr>
         <p:spPr>
           <a:xfrm>
-            <a:off x="548640" y="1600200"/>
-            <a:ext cx="11064240" cy="4480560"/>
+            <a:off x="6949440" y="1737360"/>
+            <a:ext cx="4754880" cy="4297680"/>
           </a:xfrm>
           <a:prstGeom prst="rect">
             <a:avLst/>
@@ -6295,7 +9184,7 @@
           <a:noFill/>
         </p:spPr>
         <p:txBody>
-          <a:bodyPr wrap="square" anchor="t" lIns="0" rIns="0" tIns="0" bIns="0">
+          <a:bodyPr wrap="square" lIns="0" tIns="0" rIns="0" bIns="0" anchor="t">
             <a:spAutoFit/>
           </a:bodyPr>
           <a:lstStyle/>
@@ -6309,7 +9198,7 @@
               </a:spcAft>
             </a:pPr>
             <a:r>
-              <a:rPr sz="1800" b="1">
+              <a:rPr sz="1700" b="1">
                 <a:solidFill>
                   <a:srgbClr val="F2F5FA"/>
                 </a:solidFill>
@@ -6317,7 +9206,7 @@
                 <a:ea typeface="Microsoft JhengHei"/>
                 <a:cs typeface="Microsoft JhengHei"/>
               </a:rPr>
-              <a:t>只有两个文件可以改，用记事本就能打开：</a:t>
+              <a:t>占地：从空中俯视，一栋楼盖住的那块地的轮廓。</a:t>
             </a:r>
           </a:p>
           <a:p>
@@ -6330,7 +9219,7 @@
               </a:spcAft>
             </a:pPr>
             <a:r>
-              <a:rPr sz="1800" b="1">
+              <a:rPr sz="1700" b="1">
                 <a:solidFill>
                   <a:srgbClr val="F2F5FA"/>
                 </a:solidFill>
@@ -6338,7 +9227,7 @@
                 <a:ea typeface="Microsoft JhengHei"/>
                 <a:cs typeface="Microsoft JhengHei"/>
               </a:rPr>
-              <a:t>stakeholder_lookup.yaml：哪种建筑算哪个角色（改完重跑 Step 2）。</a:t>
+              <a:t>这里先不上色，看清原始的一批真实建筑。</a:t>
             </a:r>
           </a:p>
           <a:p>
@@ -6351,7 +9240,7 @@
               </a:spcAft>
             </a:pPr>
             <a:r>
-              <a:rPr sz="1800" b="1">
+              <a:rPr sz="1700" b="1">
                 <a:solidFill>
                   <a:srgbClr val="F2F5FA"/>
                 </a:solidFill>
@@ -6359,7 +9248,7 @@
                 <a:ea typeface="Microsoft JhengHei"/>
                 <a:cs typeface="Microsoft JhengHei"/>
               </a:rPr>
-              <a:t>power_scenarios.yaml：每个角色的高度政策 mult / cap_m（改完重跑 Step 3、4）。</a:t>
+              <a:t>样本：新加坡大巴窑，1163 栋。</a:t>
             </a:r>
           </a:p>
           <a:p>
@@ -6372,7 +9261,7 @@
               </a:spcAft>
             </a:pPr>
             <a:r>
-              <a:rPr sz="1800" b="1">
+              <a:rPr sz="1700" b="1">
                 <a:solidFill>
                   <a:srgbClr val="F2F5FA"/>
                 </a:solidFill>
@@ -6380,14 +9269,14 @@
                 <a:ea typeface="Microsoft JhengHei"/>
                 <a:cs typeface="Microsoft JhengHei"/>
               </a:rPr>
-              <a:t>其余固定不变；改的只有高度。</a:t>
-            </a:r>
-          </a:p>
-        </p:txBody>
-      </p:sp>
-      <p:sp>
-        <p:nvSpPr>
-          <p:cNvPr id="7" name="Rectangle 6"/>
+              <a:t>占地固定不动；后面只让高度变化。</a:t>
+            </a:r>
+          </a:p>
+        </p:txBody>
+      </p:sp>
+      <p:sp>
+        <p:nvSpPr>
+          <p:cNvPr id="8" name="Rectangle 7"/>
           <p:cNvSpPr/>
           <p:nvPr/>
         </p:nvSpPr>
@@ -6426,12 +9315,13 @@
           <a:lstStyle/>
           <a:p>
             <a:pPr algn="ctr"/>
-          </a:p>
-        </p:txBody>
-      </p:sp>
-      <p:sp>
-        <p:nvSpPr>
-          <p:cNvPr id="8" name="TextBox 7"/>
+            <a:endParaRPr/>
+          </a:p>
+        </p:txBody>
+      </p:sp>
+      <p:sp>
+        <p:nvSpPr>
+          <p:cNvPr id="9" name="TextBox 8"/>
           <p:cNvSpPr txBox="1"/>
           <p:nvPr/>
         </p:nvSpPr>
@@ -6446,7 +9336,7 @@
           <a:noFill/>
         </p:spPr>
         <p:txBody>
-          <a:bodyPr wrap="square" anchor="t" lIns="0" rIns="0" tIns="0" bIns="0">
+          <a:bodyPr wrap="square" lIns="0" tIns="0" rIns="0" bIns="0" anchor="t">
             <a:spAutoFit/>
           </a:bodyPr>
           <a:lstStyle/>
@@ -6475,7 +9365,7 @@
       </p:sp>
       <p:sp>
         <p:nvSpPr>
-          <p:cNvPr id="9" name="TextBox 8"/>
+          <p:cNvPr id="10" name="TextBox 9"/>
           <p:cNvSpPr txBox="1"/>
           <p:nvPr/>
         </p:nvSpPr>
@@ -6490,7 +9380,7 @@
           <a:noFill/>
         </p:spPr>
         <p:txBody>
-          <a:bodyPr wrap="square" anchor="t" lIns="0" rIns="0" tIns="0" bIns="0">
+          <a:bodyPr wrap="square" lIns="0" tIns="0" rIns="0" bIns="0" anchor="t">
             <a:spAutoFit/>
           </a:bodyPr>
           <a:lstStyle/>
@@ -6512,7 +9402,7 @@
                 <a:ea typeface="Microsoft JhengHei"/>
                 <a:cs typeface="Microsoft JhengHei"/>
               </a:rPr>
-              <a:t>6</a:t>
+              <a:t>3</a:t>
             </a:r>
           </a:p>
         </p:txBody>
@@ -6526,7 +9416,7 @@
 </file>
 
 <file path=ppt/slides/slide7.xml><?xml version="1.0" encoding="utf-8"?>
-<p:sld xmlns:a="http://schemas.openxmlformats.org/drawingml/2006/main" xmlns:p="http://schemas.openxmlformats.org/presentationml/2006/main" xmlns:r="http://schemas.openxmlformats.org/officeDocument/2006/relationships">
+<p:sld xmlns:a="http://schemas.openxmlformats.org/drawingml/2006/main" xmlns:r="http://schemas.openxmlformats.org/officeDocument/2006/relationships" xmlns:p="http://schemas.openxmlformats.org/presentationml/2006/main">
   <p:cSld>
     <p:spTree>
       <p:nvGrpSpPr>
@@ -6534,7 +9424,14 @@
         <p:cNvGrpSpPr/>
         <p:nvPr/>
       </p:nvGrpSpPr>
-      <p:grpSpPr/>
+      <p:grpSpPr>
+        <a:xfrm>
+          <a:off x="0" y="0"/>
+          <a:ext cx="0" cy="0"/>
+          <a:chOff x="0" y="0"/>
+          <a:chExt cx="0" cy="0"/>
+        </a:xfrm>
+      </p:grpSpPr>
       <p:sp>
         <p:nvSpPr>
           <p:cNvPr id="2" name="Rectangle 1"/>
@@ -6576,6 +9473,7 @@
           <a:lstStyle/>
           <a:p>
             <a:pPr algn="ctr"/>
+            <a:endParaRPr/>
           </a:p>
         </p:txBody>
       </p:sp>
@@ -6596,7 +9494,7 @@
           <a:noFill/>
         </p:spPr>
         <p:txBody>
-          <a:bodyPr wrap="square" anchor="t" lIns="0" rIns="0" tIns="0" bIns="0">
+          <a:bodyPr wrap="square" lIns="0" tIns="0" rIns="0" bIns="0" anchor="t">
             <a:spAutoFit/>
           </a:bodyPr>
           <a:lstStyle/>
@@ -6618,7 +9516,7 @@
                 <a:ea typeface="Microsoft JhengHei"/>
                 <a:cs typeface="Microsoft JhengHei"/>
               </a:rPr>
-              <a:t>两种模式：守恒与增长</a:t>
+              <a:t>四个角色</a:t>
             </a:r>
           </a:p>
         </p:txBody>
@@ -6638,7 +9536,7 @@
             <a:avLst/>
           </a:prstGeom>
           <a:solidFill>
-            <a:srgbClr val="FF6B6B"/>
+            <a:srgbClr val="FFB454"/>
           </a:solidFill>
           <a:ln>
             <a:noFill/>
@@ -6664,6 +9562,7 @@
           <a:lstStyle/>
           <a:p>
             <a:pPr algn="ctr"/>
+            <a:endParaRPr/>
           </a:p>
         </p:txBody>
       </p:sp>
@@ -6684,7 +9583,7 @@
           <a:noFill/>
         </p:spPr>
         <p:txBody>
-          <a:bodyPr wrap="square" anchor="t" lIns="0" rIns="0" tIns="0" bIns="0">
+          <a:bodyPr wrap="square" lIns="0" tIns="0" rIns="0" bIns="0" anchor="t">
             <a:spAutoFit/>
           </a:bodyPr>
           <a:lstStyle/>
@@ -6706,14 +9605,14 @@
                 <a:ea typeface="Microsoft JhengHei"/>
                 <a:cs typeface="Microsoft JhengHei"/>
               </a:rPr>
-              <a:t>CONSERVE vs GROW</a:t>
+              <a:t>FOUR STAKEHOLDERS</a:t>
             </a:r>
           </a:p>
         </p:txBody>
       </p:sp>
       <p:pic>
         <p:nvPicPr>
-          <p:cNvPr id="6" name="Picture 5" descr="cake.png"/>
+          <p:cNvPr id="6" name="Picture 5" descr="stakeholder.png"/>
           <p:cNvPicPr>
             <a:picLocks noChangeAspect="1"/>
           </p:cNvPicPr>
@@ -6727,8 +9626,8 @@
         </p:blipFill>
         <p:spPr>
           <a:xfrm>
-            <a:off x="2326824" y="1508760"/>
-            <a:ext cx="7507871" cy="3383280"/>
+            <a:off x="1077943" y="1554480"/>
+            <a:ext cx="4976432" cy="4480560"/>
           </a:xfrm>
           <a:prstGeom prst="rect">
             <a:avLst/>
@@ -6743,8 +9642,8 @@
         </p:nvSpPr>
         <p:spPr>
           <a:xfrm>
-            <a:off x="640080" y="5029200"/>
-            <a:ext cx="10881360" cy="1280160"/>
+            <a:off x="6949440" y="1737360"/>
+            <a:ext cx="4754880" cy="4297680"/>
           </a:xfrm>
           <a:prstGeom prst="rect">
             <a:avLst/>
@@ -6752,7 +9651,7 @@
           <a:noFill/>
         </p:spPr>
         <p:txBody>
-          <a:bodyPr wrap="square" anchor="t" lIns="0" rIns="0" tIns="0" bIns="0">
+          <a:bodyPr wrap="square" lIns="0" tIns="0" rIns="0" bIns="0" anchor="t">
             <a:spAutoFit/>
           </a:bodyPr>
           <a:lstStyle/>
@@ -6766,7 +9665,7 @@
               </a:spcAft>
             </a:pPr>
             <a:r>
-              <a:rPr sz="1600" b="1">
+              <a:rPr sz="1700" b="1">
                 <a:solidFill>
                   <a:srgbClr val="F2F5FA"/>
                 </a:solidFill>
@@ -6774,20 +9673,20 @@
                 <a:ea typeface="Microsoft JhengHei"/>
                 <a:cs typeface="Microsoft JhengHei"/>
               </a:rPr>
-              <a:t>守恒：像一块蛋糕重新切，总量不变，只是谁分得多。</a:t>
+              <a:t>按一张对照表，给每栋楼贴一个角色。</a:t>
             </a:r>
           </a:p>
           <a:p>
             <a:pPr>
               <a:spcBef>
-                <a:spcPts val="600"/>
+                <a:spcPts val="1200"/>
               </a:spcBef>
               <a:spcAft>
                 <a:spcPts val="0"/>
               </a:spcAft>
             </a:pPr>
             <a:r>
-              <a:rPr sz="1600" b="1">
+              <a:rPr sz="1700" b="1">
                 <a:solidFill>
                   <a:srgbClr val="F2F5FA"/>
                 </a:solidFill>
@@ -6795,7 +9694,49 @@
                 <a:ea typeface="Microsoft JhengHei"/>
                 <a:cs typeface="Microsoft JhengHei"/>
               </a:rPr>
-              <a:t>增长：在原有楼上加盖，总建筑量变多。</a:t>
+              <a:t>政府公共 / 开发商 / 居民 / 在地非正式。</a:t>
+            </a:r>
+          </a:p>
+          <a:p>
+            <a:pPr>
+              <a:spcBef>
+                <a:spcPts val="1200"/>
+              </a:spcBef>
+              <a:spcAft>
+                <a:spcPts val="0"/>
+              </a:spcAft>
+            </a:pPr>
+            <a:r>
+              <a:rPr sz="1700" b="1">
+                <a:solidFill>
+                  <a:srgbClr val="F2F5FA"/>
+                </a:solidFill>
+                <a:latin typeface="Microsoft JhengHei"/>
+                <a:ea typeface="Microsoft JhengHei"/>
+                <a:cs typeface="Microsoft JhengHei"/>
+              </a:rPr>
+              <a:t>看不出用途的标为 unknown，不猜测。</a:t>
+            </a:r>
+          </a:p>
+          <a:p>
+            <a:pPr>
+              <a:spcBef>
+                <a:spcPts val="1200"/>
+              </a:spcBef>
+              <a:spcAft>
+                <a:spcPts val="0"/>
+              </a:spcAft>
+            </a:pPr>
+            <a:r>
+              <a:rPr sz="1700" b="1">
+                <a:solidFill>
+                  <a:srgbClr val="F2F5FA"/>
+                </a:solidFill>
+                <a:latin typeface="Microsoft JhengHei"/>
+                <a:ea typeface="Microsoft JhengHei"/>
+                <a:cs typeface="Microsoft JhengHei"/>
+              </a:rPr>
+              <a:t>靠查表，不是 AI 推断。</a:t>
             </a:r>
           </a:p>
         </p:txBody>
@@ -6841,6 +9782,7 @@
           <a:lstStyle/>
           <a:p>
             <a:pPr algn="ctr"/>
+            <a:endParaRPr/>
           </a:p>
         </p:txBody>
       </p:sp>
@@ -6861,7 +9803,7 @@
           <a:noFill/>
         </p:spPr>
         <p:txBody>
-          <a:bodyPr wrap="square" anchor="t" lIns="0" rIns="0" tIns="0" bIns="0">
+          <a:bodyPr wrap="square" lIns="0" tIns="0" rIns="0" bIns="0" anchor="t">
             <a:spAutoFit/>
           </a:bodyPr>
           <a:lstStyle/>
@@ -6905,7 +9847,7 @@
           <a:noFill/>
         </p:spPr>
         <p:txBody>
-          <a:bodyPr wrap="square" anchor="t" lIns="0" rIns="0" tIns="0" bIns="0">
+          <a:bodyPr wrap="square" lIns="0" tIns="0" rIns="0" bIns="0" anchor="t">
             <a:spAutoFit/>
           </a:bodyPr>
           <a:lstStyle/>
@@ -6927,7 +9869,7 @@
                 <a:ea typeface="Microsoft JhengHei"/>
                 <a:cs typeface="Microsoft JhengHei"/>
               </a:rPr>
-              <a:t>7</a:t>
+              <a:t>4</a:t>
             </a:r>
           </a:p>
         </p:txBody>
@@ -6941,7 +9883,7 @@
 </file>
 
 <file path=ppt/slides/slide8.xml><?xml version="1.0" encoding="utf-8"?>
-<p:sld xmlns:a="http://schemas.openxmlformats.org/drawingml/2006/main" xmlns:p="http://schemas.openxmlformats.org/presentationml/2006/main" xmlns:r="http://schemas.openxmlformats.org/officeDocument/2006/relationships">
+<p:sld xmlns:a="http://schemas.openxmlformats.org/drawingml/2006/main" xmlns:r="http://schemas.openxmlformats.org/officeDocument/2006/relationships" xmlns:p="http://schemas.openxmlformats.org/presentationml/2006/main">
   <p:cSld>
     <p:spTree>
       <p:nvGrpSpPr>
@@ -6949,7 +9891,14 @@
         <p:cNvGrpSpPr/>
         <p:nvPr/>
       </p:nvGrpSpPr>
-      <p:grpSpPr/>
+      <p:grpSpPr>
+        <a:xfrm>
+          <a:off x="0" y="0"/>
+          <a:ext cx="0" cy="0"/>
+          <a:chOff x="0" y="0"/>
+          <a:chExt cx="0" cy="0"/>
+        </a:xfrm>
+      </p:grpSpPr>
       <p:sp>
         <p:nvSpPr>
           <p:cNvPr id="2" name="Rectangle 1"/>
@@ -6991,6 +9940,7 @@
           <a:lstStyle/>
           <a:p>
             <a:pPr algn="ctr"/>
+            <a:endParaRPr/>
           </a:p>
         </p:txBody>
       </p:sp>
@@ -7011,7 +9961,7 @@
           <a:noFill/>
         </p:spPr>
         <p:txBody>
-          <a:bodyPr wrap="square" anchor="t" lIns="0" rIns="0" tIns="0" bIns="0">
+          <a:bodyPr wrap="square" lIns="0" tIns="0" rIns="0" bIns="0" anchor="t">
             <a:spAutoFit/>
           </a:bodyPr>
           <a:lstStyle/>
@@ -7033,7 +9983,7 @@
                 <a:ea typeface="Microsoft JhengHei"/>
                 <a:cs typeface="Microsoft JhengHei"/>
               </a:rPr>
-              <a:t>权力情景</a:t>
+              <a:t>各角色的规模</a:t>
             </a:r>
           </a:p>
         </p:txBody>
@@ -7053,7 +10003,7 @@
             <a:avLst/>
           </a:prstGeom>
           <a:solidFill>
-            <a:srgbClr val="5AB0FF"/>
+            <a:srgbClr val="4FD6D6"/>
           </a:solidFill>
           <a:ln>
             <a:noFill/>
@@ -7079,6 +10029,7 @@
           <a:lstStyle/>
           <a:p>
             <a:pPr algn="ctr"/>
+            <a:endParaRPr/>
           </a:p>
         </p:txBody>
       </p:sp>
@@ -7099,7 +10050,7 @@
           <a:noFill/>
         </p:spPr>
         <p:txBody>
-          <a:bodyPr wrap="square" anchor="t" lIns="0" rIns="0" tIns="0" bIns="0">
+          <a:bodyPr wrap="square" lIns="0" tIns="0" rIns="0" bIns="0" anchor="t">
             <a:spAutoFit/>
           </a:bodyPr>
           <a:lstStyle/>
@@ -7121,14 +10072,14 @@
                 <a:ea typeface="Microsoft JhengHei"/>
                 <a:cs typeface="Microsoft JhengHei"/>
               </a:rPr>
-              <a:t>POWER SCENARIOS</a:t>
+              <a:t>WHO HOLDS WHAT</a:t>
             </a:r>
           </a:p>
         </p:txBody>
       </p:sp>
       <p:pic>
         <p:nvPicPr>
-          <p:cNvPr id="6" name="Picture 5" descr="heatmap.png"/>
+          <p:cNvPr id="6" name="Picture 5" descr="stakeholder_bars.png"/>
           <p:cNvPicPr>
             <a:picLocks noChangeAspect="1"/>
           </p:cNvPicPr>
@@ -7142,8 +10093,8 @@
         </p:blipFill>
         <p:spPr>
           <a:xfrm>
-            <a:off x="3134360" y="1508760"/>
-            <a:ext cx="5892800" cy="3383280"/>
+            <a:off x="2342648" y="1508760"/>
+            <a:ext cx="7476223" cy="3383280"/>
           </a:xfrm>
           <a:prstGeom prst="rect">
             <a:avLst/>
@@ -7167,7 +10118,7 @@
           <a:noFill/>
         </p:spPr>
         <p:txBody>
-          <a:bodyPr wrap="square" anchor="t" lIns="0" rIns="0" tIns="0" bIns="0">
+          <a:bodyPr wrap="square" lIns="0" tIns="0" rIns="0" bIns="0" anchor="t">
             <a:spAutoFit/>
           </a:bodyPr>
           <a:lstStyle/>
@@ -7189,7 +10140,7 @@
                 <a:ea typeface="Microsoft JhengHei"/>
                 <a:cs typeface="Microsoft JhengHei"/>
               </a:rPr>
-              <a:t>每个情景给各角色一个高度乘数：红=拔高，蓝=压低。</a:t>
+              <a:t>左：每个角色有多少栋。右：各占多少面积。</a:t>
             </a:r>
           </a:p>
           <a:p>
@@ -7210,7 +10161,7 @@
                 <a:ea typeface="Microsoft JhengHei"/>
                 <a:cs typeface="Microsoft JhengHei"/>
               </a:rPr>
-              <a:t>后面所有形态差异，都来自这张表。</a:t>
+              <a:t>这是改高度之前的起点。</a:t>
             </a:r>
           </a:p>
         </p:txBody>
@@ -7256,6 +10207,7 @@
           <a:lstStyle/>
           <a:p>
             <a:pPr algn="ctr"/>
+            <a:endParaRPr/>
           </a:p>
         </p:txBody>
       </p:sp>
@@ -7276,7 +10228,7 @@
           <a:noFill/>
         </p:spPr>
         <p:txBody>
-          <a:bodyPr wrap="square" anchor="t" lIns="0" rIns="0" tIns="0" bIns="0">
+          <a:bodyPr wrap="square" lIns="0" tIns="0" rIns="0" bIns="0" anchor="t">
             <a:spAutoFit/>
           </a:bodyPr>
           <a:lstStyle/>
@@ -7320,7 +10272,7 @@
           <a:noFill/>
         </p:spPr>
         <p:txBody>
-          <a:bodyPr wrap="square" anchor="t" lIns="0" rIns="0" tIns="0" bIns="0">
+          <a:bodyPr wrap="square" lIns="0" tIns="0" rIns="0" bIns="0" anchor="t">
             <a:spAutoFit/>
           </a:bodyPr>
           <a:lstStyle/>
@@ -7342,7 +10294,7 @@
                 <a:ea typeface="Microsoft JhengHei"/>
                 <a:cs typeface="Microsoft JhengHei"/>
               </a:rPr>
-              <a:t>8</a:t>
+              <a:t>5</a:t>
             </a:r>
           </a:p>
         </p:txBody>
@@ -7356,7 +10308,7 @@
 </file>
 
 <file path=ppt/slides/slide9.xml><?xml version="1.0" encoding="utf-8"?>
-<p:sld xmlns:a="http://schemas.openxmlformats.org/drawingml/2006/main" xmlns:p="http://schemas.openxmlformats.org/presentationml/2006/main" xmlns:r="http://schemas.openxmlformats.org/officeDocument/2006/relationships">
+<p:sld xmlns:a="http://schemas.openxmlformats.org/drawingml/2006/main" xmlns:r="http://schemas.openxmlformats.org/officeDocument/2006/relationships" xmlns:p="http://schemas.openxmlformats.org/presentationml/2006/main">
   <p:cSld>
     <p:spTree>
       <p:nvGrpSpPr>
@@ -7364,7 +10316,14 @@
         <p:cNvGrpSpPr/>
         <p:nvPr/>
       </p:nvGrpSpPr>
-      <p:grpSpPr/>
+      <p:grpSpPr>
+        <a:xfrm>
+          <a:off x="0" y="0"/>
+          <a:ext cx="0" cy="0"/>
+          <a:chOff x="0" y="0"/>
+          <a:chExt cx="0" cy="0"/>
+        </a:xfrm>
+      </p:grpSpPr>
       <p:sp>
         <p:nvSpPr>
           <p:cNvPr id="2" name="Rectangle 1"/>
@@ -7406,6 +10365,7 @@
           <a:lstStyle/>
           <a:p>
             <a:pPr algn="ctr"/>
+            <a:endParaRPr/>
           </a:p>
         </p:txBody>
       </p:sp>
@@ -7426,7 +10386,7 @@
           <a:noFill/>
         </p:spPr>
         <p:txBody>
-          <a:bodyPr wrap="square" anchor="t" lIns="0" rIns="0" tIns="0" bIns="0">
+          <a:bodyPr wrap="square" lIns="0" tIns="0" rIns="0" bIns="0" anchor="t">
             <a:spAutoFit/>
           </a:bodyPr>
           <a:lstStyle/>
@@ -7448,7 +10408,7 @@
                 <a:ea typeface="Microsoft JhengHei"/>
                 <a:cs typeface="Microsoft JhengHei"/>
               </a:rPr>
-              <a:t>套用情景，看天际线</a:t>
+              <a:t>两个可改的设定</a:t>
             </a:r>
           </a:p>
         </p:txBody>
@@ -7468,7 +10428,7 @@
             <a:avLst/>
           </a:prstGeom>
           <a:solidFill>
-            <a:srgbClr val="6FE36F"/>
+            <a:srgbClr val="C79BFF"/>
           </a:solidFill>
           <a:ln>
             <a:noFill/>
@@ -7494,6 +10454,7 @@
           <a:lstStyle/>
           <a:p>
             <a:pPr algn="ctr"/>
+            <a:endParaRPr/>
           </a:p>
         </p:txBody>
       </p:sp>
@@ -7514,7 +10475,7 @@
           <a:noFill/>
         </p:spPr>
         <p:txBody>
-          <a:bodyPr wrap="square" anchor="t" lIns="0" rIns="0" tIns="0" bIns="0">
+          <a:bodyPr wrap="square" lIns="0" tIns="0" rIns="0" bIns="0" anchor="t">
             <a:spAutoFit/>
           </a:bodyPr>
           <a:lstStyle/>
@@ -7536,45 +10497,21 @@
                 <a:ea typeface="Microsoft JhengHei"/>
                 <a:cs typeface="Microsoft JhengHei"/>
               </a:rPr>
-              <a:t>APPLY &amp; COMPARE</a:t>
-            </a:r>
-          </a:p>
-        </p:txBody>
-      </p:sp>
-      <p:pic>
-        <p:nvPicPr>
-          <p:cNvPr id="6" name="Picture 5" descr="skyline.png"/>
-          <p:cNvPicPr>
-            <a:picLocks noChangeAspect="1"/>
-          </p:cNvPicPr>
-          <p:nvPr/>
-        </p:nvPicPr>
-        <p:blipFill>
-          <a:blip r:embed="rId2"/>
-          <a:stretch>
-            <a:fillRect/>
-          </a:stretch>
-        </p:blipFill>
-        <p:spPr>
-          <a:xfrm>
-            <a:off x="1279846" y="1554480"/>
-            <a:ext cx="4572626" cy="4480560"/>
-          </a:xfrm>
-          <a:prstGeom prst="rect">
-            <a:avLst/>
-          </a:prstGeom>
-        </p:spPr>
-      </p:pic>
-      <p:sp>
-        <p:nvSpPr>
-          <p:cNvPr id="7" name="TextBox 6"/>
+              <a:t>TWO KNOBS</a:t>
+            </a:r>
+          </a:p>
+        </p:txBody>
+      </p:sp>
+      <p:sp>
+        <p:nvSpPr>
+          <p:cNvPr id="6" name="TextBox 5"/>
           <p:cNvSpPr txBox="1"/>
           <p:nvPr/>
         </p:nvSpPr>
         <p:spPr>
           <a:xfrm>
-            <a:off x="6949440" y="1737360"/>
-            <a:ext cx="4754880" cy="4297680"/>
+            <a:off x="548640" y="1600200"/>
+            <a:ext cx="11064240" cy="4480560"/>
           </a:xfrm>
           <a:prstGeom prst="rect">
             <a:avLst/>
@@ -7582,7 +10519,7 @@
           <a:noFill/>
         </p:spPr>
         <p:txBody>
-          <a:bodyPr wrap="square" anchor="t" lIns="0" rIns="0" tIns="0" bIns="0">
+          <a:bodyPr wrap="square" lIns="0" tIns="0" rIns="0" bIns="0" anchor="t">
             <a:spAutoFit/>
           </a:bodyPr>
           <a:lstStyle/>
@@ -7596,7 +10533,7 @@
               </a:spcAft>
             </a:pPr>
             <a:r>
-              <a:rPr sz="1700" b="1">
+              <a:rPr sz="1800" b="1">
                 <a:solidFill>
                   <a:srgbClr val="F2F5FA"/>
                 </a:solidFill>
@@ -7604,7 +10541,7 @@
                 <a:ea typeface="Microsoft JhengHei"/>
                 <a:cs typeface="Microsoft JhengHei"/>
               </a:rPr>
-              <a:t>同一批楼，同样的占地和标签，分别套四个情景。</a:t>
+              <a:t>只有两个文件可以改，用记事本就能打开：</a:t>
             </a:r>
           </a:p>
           <a:p>
@@ -7617,7 +10554,7 @@
               </a:spcAft>
             </a:pPr>
             <a:r>
-              <a:rPr sz="1700" b="1">
+              <a:rPr sz="1800" b="1">
                 <a:solidFill>
                   <a:srgbClr val="F2F5FA"/>
                 </a:solidFill>
@@ -7625,7 +10562,7 @@
                 <a:ea typeface="Microsoft JhengHei"/>
                 <a:cs typeface="Microsoft JhengHei"/>
               </a:rPr>
-              <a:t>颜色代表高度，由低到高。</a:t>
+              <a:t>stakeholder_lookup.yaml：哪种建筑算哪个角色（改完重跑 Step 2）。</a:t>
             </a:r>
           </a:p>
           <a:p>
@@ -7638,7 +10575,7 @@
               </a:spcAft>
             </a:pPr>
             <a:r>
-              <a:rPr sz="1700" b="1">
+              <a:rPr sz="1800" b="1">
                 <a:solidFill>
                   <a:srgbClr val="F2F5FA"/>
                 </a:solidFill>
@@ -7646,14 +10583,35 @@
                 <a:ea typeface="Microsoft JhengHei"/>
                 <a:cs typeface="Microsoft JhengHei"/>
               </a:rPr>
-              <a:t>差异完全来自不同情景给各角色的权力。</a:t>
-            </a:r>
-          </a:p>
-        </p:txBody>
-      </p:sp>
-      <p:sp>
-        <p:nvSpPr>
-          <p:cNvPr id="8" name="Rectangle 7"/>
+              <a:t>power_scenarios.yaml：每个角色的高度政策 mult / cap_m（改完重跑 Step 3、4）。</a:t>
+            </a:r>
+          </a:p>
+          <a:p>
+            <a:pPr>
+              <a:spcBef>
+                <a:spcPts val="1200"/>
+              </a:spcBef>
+              <a:spcAft>
+                <a:spcPts val="0"/>
+              </a:spcAft>
+            </a:pPr>
+            <a:r>
+              <a:rPr sz="1800" b="1">
+                <a:solidFill>
+                  <a:srgbClr val="F2F5FA"/>
+                </a:solidFill>
+                <a:latin typeface="Microsoft JhengHei"/>
+                <a:ea typeface="Microsoft JhengHei"/>
+                <a:cs typeface="Microsoft JhengHei"/>
+              </a:rPr>
+              <a:t>其余固定不变；改的只有高度。</a:t>
+            </a:r>
+          </a:p>
+        </p:txBody>
+      </p:sp>
+      <p:sp>
+        <p:nvSpPr>
+          <p:cNvPr id="7" name="Rectangle 6"/>
           <p:cNvSpPr/>
           <p:nvPr/>
         </p:nvSpPr>
@@ -7692,12 +10650,13 @@
           <a:lstStyle/>
           <a:p>
             <a:pPr algn="ctr"/>
-          </a:p>
-        </p:txBody>
-      </p:sp>
-      <p:sp>
-        <p:nvSpPr>
-          <p:cNvPr id="9" name="TextBox 8"/>
+            <a:endParaRPr/>
+          </a:p>
+        </p:txBody>
+      </p:sp>
+      <p:sp>
+        <p:nvSpPr>
+          <p:cNvPr id="8" name="TextBox 7"/>
           <p:cNvSpPr txBox="1"/>
           <p:nvPr/>
         </p:nvSpPr>
@@ -7712,7 +10671,7 @@
           <a:noFill/>
         </p:spPr>
         <p:txBody>
-          <a:bodyPr wrap="square" anchor="t" lIns="0" rIns="0" tIns="0" bIns="0">
+          <a:bodyPr wrap="square" lIns="0" tIns="0" rIns="0" bIns="0" anchor="t">
             <a:spAutoFit/>
           </a:bodyPr>
           <a:lstStyle/>
@@ -7741,7 +10700,7 @@
       </p:sp>
       <p:sp>
         <p:nvSpPr>
-          <p:cNvPr id="10" name="TextBox 9"/>
+          <p:cNvPr id="9" name="TextBox 8"/>
           <p:cNvSpPr txBox="1"/>
           <p:nvPr/>
         </p:nvSpPr>
@@ -7756,7 +10715,7 @@
           <a:noFill/>
         </p:spPr>
         <p:txBody>
-          <a:bodyPr wrap="square" anchor="t" lIns="0" rIns="0" tIns="0" bIns="0">
+          <a:bodyPr wrap="square" lIns="0" tIns="0" rIns="0" bIns="0" anchor="t">
             <a:spAutoFit/>
           </a:bodyPr>
           <a:lstStyle/>
@@ -7778,7 +10737,7 @@
                 <a:ea typeface="Microsoft JhengHei"/>
                 <a:cs typeface="Microsoft JhengHei"/>
               </a:rPr>
-              <a:t>9</a:t>
+              <a:t>6</a:t>
             </a:r>
           </a:p>
         </p:txBody>
